--- a/canvas_material/lectures/powerpoint/Session16-FrontDoorWorkshop.pptx
+++ b/canvas_material/lectures/powerpoint/Session16-FrontDoorWorkshop.pptx
@@ -1040,7 +1040,7 @@
           <a:p>
             <a:r>
               <a:rPr lang="en-US" dirty="0"/>
-              <a:t>Twenty minutes, one small PR per item. Rove hard. Spot-check license fields (wrong year and 'Copyright [yyyy] [name]' left in are the common misses). Read README first sentences back to their authors: would a stranger know what this is? The placeholder takes five minutes; don't let anyone write real setup steps for code that doesn't exist yet. That guide comes in Session 20. Warn at ten minutes and at two.</a:t>
+              <a:t>Twenty minutes, one small PR per item. Rove hard. Spot-check license fields: MIT and BSD need a year and holder; Apache's '[yyyy] [name of copyright owner]' line is a file-header template in the appendix and stays as written, so don't flag it. Check reporting contacts: an address they'll actually read, a response time, and, solo, GitHub's reporting tools for reports about the maintainer. Read README first sentences back to their authors: would a stranger know what this is? The placeholder takes five minutes; don't let anyone write real setup steps for code that doesn't exist yet. That guide comes in Session 20. Warn at ten minutes and at two.</a:t>
             </a:r>
             <a:endParaRPr lang="en-US" dirty="0"/>
           </a:p>
@@ -6919,7 +6919,7 @@
                 <a:ea typeface="Calibri" pitchFamily="34" charset="-122"/>
                 <a:cs typeface="Calibri" pitchFamily="34" charset="-120"/>
               </a:rPr>
-              <a:t>The exact text. Year and holder filled in. Rationale goes in CONTRIBUTING.</a:t>
+              <a:t>The exact text. Fill in fields only if it has them (MIT, BSD). Rationale goes in CONTRIBUTING.</a:t>
             </a:r>
             <a:endParaRPr lang="en-US" sz="1500" dirty="0"/>
           </a:p>
@@ -7070,7 +7070,7 @@
                 <a:ea typeface="Calibri" pitchFamily="34" charset="-122"/>
                 <a:cs typeface="Calibri" pitchFamily="34" charset="-120"/>
               </a:rPr>
-              <a:t>Contributor Covenant via GitHub's template. Fill in the reporting contact; read the enforcement section.</a:t>
+              <a:t>Contributor Covenant, adopted. A contact you'll check, a response time, and a route if it's about you.</a:t>
             </a:r>
             <a:endParaRPr lang="en-US" sz="1500" dirty="0"/>
           </a:p>

--- a/canvas_material/lectures/powerpoint/Session16-FrontDoorWorkshop.pptx
+++ b/canvas_material/lectures/powerpoint/Session16-FrontDoorWorkshop.pptx
@@ -16,9 +16,10 @@
     <p:sldId id="264" r:id="rId10"/>
     <p:sldId id="265" r:id="rId11"/>
     <p:sldId id="266" r:id="rId12"/>
+    <p:sldId id="267" r:id="rId13"/>
   </p:sldIdLst>
   <p:notesMasterIdLst>
-    <p:notesMasterId r:id="rId13"/>
+    <p:notesMasterId r:id="rId14"/>
   </p:notesMasterIdLst>
   <p:sldSz cx="12161520" cy="6858000"/>
   <p:notesSz cx="6858000" cy="12161520"/>
@@ -600,7 +601,7 @@
           <a:p>
             <a:r>
               <a:rPr lang="en-US" dirty="0"/>
-              <a:t>Two minutes. Run the three commands live on Prop Loft or any repo so they see the tag appear on GitHub. A tag is how real projects mark a release: it names a state that doesn't move when main does. To resubmit before the deadline, or for a revision, move the tag with tag -fa and push -f, then resubmit; the handout has the commands. No sheet photo caps Newcomer usability at Proficient.</a:t>
+              <a:t>Ten minutes. The top line is the test: ask two or three founders to read their partner's 'what is this?' aloud next to their own first sentence. The citation in the PR or issue is how the fix traces back to the read for grading. Seed issues are real next work, not busywork; they're the first items in Monday's backlog (CP8). Anything unfinished is fine as long as it's done by Friday.</a:t>
             </a:r>
             <a:endParaRPr lang="en-US" dirty="0"/>
           </a:p>
@@ -688,7 +689,7 @@
           <a:p>
             <a:r>
               <a:rPr lang="en-US" dirty="0"/>
-              <a:t>Five minutes. Say the one-liner, then the Friday list. In three weeks a classmate audits these repos cold, for a grade, and adds install and run; today's read was the preview. Remind them that CP9 is due Nov 18 and that today produced good portfolio material. Monday turns the proposal and design into epics, milestones, and a populated tracker (CP8), starting from the seed issues filed today.</a:t>
+              <a:t>Two minutes. Run the three commands live on Prop Loft or any repo so they see the tag appear on GitHub. A tag is how real projects mark a release: it names a state that doesn't move when main does. To resubmit before the deadline, or for a revision, move the tag with tag -fa and push -f, then resubmit; the handout has the commands. No sheet photo caps Newcomer usability at Proficient.</a:t>
             </a:r>
             <a:endParaRPr lang="en-US" dirty="0"/>
           </a:p>
@@ -712,6 +713,94 @@
             <a:fld id="{F7021451-1387-4CA6-816F-3879F97B5CBC}" type="slidenum">
               <a:rPr lang="en-US"/>
               <a:t>11</a:t>
+            </a:fld>
+            <a:endParaRPr lang="en-US"/>
+          </a:p>
+        </p:txBody>
+      </p:sp>
+    </p:spTree>
+    <p:extLst>
+      <p:ext uri="{BB962C8B-B14F-4D97-AF65-F5344CB8AC3E}">
+        <p14:creationId xmlns:p14="http://schemas.microsoft.com/office/powerpoint/2010/main" val="1024086991"/>
+      </p:ext>
+    </p:extLst>
+  </p:cSld>
+  <p:clrMapOvr>
+    <a:masterClrMapping/>
+  </p:clrMapOvr>
+</p:notes>
+</file>
+
+<file path=ppt/notesSlides/notesSlide12.xml><?xml version="1.0" encoding="utf-8"?>
+<p:notes xmlns:a="http://schemas.openxmlformats.org/drawingml/2006/main" xmlns:r="http://schemas.openxmlformats.org/officeDocument/2006/relationships" xmlns:p="http://schemas.openxmlformats.org/presentationml/2006/main">
+  <p:cSld>
+    <p:spTree>
+      <p:nvGrpSpPr>
+        <p:cNvPr id="1" name=""/>
+        <p:cNvGrpSpPr/>
+        <p:nvPr/>
+      </p:nvGrpSpPr>
+      <p:grpSpPr>
+        <a:xfrm>
+          <a:off x="0" y="0"/>
+          <a:ext cx="0" cy="0"/>
+          <a:chOff x="0" y="0"/>
+          <a:chExt cx="0" cy="0"/>
+        </a:xfrm>
+      </p:grpSpPr>
+      <p:sp>
+        <p:nvSpPr>
+          <p:cNvPr id="2" name="Slide Image Placeholder 1"/>
+          <p:cNvSpPr>
+            <a:spLocks noGrp="1" noRot="1" noChangeAspect="1"/>
+          </p:cNvSpPr>
+          <p:nvPr>
+            <p:ph type="sldImg"/>
+          </p:nvPr>
+        </p:nvSpPr>
+        <p:spPr/>
+      </p:sp>
+      <p:sp>
+        <p:nvSpPr>
+          <p:cNvPr id="3" name="Notes Placeholder 2"/>
+          <p:cNvSpPr>
+            <a:spLocks noGrp="1"/>
+          </p:cNvSpPr>
+          <p:nvPr>
+            <p:ph type="body" idx="1"/>
+          </p:nvPr>
+        </p:nvSpPr>
+        <p:spPr/>
+        <p:txBody>
+          <a:bodyPr/>
+          <a:lstStyle/>
+          <a:p>
+            <a:r>
+              <a:rPr lang="en-US" dirty="0"/>
+              <a:t>Five minutes. Say the one-liner, then the Friday list. In three weeks a classmate audits these repos cold, for a grade, and adds install and run; today's read was the preview. Remind them that CP9 is due Nov 18 and that today produced good portfolio material. Monday turns the proposal and design into epics, milestones, and a populated tracker (CP8), starting from the seed issues filed today.</a:t>
+            </a:r>
+            <a:endParaRPr lang="en-US" dirty="0"/>
+          </a:p>
+        </p:txBody>
+      </p:sp>
+      <p:sp>
+        <p:nvSpPr>
+          <p:cNvPr id="4" name="Slide Number Placeholder 3"/>
+          <p:cNvSpPr>
+            <a:spLocks noGrp="1"/>
+          </p:cNvSpPr>
+          <p:nvPr>
+            <p:ph type="sldNum" sz="quarter" idx="10"/>
+          </p:nvPr>
+        </p:nvSpPr>
+        <p:spPr/>
+        <p:txBody>
+          <a:bodyPr/>
+          <a:lstStyle/>
+          <a:p>
+            <a:fld id="{F7021451-1387-4CA6-816F-3879F97B5CBC}" type="slidenum">
+              <a:rPr lang="en-US"/>
+              <a:t>12</a:t>
             </a:fld>
             <a:endParaRPr lang="en-US"/>
           </a:p>
@@ -1128,7 +1217,7 @@
           <a:p>
             <a:r>
               <a:rPr lang="en-US" dirty="0"/>
-              <a:t>One minute, shown during block 1 for anyone stuck on the README. This is the shape the rubric gives full credit for, and it's true of any project in early development: say what state it's in, what's coming, and where that's tracked. The stack line comes straight from the design doc. Install and run get graded later, in the repo audit, once there's something to run. A quickstart that fails costs points twice.</a:t>
+              <a:t>Two minutes, as block 1 opens, because templates are on its list. Left: the bug form is Monday's anatomy turned into required fields, so a reporter can't skip steps or expected-versus-actual. Click: the feature form is the other half of Monday, the need, the user, and today's workaround, with the solution last and optional. Rich's form said no to new features; this one points at the non-goals instead. Click: labels. Point them at github.com/prop-loft/prop-loft/tree/session-16/.github/ISSUE_TEMPLATE for the YAML; their fields should fit their own project. Say that both kinds are fine: forms (.yml, what Prop Loft uses) can require fields; Markdown templates (.md, what Rich and most repos they'll browse use) are a pre-filled text box, quicker to write. Same folder either way.</a:t>
             </a:r>
             <a:endParaRPr lang="en-US" dirty="0"/>
           </a:p>
@@ -1216,7 +1305,7 @@
           <a:p>
             <a:r>
               <a:rPr lang="en-US" dirty="0"/>
-              <a:t>Twenty minutes. These can't be finished here, and that's the plan: get both far enough to be read in the next block. The amber steps are the ones first drafts skip; most CONTRIBUTING files start with rules. Push on 'what should a newcomer do first?' The norms are the public parts of the charter, rewritten for a stranger. Solo founders still owe an answer on decisions. At two minutes: push what you have, even rough.</a:t>
+              <a:t>One minute, shown during block 1 for anyone stuck on the README. This is the shape the rubric gives full credit for, and it's true of any project in early development: say what state it's in, what's coming, and where that's tracked. The stack line comes straight from the design doc. Install and run get graded later, in the repo audit, once there's something to run. A quickstart that fails costs points twice.</a:t>
             </a:r>
             <a:endParaRPr lang="en-US" dirty="0"/>
           </a:p>
@@ -1304,7 +1393,7 @@
           <a:p>
             <a:r>
               <a:rPr lang="en-US" dirty="0"/>
-              <a:t>Hand out the sheets. Pairs swap; in a triple, rotate so each person reads one repo and is read by one; read for anyone whose partner is out. Insist on the logged-out window, because a signed-in view hides what a stranger can't see. Readers who finish early should reread the README's first paragraph only and check whether their 'what is this?' still holds. Ten minutes reading, five writing. Authors stay quiet; explaining your docs is the thing the docs should have done.</a:t>
+              <a:t>Twenty minutes. These can't be finished here, and that's the plan: get both far enough to be read in the next block. The amber steps are the ones first drafts skip; most CONTRIBUTING files start with rules. Push on 'what should a newcomer do first?' The norms are the public parts of the charter, rewritten for a stranger. Solo founders still owe an answer on decisions. At two minutes: push what you have, even rough.</a:t>
             </a:r>
             <a:endParaRPr lang="en-US" dirty="0"/>
           </a:p>
@@ -1392,7 +1481,7 @@
           <a:p>
             <a:r>
               <a:rPr lang="en-US" dirty="0"/>
-              <a:t>Ten minutes. The top line is the test: ask two or three founders to read their partner's 'what is this?' aloud next to their own first sentence. The citation in the PR or issue is how the fix traces back to the read for grading. Seed issues are real next work, not busywork; they're the first items in Monday's backlog (CP8). Anything unfinished is fine as long as it's done by Friday.</a:t>
+              <a:t>Hand out the sheets. Pairs swap; in a triple, rotate so each person reads one repo and is read by one; read for anyone whose partner is out. Insist on the logged-out window, because a signed-in view hides what a stranger can't see. Readers who finish early should reread the README's first paragraph only and check whether their 'what is this?' still holds. Ten minutes reading, five writing. Authors stay quiet; explaining your docs is the thing the docs should have done.</a:t>
             </a:r>
             <a:endParaRPr lang="en-US" dirty="0"/>
           </a:p>
@@ -2074,7 +2163,7 @@
                 <a:ea typeface="Calibri" pitchFamily="34" charset="-122"/>
                 <a:cs typeface="Calibri" pitchFamily="34" charset="-120"/>
               </a:rPr>
-              <a:t>SUBMITTING CP7</a:t>
+              <a:t>ACT ON IT · 10 MIN</a:t>
             </a:r>
             <a:endParaRPr lang="en-US" sz="1400" dirty="0"/>
           </a:p>
@@ -2113,7 +2202,7 @@
                 <a:ea typeface="Cambria" pitchFamily="34" charset="-122"/>
                 <a:cs typeface="Cambria" pitchFamily="34" charset="-120"/>
               </a:rPr>
-              <a:t>Tag it, the way a project marks a release</a:t>
+              <a:t>Read your sheet, then fix or file</a:t>
             </a:r>
             <a:endParaRPr lang="en-US" sz="3100" dirty="0"/>
           </a:p>
@@ -2121,61 +2210,22 @@
       </p:sp>
       <p:sp>
         <p:nvSpPr>
-          <p:cNvPr id="5" name="Text 3"/>
-          <p:cNvSpPr/>
-          <p:nvPr/>
-        </p:nvSpPr>
-        <p:spPr>
-          <a:xfrm>
-            <a:off x="548640" y="1737360"/>
-            <a:ext cx="10972800" cy="365760"/>
-          </a:xfrm>
-          <a:prstGeom prst="rect">
-            <a:avLst/>
-          </a:prstGeom>
-          <a:noFill/>
-          <a:ln/>
-        </p:spPr>
-        <p:txBody>
-          <a:bodyPr wrap="square" lIns="0" tIns="0" rIns="0" bIns="0" rtlCol="0" anchor="ctr"/>
-          <a:lstStyle/>
-          <a:p>
-            <a:pPr indent="0" marL="0">
-              <a:buNone/>
-            </a:pPr>
-            <a:r>
-              <a:rPr lang="en-US" sz="1600" i="1" dirty="0">
-                <a:solidFill>
-                  <a:srgbClr val="5F7284"/>
-                </a:solidFill>
-                <a:latin typeface="Calibri" pitchFamily="34" charset="0"/>
-                <a:ea typeface="Calibri" pitchFamily="34" charset="-122"/>
-                <a:cs typeface="Calibri" pitchFamily="34" charset="-120"/>
-              </a:rPr>
-              <a:t>When everything is merged to main:</a:t>
-            </a:r>
-            <a:endParaRPr lang="en-US" sz="1600" dirty="0"/>
-          </a:p>
-        </p:txBody>
-      </p:sp>
-      <p:sp>
-        <p:nvSpPr>
-          <p:cNvPr id="6" name="Shape 4"/>
-          <p:cNvSpPr/>
-          <p:nvPr/>
-        </p:nvSpPr>
-        <p:spPr>
-          <a:xfrm>
-            <a:off x="548640" y="2148840"/>
-            <a:ext cx="11064240" cy="1600200"/>
+          <p:cNvPr id="5" name="Shape 3"/>
+          <p:cNvSpPr/>
+          <p:nvPr/>
+        </p:nvSpPr>
+        <p:spPr>
+          <a:xfrm>
+            <a:off x="548640" y="1783080"/>
+            <a:ext cx="11064240" cy="960120"/>
           </a:xfrm>
           <a:prstGeom prst="roundRect">
             <a:avLst>
-              <a:gd name="adj" fmla="val 4571"/>
+              <a:gd name="adj" fmla="val 8571"/>
             </a:avLst>
           </a:prstGeom>
           <a:solidFill>
-            <a:srgbClr val="1E3352"/>
+            <a:srgbClr val="14233A"/>
           </a:solidFill>
           <a:ln/>
           <a:effectLst>
@@ -2189,100 +2239,57 @@
       </p:sp>
       <p:sp>
         <p:nvSpPr>
-          <p:cNvPr id="7" name="Text 5"/>
-          <p:cNvSpPr/>
-          <p:nvPr/>
-        </p:nvSpPr>
-        <p:spPr>
-          <a:xfrm>
-            <a:off x="822960" y="2313432"/>
-            <a:ext cx="10515600" cy="1271016"/>
-          </a:xfrm>
-          <a:prstGeom prst="rect">
-            <a:avLst/>
-          </a:prstGeom>
-          <a:noFill/>
-          <a:ln/>
-        </p:spPr>
-        <p:txBody>
-          <a:bodyPr wrap="square" lIns="0" tIns="0" rIns="0" bIns="0" rtlCol="0" anchor="t"/>
-          <a:lstStyle/>
-          <a:p>
-            <a:pPr indent="0" marL="0">
-              <a:lnSpc>
-                <a:spcPct val="105000"/>
-              </a:lnSpc>
-              <a:buNone/>
-            </a:pPr>
-            <a:r>
-              <a:rPr lang="en-US" sz="1800" dirty="0">
-                <a:solidFill>
-                  <a:srgbClr val="E8EEF3"/>
-                </a:solidFill>
-                <a:latin typeface="Consolas" pitchFamily="34" charset="0"/>
-                <a:ea typeface="Consolas" pitchFamily="34" charset="-122"/>
-                <a:cs typeface="Consolas" pitchFamily="34" charset="-120"/>
-              </a:rPr>
-              <a:t>git switch main &amp;&amp; git pull</a:t>
-            </a:r>
-            <a:endParaRPr lang="en-US" sz="1800" dirty="0"/>
-          </a:p>
-          <a:p>
-            <a:pPr indent="0" marL="0">
-              <a:lnSpc>
-                <a:spcPct val="105000"/>
-              </a:lnSpc>
-              <a:buNone/>
-            </a:pPr>
-            <a:r>
-              <a:rPr lang="en-US" sz="1800" dirty="0">
-                <a:solidFill>
-                  <a:srgbClr val="E8EEF3"/>
-                </a:solidFill>
-                <a:latin typeface="Consolas" pitchFamily="34" charset="0"/>
-                <a:ea typeface="Consolas" pitchFamily="34" charset="-122"/>
-                <a:cs typeface="Consolas" pitchFamily="34" charset="-120"/>
-              </a:rPr>
-              <a:t>git tag -a cp7 -m "CP7: infrastructure package"</a:t>
-            </a:r>
-            <a:endParaRPr lang="en-US" sz="1800" dirty="0"/>
-          </a:p>
-          <a:p>
-            <a:pPr indent="0" marL="0">
-              <a:lnSpc>
-                <a:spcPct val="105000"/>
-              </a:lnSpc>
-              <a:buNone/>
-            </a:pPr>
-            <a:r>
-              <a:rPr lang="en-US" sz="1800" dirty="0">
-                <a:solidFill>
-                  <a:srgbClr val="E8EEF3"/>
-                </a:solidFill>
-                <a:latin typeface="Consolas" pitchFamily="34" charset="0"/>
-                <a:ea typeface="Consolas" pitchFamily="34" charset="-122"/>
-                <a:cs typeface="Consolas" pitchFamily="34" charset="-120"/>
-              </a:rPr>
-              <a:t>git push origin cp7</a:t>
-            </a:r>
-            <a:endParaRPr lang="en-US" sz="1800" dirty="0"/>
-          </a:p>
-        </p:txBody>
-      </p:sp>
-      <p:sp>
-        <p:nvSpPr>
-          <p:cNvPr id="8" name="Shape 6"/>
-          <p:cNvSpPr/>
-          <p:nvPr/>
-        </p:nvSpPr>
-        <p:spPr>
-          <a:xfrm>
-            <a:off x="548640" y="3977640"/>
-            <a:ext cx="5440680" cy="2194560"/>
+          <p:cNvPr id="6" name="Text 4"/>
+          <p:cNvSpPr/>
+          <p:nvPr/>
+        </p:nvSpPr>
+        <p:spPr>
+          <a:xfrm>
+            <a:off x="868680" y="1783080"/>
+            <a:ext cx="10424160" cy="960120"/>
+          </a:xfrm>
+          <a:prstGeom prst="rect">
+            <a:avLst/>
+          </a:prstGeom>
+          <a:noFill/>
+          <a:ln/>
+        </p:spPr>
+        <p:txBody>
+          <a:bodyPr wrap="square" lIns="0" tIns="0" rIns="0" bIns="0" rtlCol="0" anchor="ctr"/>
+          <a:lstStyle/>
+          <a:p>
+            <a:pPr indent="0" marL="0">
+              <a:buNone/>
+            </a:pPr>
+            <a:r>
+              <a:rPr lang="en-US" sz="2000" b="1" dirty="0">
+                <a:solidFill>
+                  <a:srgbClr val="FFFFFF"/>
+                </a:solidFill>
+                <a:latin typeface="Cambria" pitchFamily="34" charset="0"/>
+                <a:ea typeface="Cambria" pitchFamily="34" charset="-122"/>
+                <a:cs typeface="Cambria" pitchFamily="34" charset="-120"/>
+              </a:rPr>
+              <a:t>If your partner's "what is this?" doesn't match what you meant, your first sentence isn't done.</a:t>
+            </a:r>
+            <a:endParaRPr lang="en-US" sz="2000" dirty="0"/>
+          </a:p>
+        </p:txBody>
+      </p:sp>
+      <p:sp>
+        <p:nvSpPr>
+          <p:cNvPr id="7" name="Shape 5"/>
+          <p:cNvSpPr/>
+          <p:nvPr/>
+        </p:nvSpPr>
+        <p:spPr>
+          <a:xfrm>
+            <a:off x="548640" y="2971800"/>
+            <a:ext cx="3566160" cy="3200400"/>
           </a:xfrm>
           <a:prstGeom prst="roundRect">
             <a:avLst>
-              <a:gd name="adj" fmla="val 3750"/>
+              <a:gd name="adj" fmla="val 2571"/>
             </a:avLst>
           </a:prstGeom>
           <a:solidFill>
@@ -2300,14 +2307,14 @@
       </p:sp>
       <p:sp>
         <p:nvSpPr>
-          <p:cNvPr id="9" name="Shape 7"/>
-          <p:cNvSpPr/>
-          <p:nvPr/>
-        </p:nvSpPr>
-        <p:spPr>
-          <a:xfrm>
-            <a:off x="822960" y="4206240"/>
-            <a:ext cx="566928" cy="566928"/>
+          <p:cNvPr id="8" name="Shape 6"/>
+          <p:cNvSpPr/>
+          <p:nvPr/>
+        </p:nvSpPr>
+        <p:spPr>
+          <a:xfrm>
+            <a:off x="822960" y="3200400"/>
+            <a:ext cx="603504" cy="603504"/>
           </a:xfrm>
           <a:prstGeom prst="ellipse">
             <a:avLst/>
@@ -2320,7 +2327,7 @@
       </p:sp>
       <p:pic>
         <p:nvPicPr>
-          <p:cNvPr id="10" name="Image 0" descr="preencoded.png">    </p:cNvPr>
+          <p:cNvPr id="9" name="Image 0" descr="preencoded.png">    </p:cNvPr>
           <p:cNvPicPr>
             <a:picLocks noChangeAspect="1"/>
           </p:cNvPicPr>
@@ -2334,8 +2341,8 @@
         </p:blipFill>
         <p:spPr>
           <a:xfrm>
-            <a:off x="976031" y="4359311"/>
-            <a:ext cx="260787" cy="260787"/>
+            <a:off x="985906" y="3363346"/>
+            <a:ext cx="277612" cy="277612"/>
           </a:xfrm>
           <a:prstGeom prst="rect">
             <a:avLst/>
@@ -2344,53 +2351,53 @@
       </p:pic>
       <p:sp>
         <p:nvSpPr>
+          <p:cNvPr id="10" name="Text 7"/>
+          <p:cNvSpPr/>
+          <p:nvPr/>
+        </p:nvSpPr>
+        <p:spPr>
+          <a:xfrm>
+            <a:off x="1600200" y="3200400"/>
+            <a:ext cx="2377440" cy="603504"/>
+          </a:xfrm>
+          <a:prstGeom prst="rect">
+            <a:avLst/>
+          </a:prstGeom>
+          <a:noFill/>
+          <a:ln/>
+        </p:spPr>
+        <p:txBody>
+          <a:bodyPr wrap="square" lIns="0" tIns="0" rIns="0" bIns="0" rtlCol="0" anchor="ctr"/>
+          <a:lstStyle/>
+          <a:p>
+            <a:pPr indent="0" marL="0">
+              <a:buNone/>
+            </a:pPr>
+            <a:r>
+              <a:rPr lang="en-US" sz="1900" b="1" dirty="0">
+                <a:solidFill>
+                  <a:srgbClr val="1E2A36"/>
+                </a:solidFill>
+                <a:latin typeface="Calibri" pitchFamily="34" charset="0"/>
+                <a:ea typeface="Calibri" pitchFamily="34" charset="-122"/>
+                <a:cs typeface="Calibri" pitchFamily="34" charset="-120"/>
+              </a:rPr>
+              <a:t>Fix it or file it</a:t>
+            </a:r>
+            <a:endParaRPr lang="en-US" sz="1900" dirty="0"/>
+          </a:p>
+        </p:txBody>
+      </p:sp>
+      <p:sp>
+        <p:nvSpPr>
           <p:cNvPr id="11" name="Text 8"/>
           <p:cNvSpPr/>
           <p:nvPr/>
         </p:nvSpPr>
         <p:spPr>
           <a:xfrm>
-            <a:off x="1554480" y="4206240"/>
-            <a:ext cx="4297680" cy="566928"/>
-          </a:xfrm>
-          <a:prstGeom prst="rect">
-            <a:avLst/>
-          </a:prstGeom>
-          <a:noFill/>
-          <a:ln/>
-        </p:spPr>
-        <p:txBody>
-          <a:bodyPr wrap="square" lIns="0" tIns="0" rIns="0" bIns="0" rtlCol="0" anchor="ctr"/>
-          <a:lstStyle/>
-          <a:p>
-            <a:pPr indent="0" marL="0">
-              <a:buNone/>
-            </a:pPr>
-            <a:r>
-              <a:rPr lang="en-US" sz="1800" b="1" dirty="0">
-                <a:solidFill>
-                  <a:srgbClr val="1E2A36"/>
-                </a:solidFill>
-                <a:latin typeface="Calibri" pitchFamily="34" charset="0"/>
-                <a:ea typeface="Calibri" pitchFamily="34" charset="-122"/>
-                <a:cs typeface="Calibri" pitchFamily="34" charset="-120"/>
-              </a:rPr>
-              <a:t>In Canvas, paste the tag URL</a:t>
-            </a:r>
-            <a:endParaRPr lang="en-US" sz="1800" dirty="0"/>
-          </a:p>
-        </p:txBody>
-      </p:sp>
-      <p:sp>
-        <p:nvSpPr>
-          <p:cNvPr id="12" name="Text 9"/>
-          <p:cNvSpPr/>
-          <p:nvPr/>
-        </p:nvSpPr>
-        <p:spPr>
-          <a:xfrm>
-            <a:off x="868680" y="4892040"/>
-            <a:ext cx="4892040" cy="1188720"/>
+            <a:off x="822960" y="3977640"/>
+            <a:ext cx="3017520" cy="2103120"/>
           </a:xfrm>
           <a:prstGeom prst="rect">
             <a:avLst/>
@@ -2417,7 +2424,7 @@
                 <a:ea typeface="Calibri" pitchFamily="34" charset="-122"/>
                 <a:cs typeface="Calibri" pitchFamily="34" charset="-120"/>
               </a:rPr>
-              <a:t>…/YOUR-REPO/tree/cp7. That frozen state is what's graded, so work you merge later doesn't change it.</a:t>
+              <a:t>Under ten minutes: fix it now. Bigger: file an issue. Either way, write the number on the sheet and say "from the stranger's read" in the description.</a:t>
             </a:r>
             <a:endParaRPr lang="en-US" sz="1550" dirty="0"/>
           </a:p>
@@ -2425,18 +2432,18 @@
       </p:sp>
       <p:sp>
         <p:nvSpPr>
-          <p:cNvPr id="13" name="Shape 10"/>
-          <p:cNvSpPr/>
-          <p:nvPr/>
-        </p:nvSpPr>
-        <p:spPr>
-          <a:xfrm>
-            <a:off x="6172200" y="3977640"/>
-            <a:ext cx="5440680" cy="2194560"/>
+          <p:cNvPr id="12" name="Shape 9"/>
+          <p:cNvSpPr/>
+          <p:nvPr/>
+        </p:nvSpPr>
+        <p:spPr>
+          <a:xfrm>
+            <a:off x="4297680" y="2971800"/>
+            <a:ext cx="3566160" cy="3200400"/>
           </a:xfrm>
           <a:prstGeom prst="roundRect">
             <a:avLst>
-              <a:gd name="adj" fmla="val 3750"/>
+              <a:gd name="adj" fmla="val 2571"/>
             </a:avLst>
           </a:prstGeom>
           <a:solidFill>
@@ -2454,14 +2461,14 @@
       </p:sp>
       <p:sp>
         <p:nvSpPr>
-          <p:cNvPr id="14" name="Shape 11"/>
-          <p:cNvSpPr/>
-          <p:nvPr/>
-        </p:nvSpPr>
-        <p:spPr>
-          <a:xfrm>
-            <a:off x="6446520" y="4206240"/>
-            <a:ext cx="566928" cy="566928"/>
+          <p:cNvPr id="13" name="Shape 10"/>
+          <p:cNvSpPr/>
+          <p:nvPr/>
+        </p:nvSpPr>
+        <p:spPr>
+          <a:xfrm>
+            <a:off x="4572000" y="3200400"/>
+            <a:ext cx="603504" cy="603504"/>
           </a:xfrm>
           <a:prstGeom prst="ellipse">
             <a:avLst/>
@@ -2474,7 +2481,7 @@
       </p:sp>
       <p:pic>
         <p:nvPicPr>
-          <p:cNvPr id="15" name="Image 1" descr="preencoded.png">    </p:cNvPr>
+          <p:cNvPr id="14" name="Image 1" descr="preencoded.png">    </p:cNvPr>
           <p:cNvPicPr>
             <a:picLocks noChangeAspect="1"/>
           </p:cNvPicPr>
@@ -2488,8 +2495,8 @@
         </p:blipFill>
         <p:spPr>
           <a:xfrm>
-            <a:off x="6599591" y="4359311"/>
-            <a:ext cx="260787" cy="260787"/>
+            <a:off x="4734946" y="3363346"/>
+            <a:ext cx="277612" cy="277612"/>
           </a:xfrm>
           <a:prstGeom prst="rect">
             <a:avLst/>
@@ -2498,53 +2505,53 @@
       </p:pic>
       <p:sp>
         <p:nvSpPr>
+          <p:cNvPr id="15" name="Text 11"/>
+          <p:cNvSpPr/>
+          <p:nvPr/>
+        </p:nvSpPr>
+        <p:spPr>
+          <a:xfrm>
+            <a:off x="5349240" y="3200400"/>
+            <a:ext cx="2377440" cy="603504"/>
+          </a:xfrm>
+          <a:prstGeom prst="rect">
+            <a:avLst/>
+          </a:prstGeom>
+          <a:noFill/>
+          <a:ln/>
+        </p:spPr>
+        <p:txBody>
+          <a:bodyPr wrap="square" lIns="0" tIns="0" rIns="0" bIns="0" rtlCol="0" anchor="ctr"/>
+          <a:lstStyle/>
+          <a:p>
+            <a:pPr indent="0" marL="0">
+              <a:buNone/>
+            </a:pPr>
+            <a:r>
+              <a:rPr lang="en-US" sz="1900" b="1" dirty="0">
+                <a:solidFill>
+                  <a:srgbClr val="1E2A36"/>
+                </a:solidFill>
+                <a:latin typeface="Calibri" pitchFamily="34" charset="0"/>
+                <a:ea typeface="Calibri" pitchFamily="34" charset="-122"/>
+                <a:cs typeface="Calibri" pitchFamily="34" charset="-120"/>
+              </a:rPr>
+              <a:t>Seed the tracker</a:t>
+            </a:r>
+            <a:endParaRPr lang="en-US" sz="1900" dirty="0"/>
+          </a:p>
+        </p:txBody>
+      </p:sp>
+      <p:sp>
+        <p:nvSpPr>
           <p:cNvPr id="16" name="Text 12"/>
           <p:cNvSpPr/>
           <p:nvPr/>
         </p:nvSpPr>
         <p:spPr>
           <a:xfrm>
-            <a:off x="7178040" y="4206240"/>
-            <a:ext cx="4297680" cy="566928"/>
-          </a:xfrm>
-          <a:prstGeom prst="rect">
-            <a:avLst/>
-          </a:prstGeom>
-          <a:noFill/>
-          <a:ln/>
-        </p:spPr>
-        <p:txBody>
-          <a:bodyPr wrap="square" lIns="0" tIns="0" rIns="0" bIns="0" rtlCol="0" anchor="ctr"/>
-          <a:lstStyle/>
-          <a:p>
-            <a:pPr indent="0" marL="0">
-              <a:buNone/>
-            </a:pPr>
-            <a:r>
-              <a:rPr lang="en-US" sz="1800" b="1" dirty="0">
-                <a:solidFill>
-                  <a:srgbClr val="1E2A36"/>
-                </a:solidFill>
-                <a:latin typeface="Calibri" pitchFamily="34" charset="0"/>
-                <a:ea typeface="Calibri" pitchFamily="34" charset="-122"/>
-                <a:cs typeface="Calibri" pitchFamily="34" charset="-120"/>
-              </a:rPr>
-              <a:t>Add a photo of the sheet</a:t>
-            </a:r>
-            <a:endParaRPr lang="en-US" sz="1800" dirty="0"/>
-          </a:p>
-        </p:txBody>
-      </p:sp>
-      <p:sp>
-        <p:nvSpPr>
-          <p:cNvPr id="17" name="Text 13"/>
-          <p:cNvSpPr/>
-          <p:nvPr/>
-        </p:nvSpPr>
-        <p:spPr>
-          <a:xfrm>
-            <a:off x="6492240" y="4892040"/>
-            <a:ext cx="4892040" cy="1188720"/>
+            <a:off x="4572000" y="3977640"/>
+            <a:ext cx="3017520" cy="2103120"/>
           </a:xfrm>
           <a:prstGeom prst="rect">
             <a:avLst/>
@@ -2571,7 +2578,7 @@
                 <a:ea typeface="Calibri" pitchFamily="34" charset="-122"/>
                 <a:cs typeface="Calibri" pitchFamily="34" charset="-120"/>
               </a:rPr>
-              <a:t>Your Stranger's Read sheet, with what you did about it filled in. Flat page, good light, legible.</a:t>
+              <a:t>2–3 real next-work issues, written through your own templates. The setup-guide issue counts as one. They start Monday's backlog.</a:t>
             </a:r>
             <a:endParaRPr lang="en-US" sz="1550" dirty="0"/>
           </a:p>
@@ -2579,7 +2586,161 @@
       </p:sp>
       <p:sp>
         <p:nvSpPr>
-          <p:cNvPr id="18" name="Text 14"/>
+          <p:cNvPr id="17" name="Shape 13"/>
+          <p:cNvSpPr/>
+          <p:nvPr/>
+        </p:nvSpPr>
+        <p:spPr>
+          <a:xfrm>
+            <a:off x="8046720" y="2971800"/>
+            <a:ext cx="3566160" cy="3200400"/>
+          </a:xfrm>
+          <a:prstGeom prst="roundRect">
+            <a:avLst>
+              <a:gd name="adj" fmla="val 2571"/>
+            </a:avLst>
+          </a:prstGeom>
+          <a:solidFill>
+            <a:srgbClr val="F2F6F8"/>
+          </a:solidFill>
+          <a:ln/>
+          <a:effectLst>
+            <a:outerShdw sx="100000" sy="100000" kx="0" ky="0" algn="bl" rotWithShape="0" blurRad="88900" dist="38100" dir="5400000">
+              <a:srgbClr val="000000">
+                <a:alpha val="13000"/>
+              </a:srgbClr>
+            </a:outerShdw>
+          </a:effectLst>
+        </p:spPr>
+      </p:sp>
+      <p:sp>
+        <p:nvSpPr>
+          <p:cNvPr id="18" name="Shape 14"/>
+          <p:cNvSpPr/>
+          <p:nvPr/>
+        </p:nvSpPr>
+        <p:spPr>
+          <a:xfrm>
+            <a:off x="8321040" y="3200400"/>
+            <a:ext cx="603504" cy="603504"/>
+          </a:xfrm>
+          <a:prstGeom prst="ellipse">
+            <a:avLst/>
+          </a:prstGeom>
+          <a:solidFill>
+            <a:srgbClr val="12908F"/>
+          </a:solidFill>
+          <a:ln/>
+        </p:spPr>
+      </p:sp>
+      <p:pic>
+        <p:nvPicPr>
+          <p:cNvPr id="19" name="Image 2" descr="preencoded.png">    </p:cNvPr>
+          <p:cNvPicPr>
+            <a:picLocks noChangeAspect="1"/>
+          </p:cNvPicPr>
+          <p:nvPr/>
+        </p:nvPicPr>
+        <p:blipFill>
+          <a:blip r:embed="rId3"/>
+          <a:stretch>
+            <a:fillRect/>
+          </a:stretch>
+        </p:blipFill>
+        <p:spPr>
+          <a:xfrm>
+            <a:off x="8483986" y="3363346"/>
+            <a:ext cx="277612" cy="277612"/>
+          </a:xfrm>
+          <a:prstGeom prst="rect">
+            <a:avLst/>
+          </a:prstGeom>
+        </p:spPr>
+      </p:pic>
+      <p:sp>
+        <p:nvSpPr>
+          <p:cNvPr id="20" name="Text 15"/>
+          <p:cNvSpPr/>
+          <p:nvPr/>
+        </p:nvSpPr>
+        <p:spPr>
+          <a:xfrm>
+            <a:off x="9098280" y="3200400"/>
+            <a:ext cx="2377440" cy="603504"/>
+          </a:xfrm>
+          <a:prstGeom prst="rect">
+            <a:avLst/>
+          </a:prstGeom>
+          <a:noFill/>
+          <a:ln/>
+        </p:spPr>
+        <p:txBody>
+          <a:bodyPr wrap="square" lIns="0" tIns="0" rIns="0" bIns="0" rtlCol="0" anchor="ctr"/>
+          <a:lstStyle/>
+          <a:p>
+            <a:pPr indent="0" marL="0">
+              <a:buNone/>
+            </a:pPr>
+            <a:r>
+              <a:rPr lang="en-US" sz="1900" b="1" dirty="0">
+                <a:solidFill>
+                  <a:srgbClr val="1E2A36"/>
+                </a:solidFill>
+                <a:latin typeface="Calibri" pitchFamily="34" charset="0"/>
+                <a:ea typeface="Calibri" pitchFamily="34" charset="-122"/>
+                <a:cs typeface="Calibri" pitchFamily="34" charset="-120"/>
+              </a:rPr>
+              <a:t>Time left?</a:t>
+            </a:r>
+            <a:endParaRPr lang="en-US" sz="1900" dirty="0"/>
+          </a:p>
+        </p:txBody>
+      </p:sp>
+      <p:sp>
+        <p:nvSpPr>
+          <p:cNvPr id="21" name="Text 16"/>
+          <p:cNvSpPr/>
+          <p:nvPr/>
+        </p:nvSpPr>
+        <p:spPr>
+          <a:xfrm>
+            <a:off x="8321040" y="3977640"/>
+            <a:ext cx="3017520" cy="2103120"/>
+          </a:xfrm>
+          <a:prstGeom prst="rect">
+            <a:avLst/>
+          </a:prstGeom>
+          <a:noFill/>
+          <a:ln/>
+        </p:spPr>
+        <p:txBody>
+          <a:bodyPr wrap="square" lIns="0" tIns="0" rIns="0" bIns="0" rtlCol="0" anchor="t"/>
+          <a:lstStyle/>
+          <a:p>
+            <a:pPr indent="0" marL="0">
+              <a:lnSpc>
+                <a:spcPct val="103000"/>
+              </a:lnSpc>
+              <a:buNone/>
+            </a:pPr>
+            <a:r>
+              <a:rPr lang="en-US" sz="1550" dirty="0">
+                <a:solidFill>
+                  <a:srgbClr val="1E2A36"/>
+                </a:solidFill>
+                <a:latin typeface="Calibri" pitchFamily="34" charset="0"/>
+                <a:ea typeface="Calibri" pitchFamily="34" charset="-122"/>
+                <a:cs typeface="Calibri" pitchFamily="34" charset="-120"/>
+              </a:rPr>
+              <a:t>Review your partner's open PRs. Unfinished fixes carry to Friday; that's what the sheet is for.</a:t>
+            </a:r>
+            <a:endParaRPr lang="en-US" sz="1550" dirty="0"/>
+          </a:p>
+        </p:txBody>
+      </p:sp>
+      <p:sp>
+        <p:nvSpPr>
+          <p:cNvPr id="22" name="Text 17"/>
           <p:cNvSpPr/>
           <p:nvPr/>
         </p:nvSpPr>
@@ -2618,7 +2779,7 @@
       </p:sp>
       <p:sp>
         <p:nvSpPr>
-          <p:cNvPr id="19" name="Text 15"/>
+          <p:cNvPr id="23" name="Text 18"/>
           <p:cNvSpPr/>
           <p:nvPr/>
         </p:nvSpPr>
@@ -2666,6 +2827,672 @@
 <file path=ppt/slides/slide11.xml><?xml version="1.0" encoding="utf-8"?>
 <p:sld xmlns:a="http://schemas.openxmlformats.org/drawingml/2006/main" xmlns:r="http://schemas.openxmlformats.org/officeDocument/2006/relationships" xmlns:p="http://schemas.openxmlformats.org/presentationml/2006/main">
   <p:cSld name="Slide 11">
+    <p:bg>
+      <p:bgPr>
+        <a:solidFill>
+          <a:srgbClr val="FFFFFF"/>
+        </a:solidFill>
+      </p:bgPr>
+    </p:bg>
+    <p:spTree>
+      <p:nvGrpSpPr>
+        <p:cNvPr id="1" name=""/>
+        <p:cNvGrpSpPr/>
+        <p:nvPr/>
+      </p:nvGrpSpPr>
+      <p:grpSpPr>
+        <a:xfrm>
+          <a:off x="0" y="0"/>
+          <a:ext cx="0" cy="0"/>
+          <a:chOff x="0" y="0"/>
+          <a:chExt cx="0" cy="0"/>
+        </a:xfrm>
+      </p:grpSpPr>
+      <p:sp>
+        <p:nvSpPr>
+          <p:cNvPr id="2" name="Shape 0"/>
+          <p:cNvSpPr/>
+          <p:nvPr/>
+        </p:nvSpPr>
+        <p:spPr>
+          <a:xfrm>
+            <a:off x="566928" y="502920"/>
+            <a:ext cx="137160" cy="137160"/>
+          </a:xfrm>
+          <a:prstGeom prst="ellipse">
+            <a:avLst/>
+          </a:prstGeom>
+          <a:solidFill>
+            <a:srgbClr val="E8A33D"/>
+          </a:solidFill>
+          <a:ln/>
+        </p:spPr>
+      </p:sp>
+      <p:sp>
+        <p:nvSpPr>
+          <p:cNvPr id="3" name="Text 1"/>
+          <p:cNvSpPr/>
+          <p:nvPr/>
+        </p:nvSpPr>
+        <p:spPr>
+          <a:xfrm>
+            <a:off x="795528" y="402336"/>
+            <a:ext cx="10515600" cy="310896"/>
+          </a:xfrm>
+          <a:prstGeom prst="rect">
+            <a:avLst/>
+          </a:prstGeom>
+          <a:noFill/>
+          <a:ln/>
+        </p:spPr>
+        <p:txBody>
+          <a:bodyPr wrap="square" lIns="0" tIns="0" rIns="0" bIns="0" rtlCol="0" anchor="ctr"/>
+          <a:lstStyle/>
+          <a:p>
+            <a:pPr indent="0" marL="0">
+              <a:buNone/>
+            </a:pPr>
+            <a:r>
+              <a:rPr lang="en-US" sz="1400" b="1" spc="200" kern="0" dirty="0">
+                <a:solidFill>
+                  <a:srgbClr val="12908F"/>
+                </a:solidFill>
+                <a:latin typeface="Calibri" pitchFamily="34" charset="0"/>
+                <a:ea typeface="Calibri" pitchFamily="34" charset="-122"/>
+                <a:cs typeface="Calibri" pitchFamily="34" charset="-120"/>
+              </a:rPr>
+              <a:t>SUBMITTING CP7</a:t>
+            </a:r>
+            <a:endParaRPr lang="en-US" sz="1400" dirty="0"/>
+          </a:p>
+        </p:txBody>
+      </p:sp>
+      <p:sp>
+        <p:nvSpPr>
+          <p:cNvPr id="4" name="Text 2"/>
+          <p:cNvSpPr/>
+          <p:nvPr/>
+        </p:nvSpPr>
+        <p:spPr>
+          <a:xfrm>
+            <a:off x="548640" y="749808"/>
+            <a:ext cx="11064240" cy="914400"/>
+          </a:xfrm>
+          <a:prstGeom prst="rect">
+            <a:avLst/>
+          </a:prstGeom>
+          <a:noFill/>
+          <a:ln/>
+        </p:spPr>
+        <p:txBody>
+          <a:bodyPr wrap="square" lIns="0" tIns="0" rIns="0" bIns="0" rtlCol="0" anchor="t"/>
+          <a:lstStyle/>
+          <a:p>
+            <a:pPr indent="0" marL="0">
+              <a:buNone/>
+            </a:pPr>
+            <a:r>
+              <a:rPr lang="en-US" sz="3100" b="1" dirty="0">
+                <a:solidFill>
+                  <a:srgbClr val="1E2A36"/>
+                </a:solidFill>
+                <a:latin typeface="Cambria" pitchFamily="34" charset="0"/>
+                <a:ea typeface="Cambria" pitchFamily="34" charset="-122"/>
+                <a:cs typeface="Cambria" pitchFamily="34" charset="-120"/>
+              </a:rPr>
+              <a:t>Tag it, the way a project marks a release</a:t>
+            </a:r>
+            <a:endParaRPr lang="en-US" sz="3100" dirty="0"/>
+          </a:p>
+        </p:txBody>
+      </p:sp>
+      <p:sp>
+        <p:nvSpPr>
+          <p:cNvPr id="5" name="Text 3"/>
+          <p:cNvSpPr/>
+          <p:nvPr/>
+        </p:nvSpPr>
+        <p:spPr>
+          <a:xfrm>
+            <a:off x="548640" y="1737360"/>
+            <a:ext cx="10972800" cy="365760"/>
+          </a:xfrm>
+          <a:prstGeom prst="rect">
+            <a:avLst/>
+          </a:prstGeom>
+          <a:noFill/>
+          <a:ln/>
+        </p:spPr>
+        <p:txBody>
+          <a:bodyPr wrap="square" lIns="0" tIns="0" rIns="0" bIns="0" rtlCol="0" anchor="ctr"/>
+          <a:lstStyle/>
+          <a:p>
+            <a:pPr indent="0" marL="0">
+              <a:buNone/>
+            </a:pPr>
+            <a:r>
+              <a:rPr lang="en-US" sz="1600" i="1" dirty="0">
+                <a:solidFill>
+                  <a:srgbClr val="5F7284"/>
+                </a:solidFill>
+                <a:latin typeface="Calibri" pitchFamily="34" charset="0"/>
+                <a:ea typeface="Calibri" pitchFamily="34" charset="-122"/>
+                <a:cs typeface="Calibri" pitchFamily="34" charset="-120"/>
+              </a:rPr>
+              <a:t>When everything is merged to main:</a:t>
+            </a:r>
+            <a:endParaRPr lang="en-US" sz="1600" dirty="0"/>
+          </a:p>
+        </p:txBody>
+      </p:sp>
+      <p:sp>
+        <p:nvSpPr>
+          <p:cNvPr id="6" name="Shape 4"/>
+          <p:cNvSpPr/>
+          <p:nvPr/>
+        </p:nvSpPr>
+        <p:spPr>
+          <a:xfrm>
+            <a:off x="548640" y="2148840"/>
+            <a:ext cx="11064240" cy="1600200"/>
+          </a:xfrm>
+          <a:prstGeom prst="roundRect">
+            <a:avLst>
+              <a:gd name="adj" fmla="val 4571"/>
+            </a:avLst>
+          </a:prstGeom>
+          <a:solidFill>
+            <a:srgbClr val="1E3352"/>
+          </a:solidFill>
+          <a:ln/>
+          <a:effectLst>
+            <a:outerShdw sx="100000" sy="100000" kx="0" ky="0" algn="bl" rotWithShape="0" blurRad="88900" dist="38100" dir="5400000">
+              <a:srgbClr val="000000">
+                <a:alpha val="13000"/>
+              </a:srgbClr>
+            </a:outerShdw>
+          </a:effectLst>
+        </p:spPr>
+      </p:sp>
+      <p:sp>
+        <p:nvSpPr>
+          <p:cNvPr id="7" name="Text 5"/>
+          <p:cNvSpPr/>
+          <p:nvPr/>
+        </p:nvSpPr>
+        <p:spPr>
+          <a:xfrm>
+            <a:off x="822960" y="2313432"/>
+            <a:ext cx="10515600" cy="1271016"/>
+          </a:xfrm>
+          <a:prstGeom prst="rect">
+            <a:avLst/>
+          </a:prstGeom>
+          <a:noFill/>
+          <a:ln/>
+        </p:spPr>
+        <p:txBody>
+          <a:bodyPr wrap="square" lIns="0" tIns="0" rIns="0" bIns="0" rtlCol="0" anchor="t"/>
+          <a:lstStyle/>
+          <a:p>
+            <a:pPr indent="0" marL="0">
+              <a:lnSpc>
+                <a:spcPct val="105000"/>
+              </a:lnSpc>
+              <a:buNone/>
+            </a:pPr>
+            <a:r>
+              <a:rPr lang="en-US" sz="1800" dirty="0">
+                <a:solidFill>
+                  <a:srgbClr val="E8EEF3"/>
+                </a:solidFill>
+                <a:latin typeface="Consolas" pitchFamily="34" charset="0"/>
+                <a:ea typeface="Consolas" pitchFamily="34" charset="-122"/>
+                <a:cs typeface="Consolas" pitchFamily="34" charset="-120"/>
+              </a:rPr>
+              <a:t>git switch main &amp;&amp; git pull</a:t>
+            </a:r>
+            <a:endParaRPr lang="en-US" sz="1800" dirty="0"/>
+          </a:p>
+          <a:p>
+            <a:pPr indent="0" marL="0">
+              <a:lnSpc>
+                <a:spcPct val="105000"/>
+              </a:lnSpc>
+              <a:buNone/>
+            </a:pPr>
+            <a:r>
+              <a:rPr lang="en-US" sz="1800" dirty="0">
+                <a:solidFill>
+                  <a:srgbClr val="E8EEF3"/>
+                </a:solidFill>
+                <a:latin typeface="Consolas" pitchFamily="34" charset="0"/>
+                <a:ea typeface="Consolas" pitchFamily="34" charset="-122"/>
+                <a:cs typeface="Consolas" pitchFamily="34" charset="-120"/>
+              </a:rPr>
+              <a:t>git tag -a cp7 -m "CP7: infrastructure package"</a:t>
+            </a:r>
+            <a:endParaRPr lang="en-US" sz="1800" dirty="0"/>
+          </a:p>
+          <a:p>
+            <a:pPr indent="0" marL="0">
+              <a:lnSpc>
+                <a:spcPct val="105000"/>
+              </a:lnSpc>
+              <a:buNone/>
+            </a:pPr>
+            <a:r>
+              <a:rPr lang="en-US" sz="1800" dirty="0">
+                <a:solidFill>
+                  <a:srgbClr val="E8EEF3"/>
+                </a:solidFill>
+                <a:latin typeface="Consolas" pitchFamily="34" charset="0"/>
+                <a:ea typeface="Consolas" pitchFamily="34" charset="-122"/>
+                <a:cs typeface="Consolas" pitchFamily="34" charset="-120"/>
+              </a:rPr>
+              <a:t>git push origin cp7</a:t>
+            </a:r>
+            <a:endParaRPr lang="en-US" sz="1800" dirty="0"/>
+          </a:p>
+        </p:txBody>
+      </p:sp>
+      <p:sp>
+        <p:nvSpPr>
+          <p:cNvPr id="8" name="Shape 6"/>
+          <p:cNvSpPr/>
+          <p:nvPr/>
+        </p:nvSpPr>
+        <p:spPr>
+          <a:xfrm>
+            <a:off x="548640" y="3977640"/>
+            <a:ext cx="5440680" cy="2194560"/>
+          </a:xfrm>
+          <a:prstGeom prst="roundRect">
+            <a:avLst>
+              <a:gd name="adj" fmla="val 3750"/>
+            </a:avLst>
+          </a:prstGeom>
+          <a:solidFill>
+            <a:srgbClr val="F2F6F8"/>
+          </a:solidFill>
+          <a:ln/>
+          <a:effectLst>
+            <a:outerShdw sx="100000" sy="100000" kx="0" ky="0" algn="bl" rotWithShape="0" blurRad="88900" dist="38100" dir="5400000">
+              <a:srgbClr val="000000">
+                <a:alpha val="13000"/>
+              </a:srgbClr>
+            </a:outerShdw>
+          </a:effectLst>
+        </p:spPr>
+      </p:sp>
+      <p:sp>
+        <p:nvSpPr>
+          <p:cNvPr id="9" name="Shape 7"/>
+          <p:cNvSpPr/>
+          <p:nvPr/>
+        </p:nvSpPr>
+        <p:spPr>
+          <a:xfrm>
+            <a:off x="822960" y="4206240"/>
+            <a:ext cx="566928" cy="566928"/>
+          </a:xfrm>
+          <a:prstGeom prst="ellipse">
+            <a:avLst/>
+          </a:prstGeom>
+          <a:solidFill>
+            <a:srgbClr val="12908F"/>
+          </a:solidFill>
+          <a:ln/>
+        </p:spPr>
+      </p:sp>
+      <p:pic>
+        <p:nvPicPr>
+          <p:cNvPr id="10" name="Image 0" descr="preencoded.png">    </p:cNvPr>
+          <p:cNvPicPr>
+            <a:picLocks noChangeAspect="1"/>
+          </p:cNvPicPr>
+          <p:nvPr/>
+        </p:nvPicPr>
+        <p:blipFill>
+          <a:blip r:embed="rId1"/>
+          <a:stretch>
+            <a:fillRect/>
+          </a:stretch>
+        </p:blipFill>
+        <p:spPr>
+          <a:xfrm>
+            <a:off x="976031" y="4359311"/>
+            <a:ext cx="260787" cy="260787"/>
+          </a:xfrm>
+          <a:prstGeom prst="rect">
+            <a:avLst/>
+          </a:prstGeom>
+        </p:spPr>
+      </p:pic>
+      <p:sp>
+        <p:nvSpPr>
+          <p:cNvPr id="11" name="Text 8"/>
+          <p:cNvSpPr/>
+          <p:nvPr/>
+        </p:nvSpPr>
+        <p:spPr>
+          <a:xfrm>
+            <a:off x="1554480" y="4206240"/>
+            <a:ext cx="4297680" cy="566928"/>
+          </a:xfrm>
+          <a:prstGeom prst="rect">
+            <a:avLst/>
+          </a:prstGeom>
+          <a:noFill/>
+          <a:ln/>
+        </p:spPr>
+        <p:txBody>
+          <a:bodyPr wrap="square" lIns="0" tIns="0" rIns="0" bIns="0" rtlCol="0" anchor="ctr"/>
+          <a:lstStyle/>
+          <a:p>
+            <a:pPr indent="0" marL="0">
+              <a:buNone/>
+            </a:pPr>
+            <a:r>
+              <a:rPr lang="en-US" sz="1800" b="1" dirty="0">
+                <a:solidFill>
+                  <a:srgbClr val="1E2A36"/>
+                </a:solidFill>
+                <a:latin typeface="Calibri" pitchFamily="34" charset="0"/>
+                <a:ea typeface="Calibri" pitchFamily="34" charset="-122"/>
+                <a:cs typeface="Calibri" pitchFamily="34" charset="-120"/>
+              </a:rPr>
+              <a:t>In Canvas, paste the tag URL</a:t>
+            </a:r>
+            <a:endParaRPr lang="en-US" sz="1800" dirty="0"/>
+          </a:p>
+        </p:txBody>
+      </p:sp>
+      <p:sp>
+        <p:nvSpPr>
+          <p:cNvPr id="12" name="Text 9"/>
+          <p:cNvSpPr/>
+          <p:nvPr/>
+        </p:nvSpPr>
+        <p:spPr>
+          <a:xfrm>
+            <a:off x="868680" y="4892040"/>
+            <a:ext cx="4892040" cy="1188720"/>
+          </a:xfrm>
+          <a:prstGeom prst="rect">
+            <a:avLst/>
+          </a:prstGeom>
+          <a:noFill/>
+          <a:ln/>
+        </p:spPr>
+        <p:txBody>
+          <a:bodyPr wrap="square" lIns="0" tIns="0" rIns="0" bIns="0" rtlCol="0" anchor="t"/>
+          <a:lstStyle/>
+          <a:p>
+            <a:pPr indent="0" marL="0">
+              <a:lnSpc>
+                <a:spcPct val="103000"/>
+              </a:lnSpc>
+              <a:buNone/>
+            </a:pPr>
+            <a:r>
+              <a:rPr lang="en-US" sz="1550" dirty="0">
+                <a:solidFill>
+                  <a:srgbClr val="1E2A36"/>
+                </a:solidFill>
+                <a:latin typeface="Calibri" pitchFamily="34" charset="0"/>
+                <a:ea typeface="Calibri" pitchFamily="34" charset="-122"/>
+                <a:cs typeface="Calibri" pitchFamily="34" charset="-120"/>
+              </a:rPr>
+              <a:t>…/YOUR-REPO/tree/cp7. That frozen state is what's graded, so work you merge later doesn't change it.</a:t>
+            </a:r>
+            <a:endParaRPr lang="en-US" sz="1550" dirty="0"/>
+          </a:p>
+        </p:txBody>
+      </p:sp>
+      <p:sp>
+        <p:nvSpPr>
+          <p:cNvPr id="13" name="Shape 10"/>
+          <p:cNvSpPr/>
+          <p:nvPr/>
+        </p:nvSpPr>
+        <p:spPr>
+          <a:xfrm>
+            <a:off x="6172200" y="3977640"/>
+            <a:ext cx="5440680" cy="2194560"/>
+          </a:xfrm>
+          <a:prstGeom prst="roundRect">
+            <a:avLst>
+              <a:gd name="adj" fmla="val 3750"/>
+            </a:avLst>
+          </a:prstGeom>
+          <a:solidFill>
+            <a:srgbClr val="F2F6F8"/>
+          </a:solidFill>
+          <a:ln/>
+          <a:effectLst>
+            <a:outerShdw sx="100000" sy="100000" kx="0" ky="0" algn="bl" rotWithShape="0" blurRad="88900" dist="38100" dir="5400000">
+              <a:srgbClr val="000000">
+                <a:alpha val="13000"/>
+              </a:srgbClr>
+            </a:outerShdw>
+          </a:effectLst>
+        </p:spPr>
+      </p:sp>
+      <p:sp>
+        <p:nvSpPr>
+          <p:cNvPr id="14" name="Shape 11"/>
+          <p:cNvSpPr/>
+          <p:nvPr/>
+        </p:nvSpPr>
+        <p:spPr>
+          <a:xfrm>
+            <a:off x="6446520" y="4206240"/>
+            <a:ext cx="566928" cy="566928"/>
+          </a:xfrm>
+          <a:prstGeom prst="ellipse">
+            <a:avLst/>
+          </a:prstGeom>
+          <a:solidFill>
+            <a:srgbClr val="12908F"/>
+          </a:solidFill>
+          <a:ln/>
+        </p:spPr>
+      </p:sp>
+      <p:pic>
+        <p:nvPicPr>
+          <p:cNvPr id="15" name="Image 1" descr="preencoded.png">    </p:cNvPr>
+          <p:cNvPicPr>
+            <a:picLocks noChangeAspect="1"/>
+          </p:cNvPicPr>
+          <p:nvPr/>
+        </p:nvPicPr>
+        <p:blipFill>
+          <a:blip r:embed="rId2"/>
+          <a:stretch>
+            <a:fillRect/>
+          </a:stretch>
+        </p:blipFill>
+        <p:spPr>
+          <a:xfrm>
+            <a:off x="6599591" y="4359311"/>
+            <a:ext cx="260787" cy="260787"/>
+          </a:xfrm>
+          <a:prstGeom prst="rect">
+            <a:avLst/>
+          </a:prstGeom>
+        </p:spPr>
+      </p:pic>
+      <p:sp>
+        <p:nvSpPr>
+          <p:cNvPr id="16" name="Text 12"/>
+          <p:cNvSpPr/>
+          <p:nvPr/>
+        </p:nvSpPr>
+        <p:spPr>
+          <a:xfrm>
+            <a:off x="7178040" y="4206240"/>
+            <a:ext cx="4297680" cy="566928"/>
+          </a:xfrm>
+          <a:prstGeom prst="rect">
+            <a:avLst/>
+          </a:prstGeom>
+          <a:noFill/>
+          <a:ln/>
+        </p:spPr>
+        <p:txBody>
+          <a:bodyPr wrap="square" lIns="0" tIns="0" rIns="0" bIns="0" rtlCol="0" anchor="ctr"/>
+          <a:lstStyle/>
+          <a:p>
+            <a:pPr indent="0" marL="0">
+              <a:buNone/>
+            </a:pPr>
+            <a:r>
+              <a:rPr lang="en-US" sz="1800" b="1" dirty="0">
+                <a:solidFill>
+                  <a:srgbClr val="1E2A36"/>
+                </a:solidFill>
+                <a:latin typeface="Calibri" pitchFamily="34" charset="0"/>
+                <a:ea typeface="Calibri" pitchFamily="34" charset="-122"/>
+                <a:cs typeface="Calibri" pitchFamily="34" charset="-120"/>
+              </a:rPr>
+              <a:t>Add a photo of the sheet</a:t>
+            </a:r>
+            <a:endParaRPr lang="en-US" sz="1800" dirty="0"/>
+          </a:p>
+        </p:txBody>
+      </p:sp>
+      <p:sp>
+        <p:nvSpPr>
+          <p:cNvPr id="17" name="Text 13"/>
+          <p:cNvSpPr/>
+          <p:nvPr/>
+        </p:nvSpPr>
+        <p:spPr>
+          <a:xfrm>
+            <a:off x="6492240" y="4892040"/>
+            <a:ext cx="4892040" cy="1188720"/>
+          </a:xfrm>
+          <a:prstGeom prst="rect">
+            <a:avLst/>
+          </a:prstGeom>
+          <a:noFill/>
+          <a:ln/>
+        </p:spPr>
+        <p:txBody>
+          <a:bodyPr wrap="square" lIns="0" tIns="0" rIns="0" bIns="0" rtlCol="0" anchor="t"/>
+          <a:lstStyle/>
+          <a:p>
+            <a:pPr indent="0" marL="0">
+              <a:lnSpc>
+                <a:spcPct val="103000"/>
+              </a:lnSpc>
+              <a:buNone/>
+            </a:pPr>
+            <a:r>
+              <a:rPr lang="en-US" sz="1550" dirty="0">
+                <a:solidFill>
+                  <a:srgbClr val="1E2A36"/>
+                </a:solidFill>
+                <a:latin typeface="Calibri" pitchFamily="34" charset="0"/>
+                <a:ea typeface="Calibri" pitchFamily="34" charset="-122"/>
+                <a:cs typeface="Calibri" pitchFamily="34" charset="-120"/>
+              </a:rPr>
+              <a:t>Your Stranger's Read sheet, with what you did about it filled in. Flat page, good light, legible.</a:t>
+            </a:r>
+            <a:endParaRPr lang="en-US" sz="1550" dirty="0"/>
+          </a:p>
+        </p:txBody>
+      </p:sp>
+      <p:sp>
+        <p:nvSpPr>
+          <p:cNvPr id="18" name="Text 14"/>
+          <p:cNvSpPr/>
+          <p:nvPr/>
+        </p:nvSpPr>
+        <p:spPr>
+          <a:xfrm>
+            <a:off x="6675120" y="6437376"/>
+            <a:ext cx="4937760" cy="274320"/>
+          </a:xfrm>
+          <a:prstGeom prst="rect">
+            <a:avLst/>
+          </a:prstGeom>
+          <a:noFill/>
+          <a:ln/>
+        </p:spPr>
+        <p:txBody>
+          <a:bodyPr wrap="square" lIns="0" tIns="0" rIns="0" bIns="0" rtlCol="0" anchor="ctr"/>
+          <a:lstStyle/>
+          <a:p>
+            <a:pPr algn="r" indent="0" marL="0">
+              <a:buNone/>
+            </a:pPr>
+            <a:r>
+              <a:rPr lang="en-US" sz="1000" dirty="0">
+                <a:solidFill>
+                  <a:srgbClr val="5F7284"/>
+                </a:solidFill>
+                <a:latin typeface="Calibri" pitchFamily="34" charset="0"/>
+                <a:ea typeface="Calibri" pitchFamily="34" charset="-122"/>
+                <a:cs typeface="Calibri" pitchFamily="34" charset="-120"/>
+              </a:rPr>
+              <a:t>CS 301R · Session 16 · Ship the Front Door</a:t>
+            </a:r>
+            <a:endParaRPr lang="en-US" sz="1000" dirty="0"/>
+          </a:p>
+        </p:txBody>
+      </p:sp>
+      <p:sp>
+        <p:nvSpPr>
+          <p:cNvPr id="19" name="Text 15"/>
+          <p:cNvSpPr/>
+          <p:nvPr/>
+        </p:nvSpPr>
+        <p:spPr>
+          <a:xfrm>
+            <a:off x="548640" y="6437376"/>
+            <a:ext cx="548640" cy="274320"/>
+          </a:xfrm>
+          <a:prstGeom prst="rect">
+            <a:avLst/>
+          </a:prstGeom>
+          <a:noFill/>
+          <a:ln/>
+        </p:spPr>
+        <p:txBody>
+          <a:bodyPr wrap="square" lIns="0" tIns="0" rIns="0" bIns="0" rtlCol="0" anchor="ctr"/>
+          <a:lstStyle/>
+          <a:p>
+            <a:pPr indent="0" marL="0">
+              <a:buNone/>
+            </a:pPr>
+            <a:r>
+              <a:rPr lang="en-US" sz="1000" dirty="0">
+                <a:solidFill>
+                  <a:srgbClr val="5F7284"/>
+                </a:solidFill>
+                <a:latin typeface="Calibri" pitchFamily="34" charset="0"/>
+                <a:ea typeface="Calibri" pitchFamily="34" charset="-122"/>
+                <a:cs typeface="Calibri" pitchFamily="34" charset="-120"/>
+              </a:rPr>
+              <a:t>11</a:t>
+            </a:r>
+            <a:endParaRPr lang="en-US" sz="1000" dirty="0"/>
+          </a:p>
+        </p:txBody>
+      </p:sp>
+    </p:spTree>
+  </p:cSld>
+  <p:clrMapOvr>
+    <a:masterClrMapping/>
+  </p:clrMapOvr>
+</p:sld>
+</file>
+
+<file path=ppt/slides/slide12.xml><?xml version="1.0" encoding="utf-8"?>
+<p:sld xmlns:a="http://schemas.openxmlformats.org/drawingml/2006/main" xmlns:r="http://schemas.openxmlformats.org/officeDocument/2006/relationships" xmlns:p="http://schemas.openxmlformats.org/presentationml/2006/main">
+  <p:cSld name="Slide 12">
     <p:bg>
       <p:bgPr>
         <a:solidFill>
@@ -3054,7 +3881,7 @@
                 <a:ea typeface="Calibri" pitchFamily="34" charset="-122"/>
                 <a:cs typeface="Calibri" pitchFamily="34" charset="-120"/>
               </a:rPr>
-              <a:t>11</a:t>
+              <a:t>12</a:t>
             </a:r>
             <a:endParaRPr lang="en-US" sz="1000" dirty="0"/>
           </a:p>
@@ -7458,7 +8285,7 @@
                 <a:ea typeface="Calibri" pitchFamily="34" charset="-122"/>
                 <a:cs typeface="Calibri" pitchFamily="34" charset="-120"/>
               </a:rPr>
-              <a:t>BEFORE THERE'S CODE</a:t>
+              <a:t>TEMPLATES · PROP LOFT'S TWO ISSUE FORMS</a:t>
             </a:r>
             <a:endParaRPr lang="en-US" sz="1400" dirty="0"/>
           </a:p>
@@ -7497,7 +8324,7 @@
                 <a:ea typeface="Cambria" pitchFamily="34" charset="-122"/>
                 <a:cs typeface="Cambria" pitchFamily="34" charset="-120"/>
               </a:rPr>
-              <a:t>An honest status beats a quickstart that fails</a:t>
+              <a:t>Every required field is a norm you only write once</a:t>
             </a:r>
             <a:endParaRPr lang="en-US" sz="3100" dirty="0"/>
           </a:p>
@@ -7505,61 +8332,22 @@
       </p:sp>
       <p:sp>
         <p:nvSpPr>
-          <p:cNvPr id="5" name="Text 3"/>
+          <p:cNvPr id="5" name="Shape 3"/>
           <p:cNvSpPr/>
           <p:nvPr/>
         </p:nvSpPr>
         <p:spPr>
           <a:xfrm>
             <a:off x="548640" y="1737360"/>
-            <a:ext cx="5440680" cy="365760"/>
-          </a:xfrm>
-          <a:prstGeom prst="rect">
-            <a:avLst/>
-          </a:prstGeom>
-          <a:noFill/>
-          <a:ln/>
-        </p:spPr>
-        <p:txBody>
-          <a:bodyPr wrap="square" lIns="0" tIns="0" rIns="0" bIns="0" rtlCol="0" anchor="ctr"/>
-          <a:lstStyle/>
-          <a:p>
-            <a:pPr indent="0" marL="0">
-              <a:buNone/>
-            </a:pPr>
-            <a:r>
-              <a:rPr lang="en-US" sz="1600" b="1" dirty="0">
-                <a:solidFill>
-                  <a:srgbClr val="0E6E6D"/>
-                </a:solidFill>
-                <a:latin typeface="Consolas" pitchFamily="34" charset="0"/>
-                <a:ea typeface="Consolas" pitchFamily="34" charset="-122"/>
-                <a:cs typeface="Consolas" pitchFamily="34" charset="-120"/>
-              </a:rPr>
-              <a:t>README.md</a:t>
-            </a:r>
-            <a:endParaRPr lang="en-US" sz="1600" dirty="0"/>
-          </a:p>
-        </p:txBody>
-      </p:sp>
-      <p:sp>
-        <p:nvSpPr>
-          <p:cNvPr id="6" name="Shape 4"/>
-          <p:cNvSpPr/>
-          <p:nvPr/>
-        </p:nvSpPr>
-        <p:spPr>
-          <a:xfrm>
-            <a:off x="548640" y="2148840"/>
-            <a:ext cx="5440680" cy="2834640"/>
+            <a:ext cx="5440680" cy="566928"/>
           </a:xfrm>
           <a:prstGeom prst="roundRect">
             <a:avLst>
-              <a:gd name="adj" fmla="val 2581"/>
+              <a:gd name="adj" fmla="val 14516"/>
             </a:avLst>
           </a:prstGeom>
           <a:solidFill>
-            <a:srgbClr val="1E3352"/>
+            <a:srgbClr val="D9614C"/>
           </a:solidFill>
           <a:ln/>
           <a:effectLst>
@@ -7573,176 +8361,14 @@
       </p:sp>
       <p:sp>
         <p:nvSpPr>
-          <p:cNvPr id="7" name="Text 5"/>
-          <p:cNvSpPr/>
-          <p:nvPr/>
-        </p:nvSpPr>
-        <p:spPr>
-          <a:xfrm>
-            <a:off x="822960" y="2313432"/>
-            <a:ext cx="4892040" cy="2505456"/>
-          </a:xfrm>
-          <a:prstGeom prst="rect">
-            <a:avLst/>
-          </a:prstGeom>
-          <a:noFill/>
-          <a:ln/>
-        </p:spPr>
-        <p:txBody>
-          <a:bodyPr wrap="square" lIns="0" tIns="0" rIns="0" bIns="0" rtlCol="0" anchor="t"/>
-          <a:lstStyle/>
-          <a:p>
-            <a:pPr indent="0" marL="0">
-              <a:lnSpc>
-                <a:spcPct val="105000"/>
-              </a:lnSpc>
-              <a:buNone/>
-            </a:pPr>
-            <a:r>
-              <a:rPr lang="en-US" sz="1800" dirty="0">
-                <a:solidFill>
-                  <a:srgbClr val="9FE0B5"/>
-                </a:solidFill>
-                <a:latin typeface="Consolas" pitchFamily="34" charset="0"/>
-                <a:ea typeface="Consolas" pitchFamily="34" charset="-122"/>
-                <a:cs typeface="Consolas" pitchFamily="34" charset="-120"/>
-              </a:rPr>
-              <a:t>## Status</a:t>
-            </a:r>
-            <a:endParaRPr lang="en-US" sz="1800" dirty="0"/>
-          </a:p>
-          <a:p>
-            <a:pPr indent="0" marL="0">
-              <a:lnSpc>
-                <a:spcPct val="105000"/>
-              </a:lnSpc>
-              <a:buNone/>
-            </a:pPr>
-            <a:r>
-              <a:rPr lang="en-US" sz="1800" dirty="0">
-                <a:solidFill>
-                  <a:srgbClr val="E8EEF3"/>
-                </a:solidFill>
-                <a:latin typeface="Consolas" pitchFamily="34" charset="0"/>
-                <a:ea typeface="Consolas" pitchFamily="34" charset="-122"/>
-                <a:cs typeface="Consolas" pitchFamily="34" charset="-120"/>
-              </a:rPr>
-              <a:t> </a:t>
-            </a:r>
-            <a:endParaRPr lang="en-US" sz="1800" dirty="0"/>
-          </a:p>
-          <a:p>
-            <a:pPr indent="0" marL="0">
-              <a:lnSpc>
-                <a:spcPct val="105000"/>
-              </a:lnSpc>
-              <a:buNone/>
-            </a:pPr>
-            <a:r>
-              <a:rPr lang="en-US" sz="1800" dirty="0">
-                <a:solidFill>
-                  <a:srgbClr val="E8EEF3"/>
-                </a:solidFill>
-                <a:latin typeface="Consolas" pitchFamily="34" charset="0"/>
-                <a:ea typeface="Consolas" pitchFamily="34" charset="-122"/>
-                <a:cs typeface="Consolas" pitchFamily="34" charset="-120"/>
-              </a:rPr>
-              <a:t>Early development. Nothing</a:t>
-            </a:r>
-            <a:endParaRPr lang="en-US" sz="1800" dirty="0"/>
-          </a:p>
-          <a:p>
-            <a:pPr indent="0" marL="0">
-              <a:lnSpc>
-                <a:spcPct val="105000"/>
-              </a:lnSpc>
-              <a:buNone/>
-            </a:pPr>
-            <a:r>
-              <a:rPr lang="en-US" sz="1800" dirty="0">
-                <a:solidFill>
-                  <a:srgbClr val="E8EEF3"/>
-                </a:solidFill>
-                <a:latin typeface="Consolas" pitchFamily="34" charset="0"/>
-                <a:ea typeface="Consolas" pitchFamily="34" charset="-122"/>
-                <a:cs typeface="Consolas" pitchFamily="34" charset="-120"/>
-              </a:rPr>
-              <a:t>runs yet: the first build</a:t>
-            </a:r>
-            <a:endParaRPr lang="en-US" sz="1800" dirty="0"/>
-          </a:p>
-          <a:p>
-            <a:pPr indent="0" marL="0">
-              <a:lnSpc>
-                <a:spcPct val="105000"/>
-              </a:lnSpc>
-              <a:buNone/>
-            </a:pPr>
-            <a:r>
-              <a:rPr lang="en-US" sz="1800" dirty="0">
-                <a:solidFill>
-                  <a:srgbClr val="E8EEF3"/>
-                </a:solidFill>
-                <a:latin typeface="Consolas" pitchFamily="34" charset="0"/>
-                <a:ea typeface="Consolas" pitchFamily="34" charset="-122"/>
-                <a:cs typeface="Consolas" pitchFamily="34" charset="-120"/>
-              </a:rPr>
-              <a:t>lands in November. Setup</a:t>
-            </a:r>
-            <a:endParaRPr lang="en-US" sz="1800" dirty="0"/>
-          </a:p>
-          <a:p>
-            <a:pPr indent="0" marL="0">
-              <a:lnSpc>
-                <a:spcPct val="105000"/>
-              </a:lnSpc>
-              <a:buNone/>
-            </a:pPr>
-            <a:r>
-              <a:rPr lang="en-US" sz="1800" dirty="0">
-                <a:solidFill>
-                  <a:srgbClr val="E8EEF3"/>
-                </a:solidFill>
-                <a:latin typeface="Consolas" pitchFamily="34" charset="0"/>
-                <a:ea typeface="Consolas" pitchFamily="34" charset="-122"/>
-                <a:cs typeface="Consolas" pitchFamily="34" charset="-120"/>
-              </a:rPr>
-              <a:t>instructions will be in</a:t>
-            </a:r>
-            <a:endParaRPr lang="en-US" sz="1800" dirty="0"/>
-          </a:p>
-          <a:p>
-            <a:pPr indent="0" marL="0">
-              <a:lnSpc>
-                <a:spcPct val="105000"/>
-              </a:lnSpc>
-              <a:buNone/>
-            </a:pPr>
-            <a:r>
-              <a:rPr lang="en-US" sz="1800" dirty="0">
-                <a:solidFill>
-                  <a:srgbClr val="E8EEF3"/>
-                </a:solidFill>
-                <a:latin typeface="Consolas" pitchFamily="34" charset="0"/>
-                <a:ea typeface="Consolas" pitchFamily="34" charset="-122"/>
-                <a:cs typeface="Consolas" pitchFamily="34" charset="-120"/>
-              </a:rPr>
-              <a:t>docs/setup.md.</a:t>
-            </a:r>
-            <a:endParaRPr lang="en-US" sz="1800" dirty="0"/>
-          </a:p>
-        </p:txBody>
-      </p:sp>
-      <p:sp>
-        <p:nvSpPr>
-          <p:cNvPr id="8" name="Text 6"/>
-          <p:cNvSpPr/>
-          <p:nvPr/>
-        </p:nvSpPr>
-        <p:spPr>
-          <a:xfrm>
-            <a:off x="6172200" y="1737360"/>
-            <a:ext cx="5440680" cy="365760"/>
+          <p:cNvPr id="6" name="Text 4"/>
+          <p:cNvSpPr/>
+          <p:nvPr/>
+        </p:nvSpPr>
+        <p:spPr>
+          <a:xfrm>
+            <a:off x="822960" y="1737360"/>
+            <a:ext cx="4937760" cy="566928"/>
           </a:xfrm>
           <a:prstGeom prst="rect">
             <a:avLst/>
@@ -7758,38 +8384,52 @@
               <a:buNone/>
             </a:pPr>
             <a:r>
-              <a:rPr lang="en-US" sz="1600" b="1" dirty="0">
-                <a:solidFill>
-                  <a:srgbClr val="0E6E6D"/>
-                </a:solidFill>
-                <a:latin typeface="Consolas" pitchFamily="34" charset="0"/>
-                <a:ea typeface="Consolas" pitchFamily="34" charset="-122"/>
-                <a:cs typeface="Consolas" pitchFamily="34" charset="-120"/>
-              </a:rPr>
-              <a:t>docs/setup.md</a:t>
-            </a:r>
-            <a:endParaRPr lang="en-US" sz="1600" dirty="0"/>
-          </a:p>
-        </p:txBody>
-      </p:sp>
-      <p:sp>
-        <p:nvSpPr>
-          <p:cNvPr id="9" name="Shape 7"/>
-          <p:cNvSpPr/>
-          <p:nvPr/>
-        </p:nvSpPr>
-        <p:spPr>
-          <a:xfrm>
-            <a:off x="6172200" y="2148840"/>
-            <a:ext cx="5440680" cy="2834640"/>
+              <a:rPr lang="en-US" sz="1900" b="1" dirty="0">
+                <a:solidFill>
+                  <a:srgbClr val="FFFFFF"/>
+                </a:solidFill>
+                <a:latin typeface="Calibri" pitchFamily="34" charset="0"/>
+                <a:ea typeface="Calibri" pitchFamily="34" charset="-122"/>
+                <a:cs typeface="Calibri" pitchFamily="34" charset="-120"/>
+              </a:rPr>
+              <a:t>Bug report</a:t>
+            </a:r>
+            <a:pPr indent="0" marL="0">
+              <a:buNone/>
+            </a:pPr>
+            <a:r>
+              <a:rPr lang="en-US" sz="1500" dirty="0">
+                <a:solidFill>
+                  <a:srgbClr val="FFFFFF"/>
+                </a:solidFill>
+                <a:latin typeface="Calibri" pitchFamily="34" charset="0"/>
+                <a:ea typeface="Calibri" pitchFamily="34" charset="-122"/>
+                <a:cs typeface="Calibri" pitchFamily="34" charset="-120"/>
+              </a:rPr>
+              <a:t>   labels: bug · needs triage</a:t>
+            </a:r>
+            <a:endParaRPr lang="en-US" sz="1900" dirty="0"/>
+          </a:p>
+        </p:txBody>
+      </p:sp>
+      <p:sp>
+        <p:nvSpPr>
+          <p:cNvPr id="7" name="Shape 5"/>
+          <p:cNvSpPr/>
+          <p:nvPr/>
+        </p:nvSpPr>
+        <p:spPr>
+          <a:xfrm>
+            <a:off x="548640" y="2395728"/>
+            <a:ext cx="5440680" cy="2907792"/>
           </a:xfrm>
           <a:prstGeom prst="roundRect">
             <a:avLst>
-              <a:gd name="adj" fmla="val 2581"/>
+              <a:gd name="adj" fmla="val 2830"/>
             </a:avLst>
           </a:prstGeom>
           <a:solidFill>
-            <a:srgbClr val="1E3352"/>
+            <a:srgbClr val="F2F6F8"/>
           </a:solidFill>
           <a:ln/>
           <a:effectLst>
@@ -7803,204 +8443,427 @@
       </p:sp>
       <p:sp>
         <p:nvSpPr>
+          <p:cNvPr id="8" name="Text 6"/>
+          <p:cNvSpPr/>
+          <p:nvPr/>
+        </p:nvSpPr>
+        <p:spPr>
+          <a:xfrm>
+            <a:off x="777240" y="2487168"/>
+            <a:ext cx="2057400" cy="530352"/>
+          </a:xfrm>
+          <a:prstGeom prst="rect">
+            <a:avLst/>
+          </a:prstGeom>
+          <a:noFill/>
+          <a:ln/>
+        </p:spPr>
+        <p:txBody>
+          <a:bodyPr wrap="square" lIns="0" tIns="0" rIns="0" bIns="0" rtlCol="0" anchor="ctr"/>
+          <a:lstStyle/>
+          <a:p>
+            <a:pPr indent="0" marL="0">
+              <a:buNone/>
+            </a:pPr>
+            <a:r>
+              <a:rPr lang="en-US" sz="1500" b="1" dirty="0">
+                <a:solidFill>
+                  <a:srgbClr val="1E2A36"/>
+                </a:solidFill>
+                <a:latin typeface="Calibri" pitchFamily="34" charset="0"/>
+                <a:ea typeface="Calibri" pitchFamily="34" charset="-122"/>
+                <a:cs typeface="Calibri" pitchFamily="34" charset="-120"/>
+              </a:rPr>
+              <a:t>Before you file (required box)</a:t>
+            </a:r>
+            <a:endParaRPr lang="en-US" sz="1500" dirty="0"/>
+          </a:p>
+        </p:txBody>
+      </p:sp>
+      <p:sp>
+        <p:nvSpPr>
+          <p:cNvPr id="9" name="Text 7"/>
+          <p:cNvSpPr/>
+          <p:nvPr/>
+        </p:nvSpPr>
+        <p:spPr>
+          <a:xfrm>
+            <a:off x="2926080" y="2487168"/>
+            <a:ext cx="2880360" cy="530352"/>
+          </a:xfrm>
+          <a:prstGeom prst="rect">
+            <a:avLst/>
+          </a:prstGeom>
+          <a:noFill/>
+          <a:ln/>
+        </p:spPr>
+        <p:txBody>
+          <a:bodyPr wrap="square" lIns="0" tIns="0" rIns="0" bIns="0" rtlCol="0" anchor="ctr"/>
+          <a:lstStyle/>
+          <a:p>
+            <a:pPr indent="0" marL="0">
+              <a:lnSpc>
+                <a:spcPct val="98000"/>
+              </a:lnSpc>
+              <a:buNone/>
+            </a:pPr>
+            <a:r>
+              <a:rPr lang="en-US" sz="1500" dirty="0">
+                <a:solidFill>
+                  <a:srgbClr val="5F7284"/>
+                </a:solidFill>
+                <a:latin typeface="Calibri" pitchFamily="34" charset="0"/>
+                <a:ea typeface="Calibri" pitchFamily="34" charset="-122"/>
+                <a:cs typeface="Calibri" pitchFamily="34" charset="-120"/>
+              </a:rPr>
+              <a:t>I searched open and closed issues: no duplicates</a:t>
+            </a:r>
+            <a:endParaRPr lang="en-US" sz="1500" dirty="0"/>
+          </a:p>
+        </p:txBody>
+      </p:sp>
+      <p:sp>
+        <p:nvSpPr>
           <p:cNvPr id="10" name="Text 8"/>
           <p:cNvSpPr/>
           <p:nvPr/>
         </p:nvSpPr>
         <p:spPr>
           <a:xfrm>
-            <a:off x="6446520" y="2313432"/>
-            <a:ext cx="4892040" cy="2505456"/>
-          </a:xfrm>
-          <a:prstGeom prst="rect">
-            <a:avLst/>
-          </a:prstGeom>
-          <a:noFill/>
-          <a:ln/>
-        </p:spPr>
-        <p:txBody>
-          <a:bodyPr wrap="square" lIns="0" tIns="0" rIns="0" bIns="0" rtlCol="0" anchor="t"/>
+            <a:off x="777240" y="3044952"/>
+            <a:ext cx="2057400" cy="530352"/>
+          </a:xfrm>
+          <a:prstGeom prst="rect">
+            <a:avLst/>
+          </a:prstGeom>
+          <a:noFill/>
+          <a:ln/>
+        </p:spPr>
+        <p:txBody>
+          <a:bodyPr wrap="square" lIns="0" tIns="0" rIns="0" bIns="0" rtlCol="0" anchor="ctr"/>
+          <a:lstStyle/>
+          <a:p>
+            <a:pPr indent="0" marL="0">
+              <a:buNone/>
+            </a:pPr>
+            <a:r>
+              <a:rPr lang="en-US" sz="1500" b="1" dirty="0">
+                <a:solidFill>
+                  <a:srgbClr val="1E2A36"/>
+                </a:solidFill>
+                <a:latin typeface="Calibri" pitchFamily="34" charset="0"/>
+                <a:ea typeface="Calibri" pitchFamily="34" charset="-122"/>
+                <a:cs typeface="Calibri" pitchFamily="34" charset="-120"/>
+              </a:rPr>
+              <a:t>Steps to reproduce</a:t>
+            </a:r>
+            <a:endParaRPr lang="en-US" sz="1500" dirty="0"/>
+          </a:p>
+        </p:txBody>
+      </p:sp>
+      <p:sp>
+        <p:nvSpPr>
+          <p:cNvPr id="11" name="Text 9"/>
+          <p:cNvSpPr/>
+          <p:nvPr/>
+        </p:nvSpPr>
+        <p:spPr>
+          <a:xfrm>
+            <a:off x="2926080" y="3044952"/>
+            <a:ext cx="2880360" cy="530352"/>
+          </a:xfrm>
+          <a:prstGeom prst="rect">
+            <a:avLst/>
+          </a:prstGeom>
+          <a:noFill/>
+          <a:ln/>
+        </p:spPr>
+        <p:txBody>
+          <a:bodyPr wrap="square" lIns="0" tIns="0" rIns="0" bIns="0" rtlCol="0" anchor="ctr"/>
           <a:lstStyle/>
           <a:p>
             <a:pPr indent="0" marL="0">
               <a:lnSpc>
-                <a:spcPct val="105000"/>
+                <a:spcPct val="98000"/>
               </a:lnSpc>
               <a:buNone/>
             </a:pPr>
             <a:r>
-              <a:rPr lang="en-US" sz="1800" dirty="0">
-                <a:solidFill>
-                  <a:srgbClr val="9FE0B5"/>
-                </a:solidFill>
-                <a:latin typeface="Consolas" pitchFamily="34" charset="0"/>
-                <a:ea typeface="Consolas" pitchFamily="34" charset="-122"/>
-                <a:cs typeface="Consolas" pitchFamily="34" charset="-120"/>
-              </a:rPr>
-              <a:t># Setting up</a:t>
-            </a:r>
-            <a:endParaRPr lang="en-US" sz="1800" dirty="0"/>
-          </a:p>
+              <a:rPr lang="en-US" sz="1500" dirty="0">
+                <a:solidFill>
+                  <a:srgbClr val="5F7284"/>
+                </a:solidFill>
+                <a:latin typeface="Calibri" pitchFamily="34" charset="0"/>
+                <a:ea typeface="Calibri" pitchFamily="34" charset="-122"/>
+                <a:cs typeface="Calibri" pitchFamily="34" charset="-120"/>
+              </a:rPr>
+              <a:t>Numbered, from somewhere a stranger can get to</a:t>
+            </a:r>
+            <a:endParaRPr lang="en-US" sz="1500" dirty="0"/>
+          </a:p>
+        </p:txBody>
+      </p:sp>
+      <p:sp>
+        <p:nvSpPr>
+          <p:cNvPr id="12" name="Text 10"/>
+          <p:cNvSpPr/>
+          <p:nvPr/>
+        </p:nvSpPr>
+        <p:spPr>
+          <a:xfrm>
+            <a:off x="777240" y="3602736"/>
+            <a:ext cx="2057400" cy="530352"/>
+          </a:xfrm>
+          <a:prstGeom prst="rect">
+            <a:avLst/>
+          </a:prstGeom>
+          <a:noFill/>
+          <a:ln/>
+        </p:spPr>
+        <p:txBody>
+          <a:bodyPr wrap="square" lIns="0" tIns="0" rIns="0" bIns="0" rtlCol="0" anchor="ctr"/>
+          <a:lstStyle/>
+          <a:p>
+            <a:pPr indent="0" marL="0">
+              <a:buNone/>
+            </a:pPr>
+            <a:r>
+              <a:rPr lang="en-US" sz="1500" b="1" dirty="0">
+                <a:solidFill>
+                  <a:srgbClr val="1E2A36"/>
+                </a:solidFill>
+                <a:latin typeface="Calibri" pitchFamily="34" charset="0"/>
+                <a:ea typeface="Calibri" pitchFamily="34" charset="-122"/>
+                <a:cs typeface="Calibri" pitchFamily="34" charset="-120"/>
+              </a:rPr>
+              <a:t>Expected  /  What actually happened</a:t>
+            </a:r>
+            <a:endParaRPr lang="en-US" sz="1500" dirty="0"/>
+          </a:p>
+        </p:txBody>
+      </p:sp>
+      <p:sp>
+        <p:nvSpPr>
+          <p:cNvPr id="13" name="Text 11"/>
+          <p:cNvSpPr/>
+          <p:nvPr/>
+        </p:nvSpPr>
+        <p:spPr>
+          <a:xfrm>
+            <a:off x="2926080" y="3602736"/>
+            <a:ext cx="2880360" cy="530352"/>
+          </a:xfrm>
+          <a:prstGeom prst="rect">
+            <a:avLst/>
+          </a:prstGeom>
+          <a:noFill/>
+          <a:ln/>
+        </p:spPr>
+        <p:txBody>
+          <a:bodyPr wrap="square" lIns="0" tIns="0" rIns="0" bIns="0" rtlCol="0" anchor="ctr"/>
+          <a:lstStyle/>
           <a:p>
             <a:pPr indent="0" marL="0">
               <a:lnSpc>
-                <a:spcPct val="105000"/>
+                <a:spcPct val="98000"/>
               </a:lnSpc>
               <a:buNone/>
             </a:pPr>
             <a:r>
-              <a:rPr lang="en-US" sz="1800" dirty="0">
-                <a:solidFill>
-                  <a:srgbClr val="E8EEF3"/>
-                </a:solidFill>
-                <a:latin typeface="Consolas" pitchFamily="34" charset="0"/>
-                <a:ea typeface="Consolas" pitchFamily="34" charset="-122"/>
-                <a:cs typeface="Consolas" pitchFamily="34" charset="-120"/>
-              </a:rPr>
-              <a:t> </a:t>
-            </a:r>
-            <a:endParaRPr lang="en-US" sz="1800" dirty="0"/>
-          </a:p>
+              <a:rPr lang="en-US" sz="1500" dirty="0">
+                <a:solidFill>
+                  <a:srgbClr val="5F7284"/>
+                </a:solidFill>
+                <a:latin typeface="Calibri" pitchFamily="34" charset="0"/>
+                <a:ea typeface="Calibri" pitchFamily="34" charset="-122"/>
+                <a:cs typeface="Calibri" pitchFamily="34" charset="-120"/>
+              </a:rPr>
+              <a:t>Two fields, so neither gets skipped</a:t>
+            </a:r>
+            <a:endParaRPr lang="en-US" sz="1500" dirty="0"/>
+          </a:p>
+        </p:txBody>
+      </p:sp>
+      <p:sp>
+        <p:nvSpPr>
+          <p:cNvPr id="14" name="Text 12"/>
+          <p:cNvSpPr/>
+          <p:nvPr/>
+        </p:nvSpPr>
+        <p:spPr>
+          <a:xfrm>
+            <a:off x="777240" y="4160520"/>
+            <a:ext cx="2057400" cy="530352"/>
+          </a:xfrm>
+          <a:prstGeom prst="rect">
+            <a:avLst/>
+          </a:prstGeom>
+          <a:noFill/>
+          <a:ln/>
+        </p:spPr>
+        <p:txBody>
+          <a:bodyPr wrap="square" lIns="0" tIns="0" rIns="0" bIns="0" rtlCol="0" anchor="ctr"/>
+          <a:lstStyle/>
+          <a:p>
+            <a:pPr indent="0" marL="0">
+              <a:buNone/>
+            </a:pPr>
+            <a:r>
+              <a:rPr lang="en-US" sz="1500" b="1" dirty="0">
+                <a:solidFill>
+                  <a:srgbClr val="1E2A36"/>
+                </a:solidFill>
+                <a:latin typeface="Calibri" pitchFamily="34" charset="0"/>
+                <a:ea typeface="Calibri" pitchFamily="34" charset="-122"/>
+                <a:cs typeface="Calibri" pitchFamily="34" charset="-120"/>
+              </a:rPr>
+              <a:t>Environment</a:t>
+            </a:r>
+            <a:endParaRPr lang="en-US" sz="1500" dirty="0"/>
+          </a:p>
+        </p:txBody>
+      </p:sp>
+      <p:sp>
+        <p:nvSpPr>
+          <p:cNvPr id="15" name="Text 13"/>
+          <p:cNvSpPr/>
+          <p:nvPr/>
+        </p:nvSpPr>
+        <p:spPr>
+          <a:xfrm>
+            <a:off x="2926080" y="4160520"/>
+            <a:ext cx="2880360" cy="530352"/>
+          </a:xfrm>
+          <a:prstGeom prst="rect">
+            <a:avLst/>
+          </a:prstGeom>
+          <a:noFill/>
+          <a:ln/>
+        </p:spPr>
+        <p:txBody>
+          <a:bodyPr wrap="square" lIns="0" tIns="0" rIns="0" bIns="0" rtlCol="0" anchor="ctr"/>
+          <a:lstStyle/>
           <a:p>
             <a:pPr indent="0" marL="0">
               <a:lnSpc>
-                <a:spcPct val="105000"/>
+                <a:spcPct val="98000"/>
               </a:lnSpc>
               <a:buNone/>
             </a:pPr>
             <a:r>
-              <a:rPr lang="en-US" sz="1800" dirty="0">
-                <a:solidFill>
-                  <a:srgbClr val="E8EEF3"/>
-                </a:solidFill>
-                <a:latin typeface="Consolas" pitchFamily="34" charset="0"/>
-                <a:ea typeface="Consolas" pitchFamily="34" charset="-122"/>
-                <a:cs typeface="Consolas" pitchFamily="34" charset="-120"/>
-              </a:rPr>
-              <a:t>Stack: Python 3.12, Django,</a:t>
-            </a:r>
-            <a:endParaRPr lang="en-US" sz="1800" dirty="0"/>
-          </a:p>
+              <a:rPr lang="en-US" sz="1500" dirty="0">
+                <a:solidFill>
+                  <a:srgbClr val="5F7284"/>
+                </a:solidFill>
+                <a:latin typeface="Calibri" pitchFamily="34" charset="0"/>
+                <a:ea typeface="Calibri" pitchFamily="34" charset="-122"/>
+                <a:cs typeface="Calibri" pitchFamily="34" charset="-120"/>
+              </a:rPr>
+              <a:t>An example shows the shape: "Firefox 131 on Windows 11"</a:t>
+            </a:r>
+            <a:endParaRPr lang="en-US" sz="1500" dirty="0"/>
+          </a:p>
+        </p:txBody>
+      </p:sp>
+      <p:sp>
+        <p:nvSpPr>
+          <p:cNvPr id="16" name="Text 14"/>
+          <p:cNvSpPr/>
+          <p:nvPr/>
+        </p:nvSpPr>
+        <p:spPr>
+          <a:xfrm>
+            <a:off x="777240" y="4718304"/>
+            <a:ext cx="2057400" cy="530352"/>
+          </a:xfrm>
+          <a:prstGeom prst="rect">
+            <a:avLst/>
+          </a:prstGeom>
+          <a:noFill/>
+          <a:ln/>
+        </p:spPr>
+        <p:txBody>
+          <a:bodyPr wrap="square" lIns="0" tIns="0" rIns="0" bIns="0" rtlCol="0" anchor="ctr"/>
+          <a:lstStyle/>
+          <a:p>
+            <a:pPr indent="0" marL="0">
+              <a:buNone/>
+            </a:pPr>
+            <a:r>
+              <a:rPr lang="en-US" sz="1500" b="1" dirty="0">
+                <a:solidFill>
+                  <a:srgbClr val="1E2A36"/>
+                </a:solidFill>
+                <a:latin typeface="Calibri" pitchFamily="34" charset="0"/>
+                <a:ea typeface="Calibri" pitchFamily="34" charset="-122"/>
+                <a:cs typeface="Calibri" pitchFamily="34" charset="-120"/>
+              </a:rPr>
+              <a:t>Anything else</a:t>
+            </a:r>
+            <a:endParaRPr lang="en-US" sz="1500" dirty="0"/>
+          </a:p>
+        </p:txBody>
+      </p:sp>
+      <p:sp>
+        <p:nvSpPr>
+          <p:cNvPr id="17" name="Text 15"/>
+          <p:cNvSpPr/>
+          <p:nvPr/>
+        </p:nvSpPr>
+        <p:spPr>
+          <a:xfrm>
+            <a:off x="2926080" y="4718304"/>
+            <a:ext cx="2880360" cy="530352"/>
+          </a:xfrm>
+          <a:prstGeom prst="rect">
+            <a:avLst/>
+          </a:prstGeom>
+          <a:noFill/>
+          <a:ln/>
+        </p:spPr>
+        <p:txBody>
+          <a:bodyPr wrap="square" lIns="0" tIns="0" rIns="0" bIns="0" rtlCol="0" anchor="ctr"/>
+          <a:lstStyle/>
           <a:p>
             <a:pPr indent="0" marL="0">
               <a:lnSpc>
-                <a:spcPct val="105000"/>
+                <a:spcPct val="98000"/>
               </a:lnSpc>
               <a:buNone/>
             </a:pPr>
             <a:r>
-              <a:rPr lang="en-US" sz="1800" dirty="0">
-                <a:solidFill>
-                  <a:srgbClr val="E8EEF3"/>
-                </a:solidFill>
-                <a:latin typeface="Consolas" pitchFamily="34" charset="0"/>
-                <a:ea typeface="Consolas" pitchFamily="34" charset="-122"/>
-                <a:cs typeface="Consolas" pitchFamily="34" charset="-120"/>
-              </a:rPr>
-              <a:t>SQLite</a:t>
-            </a:r>
-            <a:endParaRPr lang="en-US" sz="1800" dirty="0"/>
-          </a:p>
-          <a:p>
-            <a:pPr indent="0" marL="0">
-              <a:lnSpc>
-                <a:spcPct val="105000"/>
-              </a:lnSpc>
-              <a:buNone/>
-            </a:pPr>
-            <a:r>
-              <a:rPr lang="en-US" sz="1800" dirty="0">
-                <a:solidFill>
-                  <a:srgbClr val="E8EEF3"/>
-                </a:solidFill>
-                <a:latin typeface="Consolas" pitchFamily="34" charset="0"/>
-                <a:ea typeface="Consolas" pitchFamily="34" charset="-122"/>
-                <a:cs typeface="Consolas" pitchFamily="34" charset="-120"/>
-              </a:rPr>
-              <a:t> </a:t>
-            </a:r>
-            <a:endParaRPr lang="en-US" sz="1800" dirty="0"/>
-          </a:p>
-          <a:p>
-            <a:pPr indent="0" marL="0">
-              <a:lnSpc>
-                <a:spcPct val="105000"/>
-              </a:lnSpc>
-              <a:buNone/>
-            </a:pPr>
-            <a:r>
-              <a:rPr lang="en-US" sz="1800" dirty="0">
-                <a:solidFill>
-                  <a:srgbClr val="E8EEF3"/>
-                </a:solidFill>
-                <a:latin typeface="Consolas" pitchFamily="34" charset="0"/>
-                <a:ea typeface="Consolas" pitchFamily="34" charset="-122"/>
-                <a:cs typeface="Consolas" pitchFamily="34" charset="-120"/>
-              </a:rPr>
-              <a:t>Setup instructions arrive</a:t>
-            </a:r>
-            <a:endParaRPr lang="en-US" sz="1800" dirty="0"/>
-          </a:p>
-          <a:p>
-            <a:pPr indent="0" marL="0">
-              <a:lnSpc>
-                <a:spcPct val="105000"/>
-              </a:lnSpc>
-              <a:buNone/>
-            </a:pPr>
-            <a:r>
-              <a:rPr lang="en-US" sz="1800" dirty="0">
-                <a:solidFill>
-                  <a:srgbClr val="E8EEF3"/>
-                </a:solidFill>
-                <a:latin typeface="Consolas" pitchFamily="34" charset="0"/>
-                <a:ea typeface="Consolas" pitchFamily="34" charset="-122"/>
-                <a:cs typeface="Consolas" pitchFamily="34" charset="-120"/>
-              </a:rPr>
-              <a:t>with the first runnable</a:t>
-            </a:r>
-            <a:endParaRPr lang="en-US" sz="1800" dirty="0"/>
-          </a:p>
-          <a:p>
-            <a:pPr indent="0" marL="0">
-              <a:lnSpc>
-                <a:spcPct val="105000"/>
-              </a:lnSpc>
-              <a:buNone/>
-            </a:pPr>
-            <a:r>
-              <a:rPr lang="en-US" sz="1800" dirty="0">
-                <a:solidFill>
-                  <a:srgbClr val="E8EEF3"/>
-                </a:solidFill>
-                <a:latin typeface="Consolas" pitchFamily="34" charset="0"/>
-                <a:ea typeface="Consolas" pitchFamily="34" charset="-122"/>
-                <a:cs typeface="Consolas" pitchFamily="34" charset="-120"/>
-              </a:rPr>
-              <a:t>build. Tracked in #1.</a:t>
-            </a:r>
-            <a:endParaRPr lang="en-US" sz="1800" dirty="0"/>
-          </a:p>
-        </p:txBody>
-      </p:sp>
-      <p:sp>
-        <p:nvSpPr>
-          <p:cNvPr id="11" name="Shape 9"/>
-          <p:cNvSpPr/>
-          <p:nvPr/>
-        </p:nvSpPr>
-        <p:spPr>
-          <a:xfrm>
-            <a:off x="548640" y="5212080"/>
-            <a:ext cx="11064240" cy="960120"/>
+              <a:rPr lang="en-US" sz="1500" dirty="0">
+                <a:solidFill>
+                  <a:srgbClr val="5F7284"/>
+                </a:solidFill>
+                <a:latin typeface="Calibri" pitchFamily="34" charset="0"/>
+                <a:ea typeface="Calibri" pitchFamily="34" charset="-122"/>
+                <a:cs typeface="Calibri" pitchFamily="34" charset="-120"/>
+              </a:rPr>
+              <a:t>Logs, screenshots, how often: the evidence</a:t>
+            </a:r>
+            <a:endParaRPr lang="en-US" sz="1500" dirty="0"/>
+          </a:p>
+        </p:txBody>
+      </p:sp>
+      <p:sp>
+        <p:nvSpPr>
+          <p:cNvPr id="18" name="click-1"/>
+          <p:cNvSpPr/>
+          <p:nvPr/>
+        </p:nvSpPr>
+        <p:spPr>
+          <a:xfrm>
+            <a:off x="6172200" y="1737360"/>
+            <a:ext cx="5440680" cy="566928"/>
           </a:xfrm>
           <a:prstGeom prst="roundRect">
             <a:avLst>
-              <a:gd name="adj" fmla="val 8571"/>
+              <a:gd name="adj" fmla="val 14516"/>
             </a:avLst>
           </a:prstGeom>
           <a:solidFill>
-            <a:srgbClr val="FBEEDA"/>
+            <a:srgbClr val="12908F"/>
           </a:solidFill>
           <a:ln/>
           <a:effectLst>
@@ -8014,14 +8877,14 @@
       </p:sp>
       <p:sp>
         <p:nvSpPr>
-          <p:cNvPr id="12" name="Text 10"/>
-          <p:cNvSpPr/>
-          <p:nvPr/>
-        </p:nvSpPr>
-        <p:spPr>
-          <a:xfrm>
-            <a:off x="868680" y="5212080"/>
-            <a:ext cx="10424160" cy="960120"/>
+          <p:cNvPr id="19" name="click-1"/>
+          <p:cNvSpPr/>
+          <p:nvPr/>
+        </p:nvSpPr>
+        <p:spPr>
+          <a:xfrm>
+            <a:off x="6446520" y="1737360"/>
+            <a:ext cx="4937760" cy="566928"/>
           </a:xfrm>
           <a:prstGeom prst="rect">
             <a:avLst/>
@@ -8034,13 +8897,173 @@
           <a:lstStyle/>
           <a:p>
             <a:pPr indent="0" marL="0">
+              <a:buNone/>
+            </a:pPr>
+            <a:r>
+              <a:rPr lang="en-US" sz="1900" b="1" dirty="0">
+                <a:solidFill>
+                  <a:srgbClr val="FFFFFF"/>
+                </a:solidFill>
+                <a:latin typeface="Calibri" pitchFamily="34" charset="0"/>
+                <a:ea typeface="Calibri" pitchFamily="34" charset="-122"/>
+                <a:cs typeface="Calibri" pitchFamily="34" charset="-120"/>
+              </a:rPr>
+              <a:t>Feature request</a:t>
+            </a:r>
+            <a:pPr indent="0" marL="0">
+              <a:buNone/>
+            </a:pPr>
+            <a:r>
+              <a:rPr lang="en-US" sz="1500" dirty="0">
+                <a:solidFill>
+                  <a:srgbClr val="FFFFFF"/>
+                </a:solidFill>
+                <a:latin typeface="Calibri" pitchFamily="34" charset="0"/>
+                <a:ea typeface="Calibri" pitchFamily="34" charset="-122"/>
+                <a:cs typeface="Calibri" pitchFamily="34" charset="-120"/>
+              </a:rPr>
+              <a:t>   labels: enhancement · needs triage</a:t>
+            </a:r>
+            <a:endParaRPr lang="en-US" sz="1900" dirty="0"/>
+          </a:p>
+        </p:txBody>
+      </p:sp>
+      <p:sp>
+        <p:nvSpPr>
+          <p:cNvPr id="20" name="click-1"/>
+          <p:cNvSpPr/>
+          <p:nvPr/>
+        </p:nvSpPr>
+        <p:spPr>
+          <a:xfrm>
+            <a:off x="6172200" y="2395728"/>
+            <a:ext cx="5440680" cy="2907792"/>
+          </a:xfrm>
+          <a:prstGeom prst="roundRect">
+            <a:avLst>
+              <a:gd name="adj" fmla="val 2830"/>
+            </a:avLst>
+          </a:prstGeom>
+          <a:solidFill>
+            <a:srgbClr val="F2F6F8"/>
+          </a:solidFill>
+          <a:ln/>
+          <a:effectLst>
+            <a:outerShdw sx="100000" sy="100000" kx="0" ky="0" algn="bl" rotWithShape="0" blurRad="88900" dist="38100" dir="5400000">
+              <a:srgbClr val="000000">
+                <a:alpha val="13000"/>
+              </a:srgbClr>
+            </a:outerShdw>
+          </a:effectLst>
+        </p:spPr>
+      </p:sp>
+      <p:sp>
+        <p:nvSpPr>
+          <p:cNvPr id="21" name="click-1"/>
+          <p:cNvSpPr/>
+          <p:nvPr/>
+        </p:nvSpPr>
+        <p:spPr>
+          <a:xfrm>
+            <a:off x="6400800" y="2487168"/>
+            <a:ext cx="2057400" cy="530352"/>
+          </a:xfrm>
+          <a:prstGeom prst="rect">
+            <a:avLst/>
+          </a:prstGeom>
+          <a:noFill/>
+          <a:ln/>
+        </p:spPr>
+        <p:txBody>
+          <a:bodyPr wrap="square" lIns="0" tIns="0" rIns="0" bIns="0" rtlCol="0" anchor="ctr"/>
+          <a:lstStyle/>
+          <a:p>
+            <a:pPr indent="0" marL="0">
+              <a:buNone/>
+            </a:pPr>
+            <a:r>
+              <a:rPr lang="en-US" sz="1500" b="1" dirty="0">
+                <a:solidFill>
+                  <a:srgbClr val="1E2A36"/>
+                </a:solidFill>
+                <a:latin typeface="Calibri" pitchFamily="34" charset="0"/>
+                <a:ea typeface="Calibri" pitchFamily="34" charset="-122"/>
+                <a:cs typeface="Calibri" pitchFamily="34" charset="-120"/>
+              </a:rPr>
+              <a:t>Opening note</a:t>
+            </a:r>
+            <a:endParaRPr lang="en-US" sz="1500" dirty="0"/>
+          </a:p>
+        </p:txBody>
+      </p:sp>
+      <p:sp>
+        <p:nvSpPr>
+          <p:cNvPr id="22" name="click-1"/>
+          <p:cNvSpPr/>
+          <p:nvPr/>
+        </p:nvSpPr>
+        <p:spPr>
+          <a:xfrm>
+            <a:off x="8549640" y="2487168"/>
+            <a:ext cx="2880360" cy="530352"/>
+          </a:xfrm>
+          <a:prstGeom prst="rect">
+            <a:avLst/>
+          </a:prstGeom>
+          <a:noFill/>
+          <a:ln/>
+        </p:spPr>
+        <p:txBody>
+          <a:bodyPr wrap="square" lIns="0" tIns="0" rIns="0" bIns="0" rtlCol="0" anchor="ctr"/>
+          <a:lstStyle/>
+          <a:p>
+            <a:pPr indent="0" marL="0">
               <a:lnSpc>
-                <a:spcPct val="104000"/>
+                <a:spcPct val="98000"/>
               </a:lnSpc>
               <a:buNone/>
             </a:pPr>
             <a:r>
-              <a:rPr lang="en-US" sz="1650" b="1" dirty="0">
+              <a:rPr lang="en-US" sz="1500" dirty="0">
+                <a:solidFill>
+                  <a:srgbClr val="5F7284"/>
+                </a:solidFill>
+                <a:latin typeface="Calibri" pitchFamily="34" charset="0"/>
+                <a:ea typeface="Calibri" pitchFamily="34" charset="-122"/>
+                <a:cs typeface="Calibri" pitchFamily="34" charset="-120"/>
+              </a:rPr>
+              <a:t>"Start with the problem, not the solution," and a link to the non-goals</a:t>
+            </a:r>
+            <a:endParaRPr lang="en-US" sz="1500" dirty="0"/>
+          </a:p>
+        </p:txBody>
+      </p:sp>
+      <p:sp>
+        <p:nvSpPr>
+          <p:cNvPr id="23" name="click-1"/>
+          <p:cNvSpPr/>
+          <p:nvPr/>
+        </p:nvSpPr>
+        <p:spPr>
+          <a:xfrm>
+            <a:off x="6400800" y="3044952"/>
+            <a:ext cx="2057400" cy="530352"/>
+          </a:xfrm>
+          <a:prstGeom prst="rect">
+            <a:avLst/>
+          </a:prstGeom>
+          <a:noFill/>
+          <a:ln/>
+        </p:spPr>
+        <p:txBody>
+          <a:bodyPr wrap="square" lIns="0" tIns="0" rIns="0" bIns="0" rtlCol="0" anchor="ctr"/>
+          <a:lstStyle/>
+          <a:p>
+            <a:pPr indent="0" marL="0">
+              <a:buNone/>
+            </a:pPr>
+            <a:r>
+              <a:rPr lang="en-US" sz="1500" b="1" dirty="0">
                 <a:solidFill>
                   <a:srgbClr val="1E2A36"/>
                 </a:solidFill>
@@ -8048,15 +9071,368 @@
                 <a:ea typeface="Calibri" pitchFamily="34" charset="-122"/>
                 <a:cs typeface="Calibri" pitchFamily="34" charset="-120"/>
               </a:rPr>
-              <a:t>A stranger who reads "not yet" knows what to expect. A stranger whose quickstart fails assumes the whole project is broken.</a:t>
-            </a:r>
-            <a:endParaRPr lang="en-US" sz="1650" dirty="0"/>
-          </a:p>
-        </p:txBody>
-      </p:sp>
-      <p:sp>
-        <p:nvSpPr>
-          <p:cNvPr id="13" name="Text 11"/>
+              <a:t>The problem</a:t>
+            </a:r>
+            <a:endParaRPr lang="en-US" sz="1500" dirty="0"/>
+          </a:p>
+        </p:txBody>
+      </p:sp>
+      <p:sp>
+        <p:nvSpPr>
+          <p:cNvPr id="24" name="click-1"/>
+          <p:cNvSpPr/>
+          <p:nvPr/>
+        </p:nvSpPr>
+        <p:spPr>
+          <a:xfrm>
+            <a:off x="8549640" y="3044952"/>
+            <a:ext cx="2880360" cy="530352"/>
+          </a:xfrm>
+          <a:prstGeom prst="rect">
+            <a:avLst/>
+          </a:prstGeom>
+          <a:noFill/>
+          <a:ln/>
+        </p:spPr>
+        <p:txBody>
+          <a:bodyPr wrap="square" lIns="0" tIns="0" rIns="0" bIns="0" rtlCol="0" anchor="ctr"/>
+          <a:lstStyle/>
+          <a:p>
+            <a:pPr indent="0" marL="0">
+              <a:lnSpc>
+                <a:spcPct val="98000"/>
+              </a:lnSpc>
+              <a:buNone/>
+            </a:pPr>
+            <a:r>
+              <a:rPr lang="en-US" sz="1500" dirty="0">
+                <a:solidFill>
+                  <a:srgbClr val="5F7284"/>
+                </a:solidFill>
+                <a:latin typeface="Calibri" pitchFamily="34" charset="0"/>
+                <a:ea typeface="Calibri" pitchFamily="34" charset="-122"/>
+                <a:cs typeface="Calibri" pitchFamily="34" charset="-120"/>
+              </a:rPr>
+              <a:t>What you're trying to do, and what gets in the way: the need</a:t>
+            </a:r>
+            <a:endParaRPr lang="en-US" sz="1500" dirty="0"/>
+          </a:p>
+        </p:txBody>
+      </p:sp>
+      <p:sp>
+        <p:nvSpPr>
+          <p:cNvPr id="25" name="click-1"/>
+          <p:cNvSpPr/>
+          <p:nvPr/>
+        </p:nvSpPr>
+        <p:spPr>
+          <a:xfrm>
+            <a:off x="6400800" y="3602736"/>
+            <a:ext cx="2057400" cy="530352"/>
+          </a:xfrm>
+          <a:prstGeom prst="rect">
+            <a:avLst/>
+          </a:prstGeom>
+          <a:noFill/>
+          <a:ln/>
+        </p:spPr>
+        <p:txBody>
+          <a:bodyPr wrap="square" lIns="0" tIns="0" rIns="0" bIns="0" rtlCol="0" anchor="ctr"/>
+          <a:lstStyle/>
+          <a:p>
+            <a:pPr indent="0" marL="0">
+              <a:buNone/>
+            </a:pPr>
+            <a:r>
+              <a:rPr lang="en-US" sz="1500" b="1" dirty="0">
+                <a:solidFill>
+                  <a:srgbClr val="1E2A36"/>
+                </a:solidFill>
+                <a:latin typeface="Calibri" pitchFamily="34" charset="0"/>
+                <a:ea typeface="Calibri" pitchFamily="34" charset="-122"/>
+                <a:cs typeface="Calibri" pitchFamily="34" charset="-120"/>
+              </a:rPr>
+              <a:t>Who has this problem</a:t>
+            </a:r>
+            <a:endParaRPr lang="en-US" sz="1500" dirty="0"/>
+          </a:p>
+        </p:txBody>
+      </p:sp>
+      <p:sp>
+        <p:nvSpPr>
+          <p:cNvPr id="26" name="click-1"/>
+          <p:cNvSpPr/>
+          <p:nvPr/>
+        </p:nvSpPr>
+        <p:spPr>
+          <a:xfrm>
+            <a:off x="8549640" y="3602736"/>
+            <a:ext cx="2880360" cy="530352"/>
+          </a:xfrm>
+          <a:prstGeom prst="rect">
+            <a:avLst/>
+          </a:prstGeom>
+          <a:noFill/>
+          <a:ln/>
+        </p:spPr>
+        <p:txBody>
+          <a:bodyPr wrap="square" lIns="0" tIns="0" rIns="0" bIns="0" rtlCol="0" anchor="ctr"/>
+          <a:lstStyle/>
+          <a:p>
+            <a:pPr indent="0" marL="0">
+              <a:lnSpc>
+                <a:spcPct val="98000"/>
+              </a:lnSpc>
+              <a:buNone/>
+            </a:pPr>
+            <a:r>
+              <a:rPr lang="en-US" sz="1500" dirty="0">
+                <a:solidFill>
+                  <a:srgbClr val="5F7284"/>
+                </a:solidFill>
+                <a:latin typeface="Calibri" pitchFamily="34" charset="0"/>
+                <a:ea typeface="Calibri" pitchFamily="34" charset="-122"/>
+                <a:cs typeface="Calibri" pitchFamily="34" charset="-120"/>
+              </a:rPr>
+              <a:t>The user, named</a:t>
+            </a:r>
+            <a:endParaRPr lang="en-US" sz="1500" dirty="0"/>
+          </a:p>
+        </p:txBody>
+      </p:sp>
+      <p:sp>
+        <p:nvSpPr>
+          <p:cNvPr id="27" name="click-1"/>
+          <p:cNvSpPr/>
+          <p:nvPr/>
+        </p:nvSpPr>
+        <p:spPr>
+          <a:xfrm>
+            <a:off x="6400800" y="4160520"/>
+            <a:ext cx="2057400" cy="530352"/>
+          </a:xfrm>
+          <a:prstGeom prst="rect">
+            <a:avLst/>
+          </a:prstGeom>
+          <a:noFill/>
+          <a:ln/>
+        </p:spPr>
+        <p:txBody>
+          <a:bodyPr wrap="square" lIns="0" tIns="0" rIns="0" bIns="0" rtlCol="0" anchor="ctr"/>
+          <a:lstStyle/>
+          <a:p>
+            <a:pPr indent="0" marL="0">
+              <a:buNone/>
+            </a:pPr>
+            <a:r>
+              <a:rPr lang="en-US" sz="1500" b="1" dirty="0">
+                <a:solidFill>
+                  <a:srgbClr val="1E2A36"/>
+                </a:solidFill>
+                <a:latin typeface="Calibri" pitchFamily="34" charset="0"/>
+                <a:ea typeface="Calibri" pitchFamily="34" charset="-122"/>
+                <a:cs typeface="Calibri" pitchFamily="34" charset="-120"/>
+              </a:rPr>
+              <a:t>What you do today instead</a:t>
+            </a:r>
+            <a:endParaRPr lang="en-US" sz="1500" dirty="0"/>
+          </a:p>
+        </p:txBody>
+      </p:sp>
+      <p:sp>
+        <p:nvSpPr>
+          <p:cNvPr id="28" name="click-1"/>
+          <p:cNvSpPr/>
+          <p:nvPr/>
+        </p:nvSpPr>
+        <p:spPr>
+          <a:xfrm>
+            <a:off x="8549640" y="4160520"/>
+            <a:ext cx="2880360" cy="530352"/>
+          </a:xfrm>
+          <a:prstGeom prst="rect">
+            <a:avLst/>
+          </a:prstGeom>
+          <a:noFill/>
+          <a:ln/>
+        </p:spPr>
+        <p:txBody>
+          <a:bodyPr wrap="square" lIns="0" tIns="0" rIns="0" bIns="0" rtlCol="0" anchor="ctr"/>
+          <a:lstStyle/>
+          <a:p>
+            <a:pPr indent="0" marL="0">
+              <a:lnSpc>
+                <a:spcPct val="98000"/>
+              </a:lnSpc>
+              <a:buNone/>
+            </a:pPr>
+            <a:r>
+              <a:rPr lang="en-US" sz="1500" dirty="0">
+                <a:solidFill>
+                  <a:srgbClr val="5F7284"/>
+                </a:solidFill>
+                <a:latin typeface="Calibri" pitchFamily="34" charset="0"/>
+                <a:ea typeface="Calibri" pitchFamily="34" charset="-122"/>
+                <a:cs typeface="Calibri" pitchFamily="34" charset="-120"/>
+              </a:rPr>
+              <a:t>The workaround: how much the problem costs now</a:t>
+            </a:r>
+            <a:endParaRPr lang="en-US" sz="1500" dirty="0"/>
+          </a:p>
+        </p:txBody>
+      </p:sp>
+      <p:sp>
+        <p:nvSpPr>
+          <p:cNvPr id="29" name="click-1"/>
+          <p:cNvSpPr/>
+          <p:nvPr/>
+        </p:nvSpPr>
+        <p:spPr>
+          <a:xfrm>
+            <a:off x="6400800" y="4718304"/>
+            <a:ext cx="2057400" cy="530352"/>
+          </a:xfrm>
+          <a:prstGeom prst="rect">
+            <a:avLst/>
+          </a:prstGeom>
+          <a:noFill/>
+          <a:ln/>
+        </p:spPr>
+        <p:txBody>
+          <a:bodyPr wrap="square" lIns="0" tIns="0" rIns="0" bIns="0" rtlCol="0" anchor="ctr"/>
+          <a:lstStyle/>
+          <a:p>
+            <a:pPr indent="0" marL="0">
+              <a:buNone/>
+            </a:pPr>
+            <a:r>
+              <a:rPr lang="en-US" sz="1500" b="1" dirty="0">
+                <a:solidFill>
+                  <a:srgbClr val="1E2A36"/>
+                </a:solidFill>
+                <a:latin typeface="Calibri" pitchFamily="34" charset="0"/>
+                <a:ea typeface="Calibri" pitchFamily="34" charset="-122"/>
+                <a:cs typeface="Calibri" pitchFamily="34" charset="-120"/>
+              </a:rPr>
+              <a:t>An idea (optional)</a:t>
+            </a:r>
+            <a:endParaRPr lang="en-US" sz="1500" dirty="0"/>
+          </a:p>
+        </p:txBody>
+      </p:sp>
+      <p:sp>
+        <p:nvSpPr>
+          <p:cNvPr id="30" name="click-1"/>
+          <p:cNvSpPr/>
+          <p:nvPr/>
+        </p:nvSpPr>
+        <p:spPr>
+          <a:xfrm>
+            <a:off x="8549640" y="4718304"/>
+            <a:ext cx="2880360" cy="530352"/>
+          </a:xfrm>
+          <a:prstGeom prst="rect">
+            <a:avLst/>
+          </a:prstGeom>
+          <a:noFill/>
+          <a:ln/>
+        </p:spPr>
+        <p:txBody>
+          <a:bodyPr wrap="square" lIns="0" tIns="0" rIns="0" bIns="0" rtlCol="0" anchor="ctr"/>
+          <a:lstStyle/>
+          <a:p>
+            <a:pPr indent="0" marL="0">
+              <a:lnSpc>
+                <a:spcPct val="98000"/>
+              </a:lnSpc>
+              <a:buNone/>
+            </a:pPr>
+            <a:r>
+              <a:rPr lang="en-US" sz="1500" dirty="0">
+                <a:solidFill>
+                  <a:srgbClr val="5F7284"/>
+                </a:solidFill>
+                <a:latin typeface="Calibri" pitchFamily="34" charset="0"/>
+                <a:ea typeface="Calibri" pitchFamily="34" charset="-122"/>
+                <a:cs typeface="Calibri" pitchFamily="34" charset="-120"/>
+              </a:rPr>
+              <a:t>The solution comes last, and it's optional</a:t>
+            </a:r>
+            <a:endParaRPr lang="en-US" sz="1500" dirty="0"/>
+          </a:p>
+        </p:txBody>
+      </p:sp>
+      <p:sp>
+        <p:nvSpPr>
+          <p:cNvPr id="31" name="click-2"/>
+          <p:cNvSpPr/>
+          <p:nvPr/>
+        </p:nvSpPr>
+        <p:spPr>
+          <a:xfrm>
+            <a:off x="548640" y="5468112"/>
+            <a:ext cx="11064240" cy="731520"/>
+          </a:xfrm>
+          <a:prstGeom prst="roundRect">
+            <a:avLst>
+              <a:gd name="adj" fmla="val 11250"/>
+            </a:avLst>
+          </a:prstGeom>
+          <a:solidFill>
+            <a:srgbClr val="14233A"/>
+          </a:solidFill>
+          <a:ln/>
+          <a:effectLst>
+            <a:outerShdw sx="100000" sy="100000" kx="0" ky="0" algn="bl" rotWithShape="0" blurRad="88900" dist="38100" dir="5400000">
+              <a:srgbClr val="000000">
+                <a:alpha val="13000"/>
+              </a:srgbClr>
+            </a:outerShdw>
+          </a:effectLst>
+        </p:spPr>
+      </p:sp>
+      <p:sp>
+        <p:nvSpPr>
+          <p:cNvPr id="32" name="click-2"/>
+          <p:cNvSpPr/>
+          <p:nvPr/>
+        </p:nvSpPr>
+        <p:spPr>
+          <a:xfrm>
+            <a:off x="868680" y="5468112"/>
+            <a:ext cx="10424160" cy="731520"/>
+          </a:xfrm>
+          <a:prstGeom prst="rect">
+            <a:avLst/>
+          </a:prstGeom>
+          <a:noFill/>
+          <a:ln/>
+        </p:spPr>
+        <p:txBody>
+          <a:bodyPr wrap="square" lIns="0" tIns="0" rIns="0" bIns="0" rtlCol="0" anchor="ctr"/>
+          <a:lstStyle/>
+          <a:p>
+            <a:pPr indent="0" marL="0">
+              <a:buNone/>
+            </a:pPr>
+            <a:r>
+              <a:rPr lang="en-US" sz="1600" b="1" dirty="0">
+                <a:solidFill>
+                  <a:srgbClr val="FFFFFF"/>
+                </a:solidFill>
+                <a:latin typeface="Calibri" pitchFamily="34" charset="0"/>
+                <a:ea typeface="Calibri" pitchFamily="34" charset="-122"/>
+                <a:cs typeface="Calibri" pitchFamily="34" charset="-120"/>
+              </a:rPr>
+              <a:t>Each form's labels: line triages it on arrival. Create the labels first: a form silently skips any label the repo doesn't have.</a:t>
+            </a:r>
+            <a:endParaRPr lang="en-US" sz="1600" dirty="0"/>
+          </a:p>
+        </p:txBody>
+      </p:sp>
+      <p:sp>
+        <p:nvSpPr>
+          <p:cNvPr id="33" name="Text 31"/>
           <p:cNvSpPr/>
           <p:nvPr/>
         </p:nvSpPr>
@@ -8095,7 +9471,7 @@
       </p:sp>
       <p:sp>
         <p:nvSpPr>
-          <p:cNvPr id="14" name="Text 12"/>
+          <p:cNvPr id="34" name="Text 32"/>
           <p:cNvSpPr/>
           <p:nvPr/>
         </p:nvSpPr>
@@ -8137,6 +9513,494 @@
   <p:clrMapOvr>
     <a:masterClrMapping/>
   </p:clrMapOvr>
+  <p:timing>
+    <p:tnLst>
+      <p:par>
+        <p:cTn id="1" dur="indefinite" restart="never" nodeType="tmRoot">
+          <p:childTnLst>
+            <p:seq concurrent="1" nextAc="seek">
+              <p:cTn id="2" dur="indefinite" nodeType="mainSeq">
+                <p:childTnLst>
+                  <p:par>
+                    <p:cTn id="3" fill="hold">
+                      <p:stCondLst>
+                        <p:cond delay="indefinite"/>
+                      </p:stCondLst>
+                      <p:childTnLst>
+                        <p:par>
+                          <p:cTn id="4" fill="hold">
+                            <p:stCondLst>
+                              <p:cond delay="0"/>
+                            </p:stCondLst>
+                            <p:childTnLst>
+                              <p:par>
+                                <p:cTn id="6" presetID="1" presetClass="entr" presetSubtype="0" fill="hold" grpId="0" nodeType="clickEffect">
+                                  <p:stCondLst>
+                                    <p:cond delay="0"/>
+                                  </p:stCondLst>
+                                  <p:childTnLst>
+                                    <p:set>
+                                      <p:cBhvr>
+                                        <p:cTn id="5" dur="1" fill="hold">
+                                          <p:stCondLst>
+                                            <p:cond delay="0"/>
+                                          </p:stCondLst>
+                                        </p:cTn>
+                                        <p:tgtEl>
+                                          <p:spTgt spid="18"/>
+                                        </p:tgtEl>
+                                        <p:attrNameLst>
+                                          <p:attrName>style.visibility</p:attrName>
+                                        </p:attrNameLst>
+                                      </p:cBhvr>
+                                      <p:to>
+                                        <p:strVal val="visible"/>
+                                      </p:to>
+                                    </p:set>
+                                  </p:childTnLst>
+                                </p:cTn>
+                              </p:par>
+                              <p:par>
+                                <p:cTn id="8" presetID="1" presetClass="entr" presetSubtype="0" fill="hold" grpId="0" nodeType="withEffect">
+                                  <p:stCondLst>
+                                    <p:cond delay="0"/>
+                                  </p:stCondLst>
+                                  <p:childTnLst>
+                                    <p:set>
+                                      <p:cBhvr>
+                                        <p:cTn id="7" dur="1" fill="hold">
+                                          <p:stCondLst>
+                                            <p:cond delay="0"/>
+                                          </p:stCondLst>
+                                        </p:cTn>
+                                        <p:tgtEl>
+                                          <p:spTgt spid="19"/>
+                                        </p:tgtEl>
+                                        <p:attrNameLst>
+                                          <p:attrName>style.visibility</p:attrName>
+                                        </p:attrNameLst>
+                                      </p:cBhvr>
+                                      <p:to>
+                                        <p:strVal val="visible"/>
+                                      </p:to>
+                                    </p:set>
+                                  </p:childTnLst>
+                                </p:cTn>
+                              </p:par>
+                              <p:par>
+                                <p:cTn id="10" presetID="1" presetClass="entr" presetSubtype="0" fill="hold" grpId="0" nodeType="withEffect">
+                                  <p:stCondLst>
+                                    <p:cond delay="0"/>
+                                  </p:stCondLst>
+                                  <p:childTnLst>
+                                    <p:set>
+                                      <p:cBhvr>
+                                        <p:cTn id="9" dur="1" fill="hold">
+                                          <p:stCondLst>
+                                            <p:cond delay="0"/>
+                                          </p:stCondLst>
+                                        </p:cTn>
+                                        <p:tgtEl>
+                                          <p:spTgt spid="20"/>
+                                        </p:tgtEl>
+                                        <p:attrNameLst>
+                                          <p:attrName>style.visibility</p:attrName>
+                                        </p:attrNameLst>
+                                      </p:cBhvr>
+                                      <p:to>
+                                        <p:strVal val="visible"/>
+                                      </p:to>
+                                    </p:set>
+                                  </p:childTnLst>
+                                </p:cTn>
+                              </p:par>
+                              <p:par>
+                                <p:cTn id="12" presetID="1" presetClass="entr" presetSubtype="0" fill="hold" grpId="0" nodeType="withEffect">
+                                  <p:stCondLst>
+                                    <p:cond delay="0"/>
+                                  </p:stCondLst>
+                                  <p:childTnLst>
+                                    <p:set>
+                                      <p:cBhvr>
+                                        <p:cTn id="11" dur="1" fill="hold">
+                                          <p:stCondLst>
+                                            <p:cond delay="0"/>
+                                          </p:stCondLst>
+                                        </p:cTn>
+                                        <p:tgtEl>
+                                          <p:spTgt spid="21"/>
+                                        </p:tgtEl>
+                                        <p:attrNameLst>
+                                          <p:attrName>style.visibility</p:attrName>
+                                        </p:attrNameLst>
+                                      </p:cBhvr>
+                                      <p:to>
+                                        <p:strVal val="visible"/>
+                                      </p:to>
+                                    </p:set>
+                                  </p:childTnLst>
+                                </p:cTn>
+                              </p:par>
+                              <p:par>
+                                <p:cTn id="14" presetID="1" presetClass="entr" presetSubtype="0" fill="hold" grpId="0" nodeType="withEffect">
+                                  <p:stCondLst>
+                                    <p:cond delay="0"/>
+                                  </p:stCondLst>
+                                  <p:childTnLst>
+                                    <p:set>
+                                      <p:cBhvr>
+                                        <p:cTn id="13" dur="1" fill="hold">
+                                          <p:stCondLst>
+                                            <p:cond delay="0"/>
+                                          </p:stCondLst>
+                                        </p:cTn>
+                                        <p:tgtEl>
+                                          <p:spTgt spid="22"/>
+                                        </p:tgtEl>
+                                        <p:attrNameLst>
+                                          <p:attrName>style.visibility</p:attrName>
+                                        </p:attrNameLst>
+                                      </p:cBhvr>
+                                      <p:to>
+                                        <p:strVal val="visible"/>
+                                      </p:to>
+                                    </p:set>
+                                  </p:childTnLst>
+                                </p:cTn>
+                              </p:par>
+                              <p:par>
+                                <p:cTn id="16" presetID="1" presetClass="entr" presetSubtype="0" fill="hold" grpId="0" nodeType="withEffect">
+                                  <p:stCondLst>
+                                    <p:cond delay="0"/>
+                                  </p:stCondLst>
+                                  <p:childTnLst>
+                                    <p:set>
+                                      <p:cBhvr>
+                                        <p:cTn id="15" dur="1" fill="hold">
+                                          <p:stCondLst>
+                                            <p:cond delay="0"/>
+                                          </p:stCondLst>
+                                        </p:cTn>
+                                        <p:tgtEl>
+                                          <p:spTgt spid="23"/>
+                                        </p:tgtEl>
+                                        <p:attrNameLst>
+                                          <p:attrName>style.visibility</p:attrName>
+                                        </p:attrNameLst>
+                                      </p:cBhvr>
+                                      <p:to>
+                                        <p:strVal val="visible"/>
+                                      </p:to>
+                                    </p:set>
+                                  </p:childTnLst>
+                                </p:cTn>
+                              </p:par>
+                              <p:par>
+                                <p:cTn id="18" presetID="1" presetClass="entr" presetSubtype="0" fill="hold" grpId="0" nodeType="withEffect">
+                                  <p:stCondLst>
+                                    <p:cond delay="0"/>
+                                  </p:stCondLst>
+                                  <p:childTnLst>
+                                    <p:set>
+                                      <p:cBhvr>
+                                        <p:cTn id="17" dur="1" fill="hold">
+                                          <p:stCondLst>
+                                            <p:cond delay="0"/>
+                                          </p:stCondLst>
+                                        </p:cTn>
+                                        <p:tgtEl>
+                                          <p:spTgt spid="24"/>
+                                        </p:tgtEl>
+                                        <p:attrNameLst>
+                                          <p:attrName>style.visibility</p:attrName>
+                                        </p:attrNameLst>
+                                      </p:cBhvr>
+                                      <p:to>
+                                        <p:strVal val="visible"/>
+                                      </p:to>
+                                    </p:set>
+                                  </p:childTnLst>
+                                </p:cTn>
+                              </p:par>
+                              <p:par>
+                                <p:cTn id="20" presetID="1" presetClass="entr" presetSubtype="0" fill="hold" grpId="0" nodeType="withEffect">
+                                  <p:stCondLst>
+                                    <p:cond delay="0"/>
+                                  </p:stCondLst>
+                                  <p:childTnLst>
+                                    <p:set>
+                                      <p:cBhvr>
+                                        <p:cTn id="19" dur="1" fill="hold">
+                                          <p:stCondLst>
+                                            <p:cond delay="0"/>
+                                          </p:stCondLst>
+                                        </p:cTn>
+                                        <p:tgtEl>
+                                          <p:spTgt spid="25"/>
+                                        </p:tgtEl>
+                                        <p:attrNameLst>
+                                          <p:attrName>style.visibility</p:attrName>
+                                        </p:attrNameLst>
+                                      </p:cBhvr>
+                                      <p:to>
+                                        <p:strVal val="visible"/>
+                                      </p:to>
+                                    </p:set>
+                                  </p:childTnLst>
+                                </p:cTn>
+                              </p:par>
+                              <p:par>
+                                <p:cTn id="22" presetID="1" presetClass="entr" presetSubtype="0" fill="hold" grpId="0" nodeType="withEffect">
+                                  <p:stCondLst>
+                                    <p:cond delay="0"/>
+                                  </p:stCondLst>
+                                  <p:childTnLst>
+                                    <p:set>
+                                      <p:cBhvr>
+                                        <p:cTn id="21" dur="1" fill="hold">
+                                          <p:stCondLst>
+                                            <p:cond delay="0"/>
+                                          </p:stCondLst>
+                                        </p:cTn>
+                                        <p:tgtEl>
+                                          <p:spTgt spid="26"/>
+                                        </p:tgtEl>
+                                        <p:attrNameLst>
+                                          <p:attrName>style.visibility</p:attrName>
+                                        </p:attrNameLst>
+                                      </p:cBhvr>
+                                      <p:to>
+                                        <p:strVal val="visible"/>
+                                      </p:to>
+                                    </p:set>
+                                  </p:childTnLst>
+                                </p:cTn>
+                              </p:par>
+                              <p:par>
+                                <p:cTn id="24" presetID="1" presetClass="entr" presetSubtype="0" fill="hold" grpId="0" nodeType="withEffect">
+                                  <p:stCondLst>
+                                    <p:cond delay="0"/>
+                                  </p:stCondLst>
+                                  <p:childTnLst>
+                                    <p:set>
+                                      <p:cBhvr>
+                                        <p:cTn id="23" dur="1" fill="hold">
+                                          <p:stCondLst>
+                                            <p:cond delay="0"/>
+                                          </p:stCondLst>
+                                        </p:cTn>
+                                        <p:tgtEl>
+                                          <p:spTgt spid="27"/>
+                                        </p:tgtEl>
+                                        <p:attrNameLst>
+                                          <p:attrName>style.visibility</p:attrName>
+                                        </p:attrNameLst>
+                                      </p:cBhvr>
+                                      <p:to>
+                                        <p:strVal val="visible"/>
+                                      </p:to>
+                                    </p:set>
+                                  </p:childTnLst>
+                                </p:cTn>
+                              </p:par>
+                              <p:par>
+                                <p:cTn id="26" presetID="1" presetClass="entr" presetSubtype="0" fill="hold" grpId="0" nodeType="withEffect">
+                                  <p:stCondLst>
+                                    <p:cond delay="0"/>
+                                  </p:stCondLst>
+                                  <p:childTnLst>
+                                    <p:set>
+                                      <p:cBhvr>
+                                        <p:cTn id="25" dur="1" fill="hold">
+                                          <p:stCondLst>
+                                            <p:cond delay="0"/>
+                                          </p:stCondLst>
+                                        </p:cTn>
+                                        <p:tgtEl>
+                                          <p:spTgt spid="28"/>
+                                        </p:tgtEl>
+                                        <p:attrNameLst>
+                                          <p:attrName>style.visibility</p:attrName>
+                                        </p:attrNameLst>
+                                      </p:cBhvr>
+                                      <p:to>
+                                        <p:strVal val="visible"/>
+                                      </p:to>
+                                    </p:set>
+                                  </p:childTnLst>
+                                </p:cTn>
+                              </p:par>
+                              <p:par>
+                                <p:cTn id="28" presetID="1" presetClass="entr" presetSubtype="0" fill="hold" grpId="0" nodeType="withEffect">
+                                  <p:stCondLst>
+                                    <p:cond delay="0"/>
+                                  </p:stCondLst>
+                                  <p:childTnLst>
+                                    <p:set>
+                                      <p:cBhvr>
+                                        <p:cTn id="27" dur="1" fill="hold">
+                                          <p:stCondLst>
+                                            <p:cond delay="0"/>
+                                          </p:stCondLst>
+                                        </p:cTn>
+                                        <p:tgtEl>
+                                          <p:spTgt spid="29"/>
+                                        </p:tgtEl>
+                                        <p:attrNameLst>
+                                          <p:attrName>style.visibility</p:attrName>
+                                        </p:attrNameLst>
+                                      </p:cBhvr>
+                                      <p:to>
+                                        <p:strVal val="visible"/>
+                                      </p:to>
+                                    </p:set>
+                                  </p:childTnLst>
+                                </p:cTn>
+                              </p:par>
+                              <p:par>
+                                <p:cTn id="30" presetID="1" presetClass="entr" presetSubtype="0" fill="hold" grpId="0" nodeType="withEffect">
+                                  <p:stCondLst>
+                                    <p:cond delay="0"/>
+                                  </p:stCondLst>
+                                  <p:childTnLst>
+                                    <p:set>
+                                      <p:cBhvr>
+                                        <p:cTn id="29" dur="1" fill="hold">
+                                          <p:stCondLst>
+                                            <p:cond delay="0"/>
+                                          </p:stCondLst>
+                                        </p:cTn>
+                                        <p:tgtEl>
+                                          <p:spTgt spid="30"/>
+                                        </p:tgtEl>
+                                        <p:attrNameLst>
+                                          <p:attrName>style.visibility</p:attrName>
+                                        </p:attrNameLst>
+                                      </p:cBhvr>
+                                      <p:to>
+                                        <p:strVal val="visible"/>
+                                      </p:to>
+                                    </p:set>
+                                  </p:childTnLst>
+                                </p:cTn>
+                              </p:par>
+                            </p:childTnLst>
+                          </p:cTn>
+                        </p:par>
+                      </p:childTnLst>
+                    </p:cTn>
+                  </p:par>
+                  <p:par>
+                    <p:cTn id="31" fill="hold">
+                      <p:stCondLst>
+                        <p:cond delay="indefinite"/>
+                      </p:stCondLst>
+                      <p:childTnLst>
+                        <p:par>
+                          <p:cTn id="32" fill="hold">
+                            <p:stCondLst>
+                              <p:cond delay="0"/>
+                            </p:stCondLst>
+                            <p:childTnLst>
+                              <p:par>
+                                <p:cTn id="34" presetID="1" presetClass="entr" presetSubtype="0" fill="hold" grpId="0" nodeType="clickEffect">
+                                  <p:stCondLst>
+                                    <p:cond delay="0"/>
+                                  </p:stCondLst>
+                                  <p:childTnLst>
+                                    <p:set>
+                                      <p:cBhvr>
+                                        <p:cTn id="33" dur="1" fill="hold">
+                                          <p:stCondLst>
+                                            <p:cond delay="0"/>
+                                          </p:stCondLst>
+                                        </p:cTn>
+                                        <p:tgtEl>
+                                          <p:spTgt spid="31"/>
+                                        </p:tgtEl>
+                                        <p:attrNameLst>
+                                          <p:attrName>style.visibility</p:attrName>
+                                        </p:attrNameLst>
+                                      </p:cBhvr>
+                                      <p:to>
+                                        <p:strVal val="visible"/>
+                                      </p:to>
+                                    </p:set>
+                                  </p:childTnLst>
+                                </p:cTn>
+                              </p:par>
+                              <p:par>
+                                <p:cTn id="36" presetID="1" presetClass="entr" presetSubtype="0" fill="hold" grpId="0" nodeType="withEffect">
+                                  <p:stCondLst>
+                                    <p:cond delay="0"/>
+                                  </p:stCondLst>
+                                  <p:childTnLst>
+                                    <p:set>
+                                      <p:cBhvr>
+                                        <p:cTn id="35" dur="1" fill="hold">
+                                          <p:stCondLst>
+                                            <p:cond delay="0"/>
+                                          </p:stCondLst>
+                                        </p:cTn>
+                                        <p:tgtEl>
+                                          <p:spTgt spid="32"/>
+                                        </p:tgtEl>
+                                        <p:attrNameLst>
+                                          <p:attrName>style.visibility</p:attrName>
+                                        </p:attrNameLst>
+                                      </p:cBhvr>
+                                      <p:to>
+                                        <p:strVal val="visible"/>
+                                      </p:to>
+                                    </p:set>
+                                  </p:childTnLst>
+                                </p:cTn>
+                              </p:par>
+                            </p:childTnLst>
+                          </p:cTn>
+                        </p:par>
+                      </p:childTnLst>
+                    </p:cTn>
+                  </p:par>
+                </p:childTnLst>
+              </p:cTn>
+              <p:prevCondLst>
+                <p:cond evt="onPrev" delay="0">
+                  <p:tgtEl>
+                    <p:sldTgt/>
+                  </p:tgtEl>
+                </p:cond>
+              </p:prevCondLst>
+              <p:nextCondLst>
+                <p:cond evt="onNext" delay="0">
+                  <p:tgtEl>
+                    <p:sldTgt/>
+                  </p:tgtEl>
+                </p:cond>
+              </p:nextCondLst>
+            </p:seq>
+          </p:childTnLst>
+        </p:cTn>
+      </p:par>
+    </p:tnLst>
+    <p:bldLst>
+      <p:bldP spid="18" grpId="0" animBg="1"/>
+      <p:bldP spid="19" grpId="0" animBg="1"/>
+      <p:bldP spid="20" grpId="0" animBg="1"/>
+      <p:bldP spid="21" grpId="0" animBg="1"/>
+      <p:bldP spid="22" grpId="0" animBg="1"/>
+      <p:bldP spid="23" grpId="0" animBg="1"/>
+      <p:bldP spid="24" grpId="0" animBg="1"/>
+      <p:bldP spid="25" grpId="0" animBg="1"/>
+      <p:bldP spid="26" grpId="0" animBg="1"/>
+      <p:bldP spid="27" grpId="0" animBg="1"/>
+      <p:bldP spid="28" grpId="0" animBg="1"/>
+      <p:bldP spid="29" grpId="0" animBg="1"/>
+      <p:bldP spid="30" grpId="0" animBg="1"/>
+      <p:bldP spid="31" grpId="0" animBg="1"/>
+      <p:bldP spid="32" grpId="0" animBg="1"/>
+    </p:bldLst>
+  </p:timing>
 </p:sld>
 </file>
 
@@ -8217,7 +10081,7 @@
                 <a:ea typeface="Calibri" pitchFamily="34" charset="-122"/>
                 <a:cs typeface="Calibri" pitchFamily="34" charset="-120"/>
               </a:rPr>
-              <a:t>BUILD BLOCK 2 · 20 MIN</a:t>
+              <a:t>BEFORE THERE'S CODE</a:t>
             </a:r>
             <a:endParaRPr lang="en-US" sz="1400" dirty="0"/>
           </a:p>
@@ -8256,7 +10120,7 @@
                 <a:ea typeface="Cambria" pitchFamily="34" charset="-122"/>
                 <a:cs typeface="Cambria" pitchFamily="34" charset="-120"/>
               </a:rPr>
-              <a:t>Start the write-it-yourself items</a:t>
+              <a:t>An honest status beats a quickstart that fails</a:t>
             </a:r>
             <a:endParaRPr lang="en-US" sz="3100" dirty="0"/>
           </a:p>
@@ -8264,22 +10128,61 @@
       </p:sp>
       <p:sp>
         <p:nvSpPr>
-          <p:cNvPr id="5" name="Shape 3"/>
-          <p:cNvSpPr/>
-          <p:nvPr/>
-        </p:nvSpPr>
-        <p:spPr>
-          <a:xfrm>
-            <a:off x="548640" y="1783080"/>
-            <a:ext cx="5440680" cy="3429000"/>
+          <p:cNvPr id="5" name="Text 3"/>
+          <p:cNvSpPr/>
+          <p:nvPr/>
+        </p:nvSpPr>
+        <p:spPr>
+          <a:xfrm>
+            <a:off x="548640" y="1737360"/>
+            <a:ext cx="5440680" cy="365760"/>
+          </a:xfrm>
+          <a:prstGeom prst="rect">
+            <a:avLst/>
+          </a:prstGeom>
+          <a:noFill/>
+          <a:ln/>
+        </p:spPr>
+        <p:txBody>
+          <a:bodyPr wrap="square" lIns="0" tIns="0" rIns="0" bIns="0" rtlCol="0" anchor="ctr"/>
+          <a:lstStyle/>
+          <a:p>
+            <a:pPr indent="0" marL="0">
+              <a:buNone/>
+            </a:pPr>
+            <a:r>
+              <a:rPr lang="en-US" sz="1600" b="1" dirty="0">
+                <a:solidFill>
+                  <a:srgbClr val="0E6E6D"/>
+                </a:solidFill>
+                <a:latin typeface="Consolas" pitchFamily="34" charset="0"/>
+                <a:ea typeface="Consolas" pitchFamily="34" charset="-122"/>
+                <a:cs typeface="Consolas" pitchFamily="34" charset="-120"/>
+              </a:rPr>
+              <a:t>README.md</a:t>
+            </a:r>
+            <a:endParaRPr lang="en-US" sz="1600" dirty="0"/>
+          </a:p>
+        </p:txBody>
+      </p:sp>
+      <p:sp>
+        <p:nvSpPr>
+          <p:cNvPr id="6" name="Shape 4"/>
+          <p:cNvSpPr/>
+          <p:nvPr/>
+        </p:nvSpPr>
+        <p:spPr>
+          <a:xfrm>
+            <a:off x="548640" y="2148840"/>
+            <a:ext cx="5440680" cy="2834640"/>
           </a:xfrm>
           <a:prstGeom prst="roundRect">
             <a:avLst>
-              <a:gd name="adj" fmla="val 2400"/>
+              <a:gd name="adj" fmla="val 2581"/>
             </a:avLst>
           </a:prstGeom>
           <a:solidFill>
-            <a:srgbClr val="F2F6F8"/>
+            <a:srgbClr val="1E3352"/>
           </a:solidFill>
           <a:ln/>
           <a:effectLst>
@@ -8293,53 +10196,176 @@
       </p:sp>
       <p:sp>
         <p:nvSpPr>
-          <p:cNvPr id="6" name="Text 4"/>
-          <p:cNvSpPr/>
-          <p:nvPr/>
-        </p:nvSpPr>
-        <p:spPr>
-          <a:xfrm>
-            <a:off x="868680" y="1920240"/>
-            <a:ext cx="4846320" cy="457200"/>
-          </a:xfrm>
-          <a:prstGeom prst="rect">
-            <a:avLst/>
-          </a:prstGeom>
-          <a:noFill/>
-          <a:ln/>
-        </p:spPr>
-        <p:txBody>
-          <a:bodyPr wrap="square" lIns="0" tIns="0" rIns="0" bIns="0" rtlCol="0" anchor="ctr"/>
-          <a:lstStyle/>
-          <a:p>
-            <a:pPr indent="0" marL="0">
-              <a:buNone/>
-            </a:pPr>
-            <a:r>
-              <a:rPr lang="en-US" sz="1800" b="1" dirty="0">
-                <a:solidFill>
-                  <a:srgbClr val="0E6E6D"/>
+          <p:cNvPr id="7" name="Text 5"/>
+          <p:cNvSpPr/>
+          <p:nvPr/>
+        </p:nvSpPr>
+        <p:spPr>
+          <a:xfrm>
+            <a:off x="822960" y="2313432"/>
+            <a:ext cx="4892040" cy="2505456"/>
+          </a:xfrm>
+          <a:prstGeom prst="rect">
+            <a:avLst/>
+          </a:prstGeom>
+          <a:noFill/>
+          <a:ln/>
+        </p:spPr>
+        <p:txBody>
+          <a:bodyPr wrap="square" lIns="0" tIns="0" rIns="0" bIns="0" rtlCol="0" anchor="t"/>
+          <a:lstStyle/>
+          <a:p>
+            <a:pPr indent="0" marL="0">
+              <a:lnSpc>
+                <a:spcPct val="105000"/>
+              </a:lnSpc>
+              <a:buNone/>
+            </a:pPr>
+            <a:r>
+              <a:rPr lang="en-US" sz="1800" dirty="0">
+                <a:solidFill>
+                  <a:srgbClr val="9FE0B5"/>
                 </a:solidFill>
                 <a:latin typeface="Consolas" pitchFamily="34" charset="0"/>
                 <a:ea typeface="Consolas" pitchFamily="34" charset="-122"/>
                 <a:cs typeface="Consolas" pitchFamily="34" charset="-120"/>
               </a:rPr>
-              <a:t>CONTRIBUTING.md</a:t>
+              <a:t>## Status</a:t>
             </a:r>
             <a:endParaRPr lang="en-US" sz="1800" dirty="0"/>
           </a:p>
-        </p:txBody>
-      </p:sp>
-      <p:sp>
-        <p:nvSpPr>
-          <p:cNvPr id="7" name="Text 5"/>
-          <p:cNvSpPr/>
-          <p:nvPr/>
-        </p:nvSpPr>
-        <p:spPr>
-          <a:xfrm>
-            <a:off x="868680" y="2377440"/>
-            <a:ext cx="4846320" cy="365760"/>
+          <a:p>
+            <a:pPr indent="0" marL="0">
+              <a:lnSpc>
+                <a:spcPct val="105000"/>
+              </a:lnSpc>
+              <a:buNone/>
+            </a:pPr>
+            <a:r>
+              <a:rPr lang="en-US" sz="1800" dirty="0">
+                <a:solidFill>
+                  <a:srgbClr val="E8EEF3"/>
+                </a:solidFill>
+                <a:latin typeface="Consolas" pitchFamily="34" charset="0"/>
+                <a:ea typeface="Consolas" pitchFamily="34" charset="-122"/>
+                <a:cs typeface="Consolas" pitchFamily="34" charset="-120"/>
+              </a:rPr>
+              <a:t> </a:t>
+            </a:r>
+            <a:endParaRPr lang="en-US" sz="1800" dirty="0"/>
+          </a:p>
+          <a:p>
+            <a:pPr indent="0" marL="0">
+              <a:lnSpc>
+                <a:spcPct val="105000"/>
+              </a:lnSpc>
+              <a:buNone/>
+            </a:pPr>
+            <a:r>
+              <a:rPr lang="en-US" sz="1800" dirty="0">
+                <a:solidFill>
+                  <a:srgbClr val="E8EEF3"/>
+                </a:solidFill>
+                <a:latin typeface="Consolas" pitchFamily="34" charset="0"/>
+                <a:ea typeface="Consolas" pitchFamily="34" charset="-122"/>
+                <a:cs typeface="Consolas" pitchFamily="34" charset="-120"/>
+              </a:rPr>
+              <a:t>Early development. Nothing</a:t>
+            </a:r>
+            <a:endParaRPr lang="en-US" sz="1800" dirty="0"/>
+          </a:p>
+          <a:p>
+            <a:pPr indent="0" marL="0">
+              <a:lnSpc>
+                <a:spcPct val="105000"/>
+              </a:lnSpc>
+              <a:buNone/>
+            </a:pPr>
+            <a:r>
+              <a:rPr lang="en-US" sz="1800" dirty="0">
+                <a:solidFill>
+                  <a:srgbClr val="E8EEF3"/>
+                </a:solidFill>
+                <a:latin typeface="Consolas" pitchFamily="34" charset="0"/>
+                <a:ea typeface="Consolas" pitchFamily="34" charset="-122"/>
+                <a:cs typeface="Consolas" pitchFamily="34" charset="-120"/>
+              </a:rPr>
+              <a:t>runs yet: the first build</a:t>
+            </a:r>
+            <a:endParaRPr lang="en-US" sz="1800" dirty="0"/>
+          </a:p>
+          <a:p>
+            <a:pPr indent="0" marL="0">
+              <a:lnSpc>
+                <a:spcPct val="105000"/>
+              </a:lnSpc>
+              <a:buNone/>
+            </a:pPr>
+            <a:r>
+              <a:rPr lang="en-US" sz="1800" dirty="0">
+                <a:solidFill>
+                  <a:srgbClr val="E8EEF3"/>
+                </a:solidFill>
+                <a:latin typeface="Consolas" pitchFamily="34" charset="0"/>
+                <a:ea typeface="Consolas" pitchFamily="34" charset="-122"/>
+                <a:cs typeface="Consolas" pitchFamily="34" charset="-120"/>
+              </a:rPr>
+              <a:t>lands in November. Setup</a:t>
+            </a:r>
+            <a:endParaRPr lang="en-US" sz="1800" dirty="0"/>
+          </a:p>
+          <a:p>
+            <a:pPr indent="0" marL="0">
+              <a:lnSpc>
+                <a:spcPct val="105000"/>
+              </a:lnSpc>
+              <a:buNone/>
+            </a:pPr>
+            <a:r>
+              <a:rPr lang="en-US" sz="1800" dirty="0">
+                <a:solidFill>
+                  <a:srgbClr val="E8EEF3"/>
+                </a:solidFill>
+                <a:latin typeface="Consolas" pitchFamily="34" charset="0"/>
+                <a:ea typeface="Consolas" pitchFamily="34" charset="-122"/>
+                <a:cs typeface="Consolas" pitchFamily="34" charset="-120"/>
+              </a:rPr>
+              <a:t>instructions will be in</a:t>
+            </a:r>
+            <a:endParaRPr lang="en-US" sz="1800" dirty="0"/>
+          </a:p>
+          <a:p>
+            <a:pPr indent="0" marL="0">
+              <a:lnSpc>
+                <a:spcPct val="105000"/>
+              </a:lnSpc>
+              <a:buNone/>
+            </a:pPr>
+            <a:r>
+              <a:rPr lang="en-US" sz="1800" dirty="0">
+                <a:solidFill>
+                  <a:srgbClr val="E8EEF3"/>
+                </a:solidFill>
+                <a:latin typeface="Consolas" pitchFamily="34" charset="0"/>
+                <a:ea typeface="Consolas" pitchFamily="34" charset="-122"/>
+                <a:cs typeface="Consolas" pitchFamily="34" charset="-120"/>
+              </a:rPr>
+              <a:t>docs/setup.md.</a:t>
+            </a:r>
+            <a:endParaRPr lang="en-US" sz="1800" dirty="0"/>
+          </a:p>
+        </p:txBody>
+      </p:sp>
+      <p:sp>
+        <p:nvSpPr>
+          <p:cNvPr id="8" name="Text 6"/>
+          <p:cNvSpPr/>
+          <p:nvPr/>
+        </p:nvSpPr>
+        <p:spPr>
+          <a:xfrm>
+            <a:off x="6172200" y="1737360"/>
+            <a:ext cx="5440680" cy="365760"/>
           </a:xfrm>
           <a:prstGeom prst="rect">
             <a:avLst/>
@@ -8355,528 +10381,38 @@
               <a:buNone/>
             </a:pPr>
             <a:r>
-              <a:rPr lang="en-US" sz="1500" i="1" dirty="0">
-                <a:solidFill>
-                  <a:srgbClr val="5F7284"/>
-                </a:solidFill>
-                <a:latin typeface="Calibri" pitchFamily="34" charset="0"/>
-                <a:ea typeface="Calibri" pitchFamily="34" charset="-122"/>
-                <a:cs typeface="Calibri" pitchFamily="34" charset="-120"/>
-              </a:rPr>
-              <a:t>Grow it from your git standards, in this order:</a:t>
-            </a:r>
-            <a:endParaRPr lang="en-US" sz="1500" dirty="0"/>
-          </a:p>
-        </p:txBody>
-      </p:sp>
-      <p:sp>
-        <p:nvSpPr>
-          <p:cNvPr id="8" name="Shape 6"/>
-          <p:cNvSpPr/>
-          <p:nvPr/>
-        </p:nvSpPr>
-        <p:spPr>
-          <a:xfrm>
-            <a:off x="868680" y="2871216"/>
-            <a:ext cx="329184" cy="329184"/>
-          </a:xfrm>
-          <a:prstGeom prst="ellipse">
-            <a:avLst/>
-          </a:prstGeom>
-          <a:solidFill>
-            <a:srgbClr val="E8A33D"/>
-          </a:solidFill>
-          <a:ln/>
-        </p:spPr>
-      </p:sp>
-      <p:sp>
-        <p:nvSpPr>
-          <p:cNvPr id="9" name="Text 7"/>
-          <p:cNvSpPr/>
-          <p:nvPr/>
-        </p:nvSpPr>
-        <p:spPr>
-          <a:xfrm>
-            <a:off x="868680" y="2871216"/>
-            <a:ext cx="329184" cy="329184"/>
-          </a:xfrm>
-          <a:prstGeom prst="rect">
-            <a:avLst/>
-          </a:prstGeom>
-          <a:noFill/>
-          <a:ln/>
-        </p:spPr>
-        <p:txBody>
-          <a:bodyPr wrap="square" lIns="0" tIns="0" rIns="0" bIns="0" rtlCol="0" anchor="ctr"/>
-          <a:lstStyle/>
-          <a:p>
-            <a:pPr algn="ctr" indent="0" marL="0">
-              <a:buNone/>
-            </a:pPr>
-            <a:r>
-              <a:rPr lang="en-US" sz="1400" b="1" dirty="0">
-                <a:solidFill>
-                  <a:srgbClr val="14233A"/>
-                </a:solidFill>
-                <a:latin typeface="Calibri" pitchFamily="34" charset="0"/>
-                <a:ea typeface="Calibri" pitchFamily="34" charset="-122"/>
-                <a:cs typeface="Calibri" pitchFamily="34" charset="-120"/>
-              </a:rPr>
-              <a:t>1</a:t>
-            </a:r>
-            <a:endParaRPr lang="en-US" sz="1400" dirty="0"/>
-          </a:p>
-        </p:txBody>
-      </p:sp>
-      <p:sp>
-        <p:nvSpPr>
-          <p:cNvPr id="10" name="Text 8"/>
-          <p:cNvSpPr/>
-          <p:nvPr/>
-        </p:nvSpPr>
-        <p:spPr>
-          <a:xfrm>
-            <a:off x="1371600" y="2834640"/>
-            <a:ext cx="4389120" cy="402336"/>
-          </a:xfrm>
-          <a:prstGeom prst="rect">
-            <a:avLst/>
-          </a:prstGeom>
-          <a:noFill/>
-          <a:ln/>
-        </p:spPr>
-        <p:txBody>
-          <a:bodyPr wrap="square" lIns="0" tIns="0" rIns="0" bIns="0" rtlCol="0" anchor="ctr"/>
-          <a:lstStyle/>
-          <a:p>
-            <a:pPr indent="0" marL="0">
-              <a:buNone/>
-            </a:pPr>
-            <a:r>
-              <a:rPr lang="en-US" sz="1700" b="1" dirty="0">
-                <a:solidFill>
-                  <a:srgbClr val="1E2A36"/>
-                </a:solidFill>
-                <a:latin typeface="Calibri" pitchFamily="34" charset="0"/>
-                <a:ea typeface="Calibri" pitchFamily="34" charset="-122"/>
-                <a:cs typeface="Calibri" pitchFamily="34" charset="-120"/>
-              </a:rPr>
-              <a:t>Welcome</a:t>
-            </a:r>
-            <a:endParaRPr lang="en-US" sz="1700" dirty="0"/>
-          </a:p>
-        </p:txBody>
-      </p:sp>
-      <p:sp>
-        <p:nvSpPr>
-          <p:cNvPr id="11" name="Shape 9"/>
-          <p:cNvSpPr/>
-          <p:nvPr/>
-        </p:nvSpPr>
-        <p:spPr>
-          <a:xfrm>
-            <a:off x="868680" y="3328416"/>
-            <a:ext cx="329184" cy="329184"/>
-          </a:xfrm>
-          <a:prstGeom prst="ellipse">
-            <a:avLst/>
-          </a:prstGeom>
-          <a:solidFill>
-            <a:srgbClr val="E8A33D"/>
-          </a:solidFill>
-          <a:ln/>
-        </p:spPr>
-      </p:sp>
-      <p:sp>
-        <p:nvSpPr>
-          <p:cNvPr id="12" name="Text 10"/>
-          <p:cNvSpPr/>
-          <p:nvPr/>
-        </p:nvSpPr>
-        <p:spPr>
-          <a:xfrm>
-            <a:off x="868680" y="3328416"/>
-            <a:ext cx="329184" cy="329184"/>
-          </a:xfrm>
-          <a:prstGeom prst="rect">
-            <a:avLst/>
-          </a:prstGeom>
-          <a:noFill/>
-          <a:ln/>
-        </p:spPr>
-        <p:txBody>
-          <a:bodyPr wrap="square" lIns="0" tIns="0" rIns="0" bIns="0" rtlCol="0" anchor="ctr"/>
-          <a:lstStyle/>
-          <a:p>
-            <a:pPr algn="ctr" indent="0" marL="0">
-              <a:buNone/>
-            </a:pPr>
-            <a:r>
-              <a:rPr lang="en-US" sz="1400" b="1" dirty="0">
-                <a:solidFill>
-                  <a:srgbClr val="14233A"/>
-                </a:solidFill>
-                <a:latin typeface="Calibri" pitchFamily="34" charset="0"/>
-                <a:ea typeface="Calibri" pitchFamily="34" charset="-122"/>
-                <a:cs typeface="Calibri" pitchFamily="34" charset="-120"/>
-              </a:rPr>
-              <a:t>2</a:t>
-            </a:r>
-            <a:endParaRPr lang="en-US" sz="1400" dirty="0"/>
-          </a:p>
-        </p:txBody>
-      </p:sp>
-      <p:sp>
-        <p:nvSpPr>
-          <p:cNvPr id="13" name="Text 11"/>
-          <p:cNvSpPr/>
-          <p:nvPr/>
-        </p:nvSpPr>
-        <p:spPr>
-          <a:xfrm>
-            <a:off x="1371600" y="3291840"/>
-            <a:ext cx="4389120" cy="402336"/>
-          </a:xfrm>
-          <a:prstGeom prst="rect">
-            <a:avLst/>
-          </a:prstGeom>
-          <a:noFill/>
-          <a:ln/>
-        </p:spPr>
-        <p:txBody>
-          <a:bodyPr wrap="square" lIns="0" tIns="0" rIns="0" bIns="0" rtlCol="0" anchor="ctr"/>
-          <a:lstStyle/>
-          <a:p>
-            <a:pPr indent="0" marL="0">
-              <a:buNone/>
-            </a:pPr>
-            <a:r>
-              <a:rPr lang="en-US" sz="1700" b="1" dirty="0">
-                <a:solidFill>
-                  <a:srgbClr val="1E2A36"/>
-                </a:solidFill>
-                <a:latin typeface="Calibri" pitchFamily="34" charset="0"/>
-                <a:ea typeface="Calibri" pitchFamily="34" charset="-122"/>
-                <a:cs typeface="Calibri" pitchFamily="34" charset="-120"/>
-              </a:rPr>
-              <a:t>What to do first</a:t>
-            </a:r>
-            <a:endParaRPr lang="en-US" sz="1700" dirty="0"/>
-          </a:p>
-        </p:txBody>
-      </p:sp>
-      <p:sp>
-        <p:nvSpPr>
-          <p:cNvPr id="14" name="Shape 12"/>
-          <p:cNvSpPr/>
-          <p:nvPr/>
-        </p:nvSpPr>
-        <p:spPr>
-          <a:xfrm>
-            <a:off x="868680" y="3785616"/>
-            <a:ext cx="329184" cy="329184"/>
-          </a:xfrm>
-          <a:prstGeom prst="ellipse">
-            <a:avLst/>
-          </a:prstGeom>
-          <a:solidFill>
-            <a:srgbClr val="12908F"/>
-          </a:solidFill>
-          <a:ln/>
-        </p:spPr>
-      </p:sp>
-      <p:sp>
-        <p:nvSpPr>
-          <p:cNvPr id="15" name="Text 13"/>
-          <p:cNvSpPr/>
-          <p:nvPr/>
-        </p:nvSpPr>
-        <p:spPr>
-          <a:xfrm>
-            <a:off x="868680" y="3785616"/>
-            <a:ext cx="329184" cy="329184"/>
-          </a:xfrm>
-          <a:prstGeom prst="rect">
-            <a:avLst/>
-          </a:prstGeom>
-          <a:noFill/>
-          <a:ln/>
-        </p:spPr>
-        <p:txBody>
-          <a:bodyPr wrap="square" lIns="0" tIns="0" rIns="0" bIns="0" rtlCol="0" anchor="ctr"/>
-          <a:lstStyle/>
-          <a:p>
-            <a:pPr algn="ctr" indent="0" marL="0">
-              <a:buNone/>
-            </a:pPr>
-            <a:r>
-              <a:rPr lang="en-US" sz="1400" b="1" dirty="0">
-                <a:solidFill>
-                  <a:srgbClr val="FFFFFF"/>
-                </a:solidFill>
-                <a:latin typeface="Calibri" pitchFamily="34" charset="0"/>
-                <a:ea typeface="Calibri" pitchFamily="34" charset="-122"/>
-                <a:cs typeface="Calibri" pitchFamily="34" charset="-120"/>
-              </a:rPr>
-              <a:t>3</a:t>
-            </a:r>
-            <a:endParaRPr lang="en-US" sz="1400" dirty="0"/>
-          </a:p>
-        </p:txBody>
-      </p:sp>
-      <p:sp>
-        <p:nvSpPr>
-          <p:cNvPr id="16" name="Text 14"/>
-          <p:cNvSpPr/>
-          <p:nvPr/>
-        </p:nvSpPr>
-        <p:spPr>
-          <a:xfrm>
-            <a:off x="1371600" y="3749040"/>
-            <a:ext cx="4389120" cy="402336"/>
-          </a:xfrm>
-          <a:prstGeom prst="rect">
-            <a:avLst/>
-          </a:prstGeom>
-          <a:noFill/>
-          <a:ln/>
-        </p:spPr>
-        <p:txBody>
-          <a:bodyPr wrap="square" lIns="0" tIns="0" rIns="0" bIns="0" rtlCol="0" anchor="ctr"/>
-          <a:lstStyle/>
-          <a:p>
-            <a:pPr indent="0" marL="0">
-              <a:buNone/>
-            </a:pPr>
-            <a:r>
-              <a:rPr lang="en-US" sz="1700" dirty="0">
-                <a:solidFill>
-                  <a:srgbClr val="1E2A36"/>
-                </a:solidFill>
-                <a:latin typeface="Calibri" pitchFamily="34" charset="0"/>
-                <a:ea typeface="Calibri" pitchFamily="34" charset="-122"/>
-                <a:cs typeface="Calibri" pitchFamily="34" charset="-120"/>
-              </a:rPr>
-              <a:t>How to pick work</a:t>
-            </a:r>
-            <a:endParaRPr lang="en-US" sz="1700" dirty="0"/>
-          </a:p>
-        </p:txBody>
-      </p:sp>
-      <p:sp>
-        <p:nvSpPr>
-          <p:cNvPr id="17" name="Shape 15"/>
-          <p:cNvSpPr/>
-          <p:nvPr/>
-        </p:nvSpPr>
-        <p:spPr>
-          <a:xfrm>
-            <a:off x="868680" y="4242816"/>
-            <a:ext cx="329184" cy="329184"/>
-          </a:xfrm>
-          <a:prstGeom prst="ellipse">
-            <a:avLst/>
-          </a:prstGeom>
-          <a:solidFill>
-            <a:srgbClr val="12908F"/>
-          </a:solidFill>
-          <a:ln/>
-        </p:spPr>
-      </p:sp>
-      <p:sp>
-        <p:nvSpPr>
-          <p:cNvPr id="18" name="Text 16"/>
-          <p:cNvSpPr/>
-          <p:nvPr/>
-        </p:nvSpPr>
-        <p:spPr>
-          <a:xfrm>
-            <a:off x="868680" y="4242816"/>
-            <a:ext cx="329184" cy="329184"/>
-          </a:xfrm>
-          <a:prstGeom prst="rect">
-            <a:avLst/>
-          </a:prstGeom>
-          <a:noFill/>
-          <a:ln/>
-        </p:spPr>
-        <p:txBody>
-          <a:bodyPr wrap="square" lIns="0" tIns="0" rIns="0" bIns="0" rtlCol="0" anchor="ctr"/>
-          <a:lstStyle/>
-          <a:p>
-            <a:pPr algn="ctr" indent="0" marL="0">
-              <a:buNone/>
-            </a:pPr>
-            <a:r>
-              <a:rPr lang="en-US" sz="1400" b="1" dirty="0">
-                <a:solidFill>
-                  <a:srgbClr val="FFFFFF"/>
-                </a:solidFill>
-                <a:latin typeface="Calibri" pitchFamily="34" charset="0"/>
-                <a:ea typeface="Calibri" pitchFamily="34" charset="-122"/>
-                <a:cs typeface="Calibri" pitchFamily="34" charset="-120"/>
-              </a:rPr>
-              <a:t>4</a:t>
-            </a:r>
-            <a:endParaRPr lang="en-US" sz="1400" dirty="0"/>
-          </a:p>
-        </p:txBody>
-      </p:sp>
-      <p:sp>
-        <p:nvSpPr>
-          <p:cNvPr id="19" name="Text 17"/>
-          <p:cNvSpPr/>
-          <p:nvPr/>
-        </p:nvSpPr>
-        <p:spPr>
-          <a:xfrm>
-            <a:off x="1371600" y="4206240"/>
-            <a:ext cx="4389120" cy="402336"/>
-          </a:xfrm>
-          <a:prstGeom prst="rect">
-            <a:avLst/>
-          </a:prstGeom>
-          <a:noFill/>
-          <a:ln/>
-        </p:spPr>
-        <p:txBody>
-          <a:bodyPr wrap="square" lIns="0" tIns="0" rIns="0" bIns="0" rtlCol="0" anchor="ctr"/>
-          <a:lstStyle/>
-          <a:p>
-            <a:pPr indent="0" marL="0">
-              <a:buNone/>
-            </a:pPr>
-            <a:r>
-              <a:rPr lang="en-US" sz="1700" dirty="0">
-                <a:solidFill>
-                  <a:srgbClr val="1E2A36"/>
-                </a:solidFill>
-                <a:latin typeface="Calibri" pitchFamily="34" charset="0"/>
-                <a:ea typeface="Calibri" pitchFamily="34" charset="-122"/>
-                <a:cs typeface="Calibri" pitchFamily="34" charset="-120"/>
-              </a:rPr>
-              <a:t>The PR process and reviews</a:t>
-            </a:r>
-            <a:endParaRPr lang="en-US" sz="1700" dirty="0"/>
-          </a:p>
-        </p:txBody>
-      </p:sp>
-      <p:sp>
-        <p:nvSpPr>
-          <p:cNvPr id="20" name="Shape 18"/>
-          <p:cNvSpPr/>
-          <p:nvPr/>
-        </p:nvSpPr>
-        <p:spPr>
-          <a:xfrm>
-            <a:off x="868680" y="4700016"/>
-            <a:ext cx="329184" cy="329184"/>
-          </a:xfrm>
-          <a:prstGeom prst="ellipse">
-            <a:avLst/>
-          </a:prstGeom>
-          <a:solidFill>
-            <a:srgbClr val="12908F"/>
-          </a:solidFill>
-          <a:ln/>
-        </p:spPr>
-      </p:sp>
-      <p:sp>
-        <p:nvSpPr>
-          <p:cNvPr id="21" name="Text 19"/>
-          <p:cNvSpPr/>
-          <p:nvPr/>
-        </p:nvSpPr>
-        <p:spPr>
-          <a:xfrm>
-            <a:off x="868680" y="4700016"/>
-            <a:ext cx="329184" cy="329184"/>
-          </a:xfrm>
-          <a:prstGeom prst="rect">
-            <a:avLst/>
-          </a:prstGeom>
-          <a:noFill/>
-          <a:ln/>
-        </p:spPr>
-        <p:txBody>
-          <a:bodyPr wrap="square" lIns="0" tIns="0" rIns="0" bIns="0" rtlCol="0" anchor="ctr"/>
-          <a:lstStyle/>
-          <a:p>
-            <a:pPr algn="ctr" indent="0" marL="0">
-              <a:buNone/>
-            </a:pPr>
-            <a:r>
-              <a:rPr lang="en-US" sz="1400" b="1" dirty="0">
-                <a:solidFill>
-                  <a:srgbClr val="FFFFFF"/>
-                </a:solidFill>
-                <a:latin typeface="Calibri" pitchFamily="34" charset="0"/>
-                <a:ea typeface="Calibri" pitchFamily="34" charset="-122"/>
-                <a:cs typeface="Calibri" pitchFamily="34" charset="-120"/>
-              </a:rPr>
-              <a:t>5</a:t>
-            </a:r>
-            <a:endParaRPr lang="en-US" sz="1400" dirty="0"/>
-          </a:p>
-        </p:txBody>
-      </p:sp>
-      <p:sp>
-        <p:nvSpPr>
-          <p:cNvPr id="22" name="Text 20"/>
-          <p:cNvSpPr/>
-          <p:nvPr/>
-        </p:nvSpPr>
-        <p:spPr>
-          <a:xfrm>
-            <a:off x="1371600" y="4663440"/>
-            <a:ext cx="4389120" cy="402336"/>
-          </a:xfrm>
-          <a:prstGeom prst="rect">
-            <a:avLst/>
-          </a:prstGeom>
-          <a:noFill/>
-          <a:ln/>
-        </p:spPr>
-        <p:txBody>
-          <a:bodyPr wrap="square" lIns="0" tIns="0" rIns="0" bIns="0" rtlCol="0" anchor="ctr"/>
-          <a:lstStyle/>
-          <a:p>
-            <a:pPr indent="0" marL="0">
-              <a:buNone/>
-            </a:pPr>
-            <a:r>
-              <a:rPr lang="en-US" sz="1700" dirty="0">
-                <a:solidFill>
-                  <a:srgbClr val="1E2A36"/>
-                </a:solidFill>
-                <a:latin typeface="Calibri" pitchFamily="34" charset="0"/>
-                <a:ea typeface="Calibri" pitchFamily="34" charset="-122"/>
-                <a:cs typeface="Calibri" pitchFamily="34" charset="-120"/>
-              </a:rPr>
-              <a:t>Policy, last</a:t>
-            </a:r>
-            <a:endParaRPr lang="en-US" sz="1700" dirty="0"/>
-          </a:p>
-        </p:txBody>
-      </p:sp>
-      <p:sp>
-        <p:nvSpPr>
-          <p:cNvPr id="23" name="Shape 21"/>
-          <p:cNvSpPr/>
-          <p:nvPr/>
-        </p:nvSpPr>
-        <p:spPr>
-          <a:xfrm>
-            <a:off x="6172200" y="1783080"/>
-            <a:ext cx="5440680" cy="3429000"/>
+              <a:rPr lang="en-US" sz="1600" b="1" dirty="0">
+                <a:solidFill>
+                  <a:srgbClr val="0E6E6D"/>
+                </a:solidFill>
+                <a:latin typeface="Consolas" pitchFamily="34" charset="0"/>
+                <a:ea typeface="Consolas" pitchFamily="34" charset="-122"/>
+                <a:cs typeface="Consolas" pitchFamily="34" charset="-120"/>
+              </a:rPr>
+              <a:t>docs/setup.md</a:t>
+            </a:r>
+            <a:endParaRPr lang="en-US" sz="1600" dirty="0"/>
+          </a:p>
+        </p:txBody>
+      </p:sp>
+      <p:sp>
+        <p:nvSpPr>
+          <p:cNvPr id="9" name="Shape 7"/>
+          <p:cNvSpPr/>
+          <p:nvPr/>
+        </p:nvSpPr>
+        <p:spPr>
+          <a:xfrm>
+            <a:off x="6172200" y="2148840"/>
+            <a:ext cx="5440680" cy="2834640"/>
           </a:xfrm>
           <a:prstGeom prst="roundRect">
             <a:avLst>
-              <a:gd name="adj" fmla="val 2400"/>
+              <a:gd name="adj" fmla="val 2581"/>
             </a:avLst>
           </a:prstGeom>
           <a:solidFill>
-            <a:srgbClr val="F2F6F8"/>
+            <a:srgbClr val="1E3352"/>
           </a:solidFill>
           <a:ln/>
           <a:effectLst>
@@ -8890,164 +10426,204 @@
       </p:sp>
       <p:sp>
         <p:nvSpPr>
-          <p:cNvPr id="24" name="Text 22"/>
-          <p:cNvSpPr/>
-          <p:nvPr/>
-        </p:nvSpPr>
-        <p:spPr>
-          <a:xfrm>
-            <a:off x="6492240" y="1920240"/>
-            <a:ext cx="4846320" cy="457200"/>
-          </a:xfrm>
-          <a:prstGeom prst="rect">
-            <a:avLst/>
-          </a:prstGeom>
-          <a:noFill/>
-          <a:ln/>
-        </p:spPr>
-        <p:txBody>
-          <a:bodyPr wrap="square" lIns="0" tIns="0" rIns="0" bIns="0" rtlCol="0" anchor="ctr"/>
-          <a:lstStyle/>
-          <a:p>
-            <a:pPr indent="0" marL="0">
-              <a:buNone/>
-            </a:pPr>
-            <a:r>
-              <a:rPr lang="en-US" sz="1800" b="1" dirty="0">
-                <a:solidFill>
-                  <a:srgbClr val="0E6E6D"/>
+          <p:cNvPr id="10" name="Text 8"/>
+          <p:cNvSpPr/>
+          <p:nvPr/>
+        </p:nvSpPr>
+        <p:spPr>
+          <a:xfrm>
+            <a:off x="6446520" y="2313432"/>
+            <a:ext cx="4892040" cy="2505456"/>
+          </a:xfrm>
+          <a:prstGeom prst="rect">
+            <a:avLst/>
+          </a:prstGeom>
+          <a:noFill/>
+          <a:ln/>
+        </p:spPr>
+        <p:txBody>
+          <a:bodyPr wrap="square" lIns="0" tIns="0" rIns="0" bIns="0" rtlCol="0" anchor="t"/>
+          <a:lstStyle/>
+          <a:p>
+            <a:pPr indent="0" marL="0">
+              <a:lnSpc>
+                <a:spcPct val="105000"/>
+              </a:lnSpc>
+              <a:buNone/>
+            </a:pPr>
+            <a:r>
+              <a:rPr lang="en-US" sz="1800" dirty="0">
+                <a:solidFill>
+                  <a:srgbClr val="9FE0B5"/>
                 </a:solidFill>
                 <a:latin typeface="Consolas" pitchFamily="34" charset="0"/>
                 <a:ea typeface="Consolas" pitchFamily="34" charset="-122"/>
                 <a:cs typeface="Consolas" pitchFamily="34" charset="-120"/>
               </a:rPr>
-              <a:t>docs/communication-norms.md</a:t>
+              <a:t># Setting up</a:t>
             </a:r>
             <a:endParaRPr lang="en-US" sz="1800" dirty="0"/>
           </a:p>
-        </p:txBody>
-      </p:sp>
-      <p:sp>
-        <p:nvSpPr>
-          <p:cNvPr id="25" name="Text 23"/>
-          <p:cNvSpPr/>
-          <p:nvPr/>
-        </p:nvSpPr>
-        <p:spPr>
-          <a:xfrm>
-            <a:off x="6492240" y="2468880"/>
-            <a:ext cx="4892040" cy="2651760"/>
-          </a:xfrm>
-          <a:prstGeom prst="rect">
-            <a:avLst/>
-          </a:prstGeom>
-          <a:noFill/>
-          <a:ln/>
-        </p:spPr>
-        <p:txBody>
-          <a:bodyPr wrap="square" lIns="0" tIns="0" rIns="0" bIns="0" rtlCol="0" anchor="t"/>
-          <a:lstStyle/>
-          <a:p>
-            <a:pPr marL="203200" indent="-203200">
-              <a:spcAft>
-                <a:spcPts val="700"/>
-              </a:spcAft>
-              <a:buSzPct val="100000"/>
-              <a:buChar char="•"/>
-            </a:pPr>
-            <a:r>
-              <a:rPr lang="en-US" sz="1600" dirty="0">
-                <a:solidFill>
-                  <a:srgbClr val="1E2A36"/>
-                </a:solidFill>
-                <a:latin typeface="Calibri" pitchFamily="34" charset="0"/>
-                <a:ea typeface="Calibri" pitchFamily="34" charset="-122"/>
-                <a:cs typeface="Calibri" pitchFamily="34" charset="-120"/>
-              </a:rPr>
-              <a:t>Where discussion happens</a:t>
-            </a:r>
-            <a:endParaRPr lang="en-US" sz="1600" dirty="0"/>
-          </a:p>
-          <a:p>
-            <a:pPr marL="203200" indent="-203200">
-              <a:spcAft>
-                <a:spcPts val="700"/>
-              </a:spcAft>
-              <a:buSzPct val="100000"/>
-              <a:buChar char="•"/>
-            </a:pPr>
-            <a:r>
-              <a:rPr lang="en-US" sz="1600" dirty="0">
-                <a:solidFill>
-                  <a:srgbClr val="1E2A36"/>
-                </a:solidFill>
-                <a:latin typeface="Calibri" pitchFamily="34" charset="0"/>
-                <a:ea typeface="Calibri" pitchFamily="34" charset="-122"/>
-                <a:cs typeface="Calibri" pitchFamily="34" charset="-120"/>
-              </a:rPr>
-              <a:t>Response times you can keep: "within a week," not "24/7"</a:t>
-            </a:r>
-            <a:endParaRPr lang="en-US" sz="1600" dirty="0"/>
-          </a:p>
-          <a:p>
-            <a:pPr marL="203200" indent="-203200">
-              <a:spcAft>
-                <a:spcPts val="700"/>
-              </a:spcAft>
-              <a:buSzPct val="100000"/>
-              <a:buChar char="•"/>
-            </a:pPr>
-            <a:r>
-              <a:rPr lang="en-US" sz="1600" dirty="0">
-                <a:solidFill>
-                  <a:srgbClr val="1E2A36"/>
-                </a:solidFill>
-                <a:latin typeface="Calibri" pitchFamily="34" charset="0"/>
-                <a:ea typeface="Calibri" pitchFamily="34" charset="-122"/>
-                <a:cs typeface="Calibri" pitchFamily="34" charset="-120"/>
-              </a:rPr>
-              <a:t>Who maintains</a:t>
-            </a:r>
-            <a:endParaRPr lang="en-US" sz="1600" dirty="0"/>
-          </a:p>
-          <a:p>
-            <a:pPr marL="203200" indent="-203200">
-              <a:buSzPct val="100000"/>
-              <a:buChar char="•"/>
-            </a:pPr>
-            <a:r>
-              <a:rPr lang="en-US" sz="1600" dirty="0">
-                <a:solidFill>
-                  <a:srgbClr val="1E2A36"/>
-                </a:solidFill>
-                <a:latin typeface="Calibri" pitchFamily="34" charset="0"/>
-                <a:ea typeface="Calibri" pitchFamily="34" charset="-122"/>
-                <a:cs typeface="Calibri" pitchFamily="34" charset="-120"/>
-              </a:rPr>
-              <a:t>How decisions get made. Solo: how does a contributor's proposal get decided, and where?</a:t>
-            </a:r>
-            <a:endParaRPr lang="en-US" sz="1600" dirty="0"/>
-          </a:p>
-        </p:txBody>
-      </p:sp>
-      <p:sp>
-        <p:nvSpPr>
-          <p:cNvPr id="26" name="Shape 24"/>
-          <p:cNvSpPr/>
-          <p:nvPr/>
-        </p:nvSpPr>
-        <p:spPr>
-          <a:xfrm>
-            <a:off x="548640" y="5440680"/>
-            <a:ext cx="11064240" cy="731520"/>
+          <a:p>
+            <a:pPr indent="0" marL="0">
+              <a:lnSpc>
+                <a:spcPct val="105000"/>
+              </a:lnSpc>
+              <a:buNone/>
+            </a:pPr>
+            <a:r>
+              <a:rPr lang="en-US" sz="1800" dirty="0">
+                <a:solidFill>
+                  <a:srgbClr val="E8EEF3"/>
+                </a:solidFill>
+                <a:latin typeface="Consolas" pitchFamily="34" charset="0"/>
+                <a:ea typeface="Consolas" pitchFamily="34" charset="-122"/>
+                <a:cs typeface="Consolas" pitchFamily="34" charset="-120"/>
+              </a:rPr>
+              <a:t> </a:t>
+            </a:r>
+            <a:endParaRPr lang="en-US" sz="1800" dirty="0"/>
+          </a:p>
+          <a:p>
+            <a:pPr indent="0" marL="0">
+              <a:lnSpc>
+                <a:spcPct val="105000"/>
+              </a:lnSpc>
+              <a:buNone/>
+            </a:pPr>
+            <a:r>
+              <a:rPr lang="en-US" sz="1800" dirty="0">
+                <a:solidFill>
+                  <a:srgbClr val="E8EEF3"/>
+                </a:solidFill>
+                <a:latin typeface="Consolas" pitchFamily="34" charset="0"/>
+                <a:ea typeface="Consolas" pitchFamily="34" charset="-122"/>
+                <a:cs typeface="Consolas" pitchFamily="34" charset="-120"/>
+              </a:rPr>
+              <a:t>Stack: Python 3.12, Django,</a:t>
+            </a:r>
+            <a:endParaRPr lang="en-US" sz="1800" dirty="0"/>
+          </a:p>
+          <a:p>
+            <a:pPr indent="0" marL="0">
+              <a:lnSpc>
+                <a:spcPct val="105000"/>
+              </a:lnSpc>
+              <a:buNone/>
+            </a:pPr>
+            <a:r>
+              <a:rPr lang="en-US" sz="1800" dirty="0">
+                <a:solidFill>
+                  <a:srgbClr val="E8EEF3"/>
+                </a:solidFill>
+                <a:latin typeface="Consolas" pitchFamily="34" charset="0"/>
+                <a:ea typeface="Consolas" pitchFamily="34" charset="-122"/>
+                <a:cs typeface="Consolas" pitchFamily="34" charset="-120"/>
+              </a:rPr>
+              <a:t>SQLite</a:t>
+            </a:r>
+            <a:endParaRPr lang="en-US" sz="1800" dirty="0"/>
+          </a:p>
+          <a:p>
+            <a:pPr indent="0" marL="0">
+              <a:lnSpc>
+                <a:spcPct val="105000"/>
+              </a:lnSpc>
+              <a:buNone/>
+            </a:pPr>
+            <a:r>
+              <a:rPr lang="en-US" sz="1800" dirty="0">
+                <a:solidFill>
+                  <a:srgbClr val="E8EEF3"/>
+                </a:solidFill>
+                <a:latin typeface="Consolas" pitchFamily="34" charset="0"/>
+                <a:ea typeface="Consolas" pitchFamily="34" charset="-122"/>
+                <a:cs typeface="Consolas" pitchFamily="34" charset="-120"/>
+              </a:rPr>
+              <a:t> </a:t>
+            </a:r>
+            <a:endParaRPr lang="en-US" sz="1800" dirty="0"/>
+          </a:p>
+          <a:p>
+            <a:pPr indent="0" marL="0">
+              <a:lnSpc>
+                <a:spcPct val="105000"/>
+              </a:lnSpc>
+              <a:buNone/>
+            </a:pPr>
+            <a:r>
+              <a:rPr lang="en-US" sz="1800" dirty="0">
+                <a:solidFill>
+                  <a:srgbClr val="E8EEF3"/>
+                </a:solidFill>
+                <a:latin typeface="Consolas" pitchFamily="34" charset="0"/>
+                <a:ea typeface="Consolas" pitchFamily="34" charset="-122"/>
+                <a:cs typeface="Consolas" pitchFamily="34" charset="-120"/>
+              </a:rPr>
+              <a:t>Setup instructions arrive</a:t>
+            </a:r>
+            <a:endParaRPr lang="en-US" sz="1800" dirty="0"/>
+          </a:p>
+          <a:p>
+            <a:pPr indent="0" marL="0">
+              <a:lnSpc>
+                <a:spcPct val="105000"/>
+              </a:lnSpc>
+              <a:buNone/>
+            </a:pPr>
+            <a:r>
+              <a:rPr lang="en-US" sz="1800" dirty="0">
+                <a:solidFill>
+                  <a:srgbClr val="E8EEF3"/>
+                </a:solidFill>
+                <a:latin typeface="Consolas" pitchFamily="34" charset="0"/>
+                <a:ea typeface="Consolas" pitchFamily="34" charset="-122"/>
+                <a:cs typeface="Consolas" pitchFamily="34" charset="-120"/>
+              </a:rPr>
+              <a:t>with the first runnable</a:t>
+            </a:r>
+            <a:endParaRPr lang="en-US" sz="1800" dirty="0"/>
+          </a:p>
+          <a:p>
+            <a:pPr indent="0" marL="0">
+              <a:lnSpc>
+                <a:spcPct val="105000"/>
+              </a:lnSpc>
+              <a:buNone/>
+            </a:pPr>
+            <a:r>
+              <a:rPr lang="en-US" sz="1800" dirty="0">
+                <a:solidFill>
+                  <a:srgbClr val="E8EEF3"/>
+                </a:solidFill>
+                <a:latin typeface="Consolas" pitchFamily="34" charset="0"/>
+                <a:ea typeface="Consolas" pitchFamily="34" charset="-122"/>
+                <a:cs typeface="Consolas" pitchFamily="34" charset="-120"/>
+              </a:rPr>
+              <a:t>build. Tracked in #1.</a:t>
+            </a:r>
+            <a:endParaRPr lang="en-US" sz="1800" dirty="0"/>
+          </a:p>
+        </p:txBody>
+      </p:sp>
+      <p:sp>
+        <p:nvSpPr>
+          <p:cNvPr id="11" name="Shape 9"/>
+          <p:cNvSpPr/>
+          <p:nvPr/>
+        </p:nvSpPr>
+        <p:spPr>
+          <a:xfrm>
+            <a:off x="548640" y="5212080"/>
+            <a:ext cx="11064240" cy="960120"/>
           </a:xfrm>
           <a:prstGeom prst="roundRect">
             <a:avLst>
-              <a:gd name="adj" fmla="val 11250"/>
+              <a:gd name="adj" fmla="val 8571"/>
             </a:avLst>
           </a:prstGeom>
           <a:solidFill>
-            <a:srgbClr val="14233A"/>
+            <a:srgbClr val="FBEEDA"/>
           </a:solidFill>
           <a:ln/>
           <a:effectLst>
@@ -9061,14 +10637,14 @@
       </p:sp>
       <p:sp>
         <p:nvSpPr>
-          <p:cNvPr id="27" name="Text 25"/>
-          <p:cNvSpPr/>
-          <p:nvPr/>
-        </p:nvSpPr>
-        <p:spPr>
-          <a:xfrm>
-            <a:off x="868680" y="5440680"/>
-            <a:ext cx="10424160" cy="731520"/>
+          <p:cNvPr id="12" name="Text 10"/>
+          <p:cNvSpPr/>
+          <p:nvPr/>
+        </p:nvSpPr>
+        <p:spPr>
+          <a:xfrm>
+            <a:off x="868680" y="5212080"/>
+            <a:ext cx="10424160" cy="960120"/>
           </a:xfrm>
           <a:prstGeom prst="rect">
             <a:avLst/>
@@ -9081,26 +10657,29 @@
           <a:lstStyle/>
           <a:p>
             <a:pPr indent="0" marL="0">
-              <a:buNone/>
-            </a:pPr>
-            <a:r>
-              <a:rPr lang="en-US" sz="1700" b="1" dirty="0">
-                <a:solidFill>
-                  <a:srgbClr val="FFFFFF"/>
-                </a:solidFill>
-                <a:latin typeface="Calibri" pitchFamily="34" charset="0"/>
-                <a:ea typeface="Calibri" pitchFamily="34" charset="-122"/>
-                <a:cs typeface="Calibri" pitchFamily="34" charset="-120"/>
-              </a:rPr>
-              <a:t>Target: both drafted far enough that a stranger can read them, merged or on an open PR.</a:t>
-            </a:r>
-            <a:endParaRPr lang="en-US" sz="1700" dirty="0"/>
-          </a:p>
-        </p:txBody>
-      </p:sp>
-      <p:sp>
-        <p:nvSpPr>
-          <p:cNvPr id="28" name="Text 26"/>
+              <a:lnSpc>
+                <a:spcPct val="104000"/>
+              </a:lnSpc>
+              <a:buNone/>
+            </a:pPr>
+            <a:r>
+              <a:rPr lang="en-US" sz="1650" b="1" dirty="0">
+                <a:solidFill>
+                  <a:srgbClr val="1E2A36"/>
+                </a:solidFill>
+                <a:latin typeface="Calibri" pitchFamily="34" charset="0"/>
+                <a:ea typeface="Calibri" pitchFamily="34" charset="-122"/>
+                <a:cs typeface="Calibri" pitchFamily="34" charset="-120"/>
+              </a:rPr>
+              <a:t>A stranger who reads "not yet" knows what to expect. A stranger whose quickstart fails assumes the whole project is broken.</a:t>
+            </a:r>
+            <a:endParaRPr lang="en-US" sz="1650" dirty="0"/>
+          </a:p>
+        </p:txBody>
+      </p:sp>
+      <p:sp>
+        <p:nvSpPr>
+          <p:cNvPr id="13" name="Text 11"/>
           <p:cNvSpPr/>
           <p:nvPr/>
         </p:nvSpPr>
@@ -9139,7 +10718,7 @@
       </p:sp>
       <p:sp>
         <p:nvSpPr>
-          <p:cNvPr id="29" name="Text 27"/>
+          <p:cNvPr id="14" name="Text 12"/>
           <p:cNvSpPr/>
           <p:nvPr/>
         </p:nvSpPr>
@@ -9187,6 +10766,1050 @@
 <file path=ppt/slides/slide8.xml><?xml version="1.0" encoding="utf-8"?>
 <p:sld xmlns:a="http://schemas.openxmlformats.org/drawingml/2006/main" xmlns:r="http://schemas.openxmlformats.org/officeDocument/2006/relationships" xmlns:p="http://schemas.openxmlformats.org/presentationml/2006/main">
   <p:cSld name="Slide 8">
+    <p:bg>
+      <p:bgPr>
+        <a:solidFill>
+          <a:srgbClr val="FFFFFF"/>
+        </a:solidFill>
+      </p:bgPr>
+    </p:bg>
+    <p:spTree>
+      <p:nvGrpSpPr>
+        <p:cNvPr id="1" name=""/>
+        <p:cNvGrpSpPr/>
+        <p:nvPr/>
+      </p:nvGrpSpPr>
+      <p:grpSpPr>
+        <a:xfrm>
+          <a:off x="0" y="0"/>
+          <a:ext cx="0" cy="0"/>
+          <a:chOff x="0" y="0"/>
+          <a:chExt cx="0" cy="0"/>
+        </a:xfrm>
+      </p:grpSpPr>
+      <p:sp>
+        <p:nvSpPr>
+          <p:cNvPr id="2" name="Shape 0"/>
+          <p:cNvSpPr/>
+          <p:nvPr/>
+        </p:nvSpPr>
+        <p:spPr>
+          <a:xfrm>
+            <a:off x="566928" y="502920"/>
+            <a:ext cx="137160" cy="137160"/>
+          </a:xfrm>
+          <a:prstGeom prst="ellipse">
+            <a:avLst/>
+          </a:prstGeom>
+          <a:solidFill>
+            <a:srgbClr val="E8A33D"/>
+          </a:solidFill>
+          <a:ln/>
+        </p:spPr>
+      </p:sp>
+      <p:sp>
+        <p:nvSpPr>
+          <p:cNvPr id="3" name="Text 1"/>
+          <p:cNvSpPr/>
+          <p:nvPr/>
+        </p:nvSpPr>
+        <p:spPr>
+          <a:xfrm>
+            <a:off x="795528" y="402336"/>
+            <a:ext cx="10515600" cy="310896"/>
+          </a:xfrm>
+          <a:prstGeom prst="rect">
+            <a:avLst/>
+          </a:prstGeom>
+          <a:noFill/>
+          <a:ln/>
+        </p:spPr>
+        <p:txBody>
+          <a:bodyPr wrap="square" lIns="0" tIns="0" rIns="0" bIns="0" rtlCol="0" anchor="ctr"/>
+          <a:lstStyle/>
+          <a:p>
+            <a:pPr indent="0" marL="0">
+              <a:buNone/>
+            </a:pPr>
+            <a:r>
+              <a:rPr lang="en-US" sz="1400" b="1" spc="200" kern="0" dirty="0">
+                <a:solidFill>
+                  <a:srgbClr val="12908F"/>
+                </a:solidFill>
+                <a:latin typeface="Calibri" pitchFamily="34" charset="0"/>
+                <a:ea typeface="Calibri" pitchFamily="34" charset="-122"/>
+                <a:cs typeface="Calibri" pitchFamily="34" charset="-120"/>
+              </a:rPr>
+              <a:t>BUILD BLOCK 2 · 20 MIN</a:t>
+            </a:r>
+            <a:endParaRPr lang="en-US" sz="1400" dirty="0"/>
+          </a:p>
+        </p:txBody>
+      </p:sp>
+      <p:sp>
+        <p:nvSpPr>
+          <p:cNvPr id="4" name="Text 2"/>
+          <p:cNvSpPr/>
+          <p:nvPr/>
+        </p:nvSpPr>
+        <p:spPr>
+          <a:xfrm>
+            <a:off x="548640" y="749808"/>
+            <a:ext cx="11064240" cy="914400"/>
+          </a:xfrm>
+          <a:prstGeom prst="rect">
+            <a:avLst/>
+          </a:prstGeom>
+          <a:noFill/>
+          <a:ln/>
+        </p:spPr>
+        <p:txBody>
+          <a:bodyPr wrap="square" lIns="0" tIns="0" rIns="0" bIns="0" rtlCol="0" anchor="t"/>
+          <a:lstStyle/>
+          <a:p>
+            <a:pPr indent="0" marL="0">
+              <a:buNone/>
+            </a:pPr>
+            <a:r>
+              <a:rPr lang="en-US" sz="3100" b="1" dirty="0">
+                <a:solidFill>
+                  <a:srgbClr val="1E2A36"/>
+                </a:solidFill>
+                <a:latin typeface="Cambria" pitchFamily="34" charset="0"/>
+                <a:ea typeface="Cambria" pitchFamily="34" charset="-122"/>
+                <a:cs typeface="Cambria" pitchFamily="34" charset="-120"/>
+              </a:rPr>
+              <a:t>Start the write-it-yourself items</a:t>
+            </a:r>
+            <a:endParaRPr lang="en-US" sz="3100" dirty="0"/>
+          </a:p>
+        </p:txBody>
+      </p:sp>
+      <p:sp>
+        <p:nvSpPr>
+          <p:cNvPr id="5" name="Shape 3"/>
+          <p:cNvSpPr/>
+          <p:nvPr/>
+        </p:nvSpPr>
+        <p:spPr>
+          <a:xfrm>
+            <a:off x="548640" y="1783080"/>
+            <a:ext cx="5440680" cy="3429000"/>
+          </a:xfrm>
+          <a:prstGeom prst="roundRect">
+            <a:avLst>
+              <a:gd name="adj" fmla="val 2400"/>
+            </a:avLst>
+          </a:prstGeom>
+          <a:solidFill>
+            <a:srgbClr val="F2F6F8"/>
+          </a:solidFill>
+          <a:ln/>
+          <a:effectLst>
+            <a:outerShdw sx="100000" sy="100000" kx="0" ky="0" algn="bl" rotWithShape="0" blurRad="88900" dist="38100" dir="5400000">
+              <a:srgbClr val="000000">
+                <a:alpha val="13000"/>
+              </a:srgbClr>
+            </a:outerShdw>
+          </a:effectLst>
+        </p:spPr>
+      </p:sp>
+      <p:sp>
+        <p:nvSpPr>
+          <p:cNvPr id="6" name="Text 4"/>
+          <p:cNvSpPr/>
+          <p:nvPr/>
+        </p:nvSpPr>
+        <p:spPr>
+          <a:xfrm>
+            <a:off x="868680" y="1920240"/>
+            <a:ext cx="4846320" cy="457200"/>
+          </a:xfrm>
+          <a:prstGeom prst="rect">
+            <a:avLst/>
+          </a:prstGeom>
+          <a:noFill/>
+          <a:ln/>
+        </p:spPr>
+        <p:txBody>
+          <a:bodyPr wrap="square" lIns="0" tIns="0" rIns="0" bIns="0" rtlCol="0" anchor="ctr"/>
+          <a:lstStyle/>
+          <a:p>
+            <a:pPr indent="0" marL="0">
+              <a:buNone/>
+            </a:pPr>
+            <a:r>
+              <a:rPr lang="en-US" sz="1800" b="1" dirty="0">
+                <a:solidFill>
+                  <a:srgbClr val="0E6E6D"/>
+                </a:solidFill>
+                <a:latin typeface="Consolas" pitchFamily="34" charset="0"/>
+                <a:ea typeface="Consolas" pitchFamily="34" charset="-122"/>
+                <a:cs typeface="Consolas" pitchFamily="34" charset="-120"/>
+              </a:rPr>
+              <a:t>CONTRIBUTING.md</a:t>
+            </a:r>
+            <a:endParaRPr lang="en-US" sz="1800" dirty="0"/>
+          </a:p>
+        </p:txBody>
+      </p:sp>
+      <p:sp>
+        <p:nvSpPr>
+          <p:cNvPr id="7" name="Text 5"/>
+          <p:cNvSpPr/>
+          <p:nvPr/>
+        </p:nvSpPr>
+        <p:spPr>
+          <a:xfrm>
+            <a:off x="868680" y="2377440"/>
+            <a:ext cx="4846320" cy="365760"/>
+          </a:xfrm>
+          <a:prstGeom prst="rect">
+            <a:avLst/>
+          </a:prstGeom>
+          <a:noFill/>
+          <a:ln/>
+        </p:spPr>
+        <p:txBody>
+          <a:bodyPr wrap="square" lIns="0" tIns="0" rIns="0" bIns="0" rtlCol="0" anchor="ctr"/>
+          <a:lstStyle/>
+          <a:p>
+            <a:pPr indent="0" marL="0">
+              <a:buNone/>
+            </a:pPr>
+            <a:r>
+              <a:rPr lang="en-US" sz="1500" i="1" dirty="0">
+                <a:solidFill>
+                  <a:srgbClr val="5F7284"/>
+                </a:solidFill>
+                <a:latin typeface="Calibri" pitchFamily="34" charset="0"/>
+                <a:ea typeface="Calibri" pitchFamily="34" charset="-122"/>
+                <a:cs typeface="Calibri" pitchFamily="34" charset="-120"/>
+              </a:rPr>
+              <a:t>Grow it from your git standards, in this order:</a:t>
+            </a:r>
+            <a:endParaRPr lang="en-US" sz="1500" dirty="0"/>
+          </a:p>
+        </p:txBody>
+      </p:sp>
+      <p:sp>
+        <p:nvSpPr>
+          <p:cNvPr id="8" name="Shape 6"/>
+          <p:cNvSpPr/>
+          <p:nvPr/>
+        </p:nvSpPr>
+        <p:spPr>
+          <a:xfrm>
+            <a:off x="868680" y="2871216"/>
+            <a:ext cx="329184" cy="329184"/>
+          </a:xfrm>
+          <a:prstGeom prst="ellipse">
+            <a:avLst/>
+          </a:prstGeom>
+          <a:solidFill>
+            <a:srgbClr val="E8A33D"/>
+          </a:solidFill>
+          <a:ln/>
+        </p:spPr>
+      </p:sp>
+      <p:sp>
+        <p:nvSpPr>
+          <p:cNvPr id="9" name="Text 7"/>
+          <p:cNvSpPr/>
+          <p:nvPr/>
+        </p:nvSpPr>
+        <p:spPr>
+          <a:xfrm>
+            <a:off x="868680" y="2871216"/>
+            <a:ext cx="329184" cy="329184"/>
+          </a:xfrm>
+          <a:prstGeom prst="rect">
+            <a:avLst/>
+          </a:prstGeom>
+          <a:noFill/>
+          <a:ln/>
+        </p:spPr>
+        <p:txBody>
+          <a:bodyPr wrap="square" lIns="0" tIns="0" rIns="0" bIns="0" rtlCol="0" anchor="ctr"/>
+          <a:lstStyle/>
+          <a:p>
+            <a:pPr algn="ctr" indent="0" marL="0">
+              <a:buNone/>
+            </a:pPr>
+            <a:r>
+              <a:rPr lang="en-US" sz="1400" b="1" dirty="0">
+                <a:solidFill>
+                  <a:srgbClr val="14233A"/>
+                </a:solidFill>
+                <a:latin typeface="Calibri" pitchFamily="34" charset="0"/>
+                <a:ea typeface="Calibri" pitchFamily="34" charset="-122"/>
+                <a:cs typeface="Calibri" pitchFamily="34" charset="-120"/>
+              </a:rPr>
+              <a:t>1</a:t>
+            </a:r>
+            <a:endParaRPr lang="en-US" sz="1400" dirty="0"/>
+          </a:p>
+        </p:txBody>
+      </p:sp>
+      <p:sp>
+        <p:nvSpPr>
+          <p:cNvPr id="10" name="Text 8"/>
+          <p:cNvSpPr/>
+          <p:nvPr/>
+        </p:nvSpPr>
+        <p:spPr>
+          <a:xfrm>
+            <a:off x="1371600" y="2834640"/>
+            <a:ext cx="4389120" cy="402336"/>
+          </a:xfrm>
+          <a:prstGeom prst="rect">
+            <a:avLst/>
+          </a:prstGeom>
+          <a:noFill/>
+          <a:ln/>
+        </p:spPr>
+        <p:txBody>
+          <a:bodyPr wrap="square" lIns="0" tIns="0" rIns="0" bIns="0" rtlCol="0" anchor="ctr"/>
+          <a:lstStyle/>
+          <a:p>
+            <a:pPr indent="0" marL="0">
+              <a:buNone/>
+            </a:pPr>
+            <a:r>
+              <a:rPr lang="en-US" sz="1700" b="1" dirty="0">
+                <a:solidFill>
+                  <a:srgbClr val="1E2A36"/>
+                </a:solidFill>
+                <a:latin typeface="Calibri" pitchFamily="34" charset="0"/>
+                <a:ea typeface="Calibri" pitchFamily="34" charset="-122"/>
+                <a:cs typeface="Calibri" pitchFamily="34" charset="-120"/>
+              </a:rPr>
+              <a:t>Welcome</a:t>
+            </a:r>
+            <a:endParaRPr lang="en-US" sz="1700" dirty="0"/>
+          </a:p>
+        </p:txBody>
+      </p:sp>
+      <p:sp>
+        <p:nvSpPr>
+          <p:cNvPr id="11" name="Shape 9"/>
+          <p:cNvSpPr/>
+          <p:nvPr/>
+        </p:nvSpPr>
+        <p:spPr>
+          <a:xfrm>
+            <a:off x="868680" y="3328416"/>
+            <a:ext cx="329184" cy="329184"/>
+          </a:xfrm>
+          <a:prstGeom prst="ellipse">
+            <a:avLst/>
+          </a:prstGeom>
+          <a:solidFill>
+            <a:srgbClr val="E8A33D"/>
+          </a:solidFill>
+          <a:ln/>
+        </p:spPr>
+      </p:sp>
+      <p:sp>
+        <p:nvSpPr>
+          <p:cNvPr id="12" name="Text 10"/>
+          <p:cNvSpPr/>
+          <p:nvPr/>
+        </p:nvSpPr>
+        <p:spPr>
+          <a:xfrm>
+            <a:off x="868680" y="3328416"/>
+            <a:ext cx="329184" cy="329184"/>
+          </a:xfrm>
+          <a:prstGeom prst="rect">
+            <a:avLst/>
+          </a:prstGeom>
+          <a:noFill/>
+          <a:ln/>
+        </p:spPr>
+        <p:txBody>
+          <a:bodyPr wrap="square" lIns="0" tIns="0" rIns="0" bIns="0" rtlCol="0" anchor="ctr"/>
+          <a:lstStyle/>
+          <a:p>
+            <a:pPr algn="ctr" indent="0" marL="0">
+              <a:buNone/>
+            </a:pPr>
+            <a:r>
+              <a:rPr lang="en-US" sz="1400" b="1" dirty="0">
+                <a:solidFill>
+                  <a:srgbClr val="14233A"/>
+                </a:solidFill>
+                <a:latin typeface="Calibri" pitchFamily="34" charset="0"/>
+                <a:ea typeface="Calibri" pitchFamily="34" charset="-122"/>
+                <a:cs typeface="Calibri" pitchFamily="34" charset="-120"/>
+              </a:rPr>
+              <a:t>2</a:t>
+            </a:r>
+            <a:endParaRPr lang="en-US" sz="1400" dirty="0"/>
+          </a:p>
+        </p:txBody>
+      </p:sp>
+      <p:sp>
+        <p:nvSpPr>
+          <p:cNvPr id="13" name="Text 11"/>
+          <p:cNvSpPr/>
+          <p:nvPr/>
+        </p:nvSpPr>
+        <p:spPr>
+          <a:xfrm>
+            <a:off x="1371600" y="3291840"/>
+            <a:ext cx="4389120" cy="402336"/>
+          </a:xfrm>
+          <a:prstGeom prst="rect">
+            <a:avLst/>
+          </a:prstGeom>
+          <a:noFill/>
+          <a:ln/>
+        </p:spPr>
+        <p:txBody>
+          <a:bodyPr wrap="square" lIns="0" tIns="0" rIns="0" bIns="0" rtlCol="0" anchor="ctr"/>
+          <a:lstStyle/>
+          <a:p>
+            <a:pPr indent="0" marL="0">
+              <a:buNone/>
+            </a:pPr>
+            <a:r>
+              <a:rPr lang="en-US" sz="1700" b="1" dirty="0">
+                <a:solidFill>
+                  <a:srgbClr val="1E2A36"/>
+                </a:solidFill>
+                <a:latin typeface="Calibri" pitchFamily="34" charset="0"/>
+                <a:ea typeface="Calibri" pitchFamily="34" charset="-122"/>
+                <a:cs typeface="Calibri" pitchFamily="34" charset="-120"/>
+              </a:rPr>
+              <a:t>What to do first</a:t>
+            </a:r>
+            <a:endParaRPr lang="en-US" sz="1700" dirty="0"/>
+          </a:p>
+        </p:txBody>
+      </p:sp>
+      <p:sp>
+        <p:nvSpPr>
+          <p:cNvPr id="14" name="Shape 12"/>
+          <p:cNvSpPr/>
+          <p:nvPr/>
+        </p:nvSpPr>
+        <p:spPr>
+          <a:xfrm>
+            <a:off x="868680" y="3785616"/>
+            <a:ext cx="329184" cy="329184"/>
+          </a:xfrm>
+          <a:prstGeom prst="ellipse">
+            <a:avLst/>
+          </a:prstGeom>
+          <a:solidFill>
+            <a:srgbClr val="12908F"/>
+          </a:solidFill>
+          <a:ln/>
+        </p:spPr>
+      </p:sp>
+      <p:sp>
+        <p:nvSpPr>
+          <p:cNvPr id="15" name="Text 13"/>
+          <p:cNvSpPr/>
+          <p:nvPr/>
+        </p:nvSpPr>
+        <p:spPr>
+          <a:xfrm>
+            <a:off x="868680" y="3785616"/>
+            <a:ext cx="329184" cy="329184"/>
+          </a:xfrm>
+          <a:prstGeom prst="rect">
+            <a:avLst/>
+          </a:prstGeom>
+          <a:noFill/>
+          <a:ln/>
+        </p:spPr>
+        <p:txBody>
+          <a:bodyPr wrap="square" lIns="0" tIns="0" rIns="0" bIns="0" rtlCol="0" anchor="ctr"/>
+          <a:lstStyle/>
+          <a:p>
+            <a:pPr algn="ctr" indent="0" marL="0">
+              <a:buNone/>
+            </a:pPr>
+            <a:r>
+              <a:rPr lang="en-US" sz="1400" b="1" dirty="0">
+                <a:solidFill>
+                  <a:srgbClr val="FFFFFF"/>
+                </a:solidFill>
+                <a:latin typeface="Calibri" pitchFamily="34" charset="0"/>
+                <a:ea typeface="Calibri" pitchFamily="34" charset="-122"/>
+                <a:cs typeface="Calibri" pitchFamily="34" charset="-120"/>
+              </a:rPr>
+              <a:t>3</a:t>
+            </a:r>
+            <a:endParaRPr lang="en-US" sz="1400" dirty="0"/>
+          </a:p>
+        </p:txBody>
+      </p:sp>
+      <p:sp>
+        <p:nvSpPr>
+          <p:cNvPr id="16" name="Text 14"/>
+          <p:cNvSpPr/>
+          <p:nvPr/>
+        </p:nvSpPr>
+        <p:spPr>
+          <a:xfrm>
+            <a:off x="1371600" y="3749040"/>
+            <a:ext cx="4389120" cy="402336"/>
+          </a:xfrm>
+          <a:prstGeom prst="rect">
+            <a:avLst/>
+          </a:prstGeom>
+          <a:noFill/>
+          <a:ln/>
+        </p:spPr>
+        <p:txBody>
+          <a:bodyPr wrap="square" lIns="0" tIns="0" rIns="0" bIns="0" rtlCol="0" anchor="ctr"/>
+          <a:lstStyle/>
+          <a:p>
+            <a:pPr indent="0" marL="0">
+              <a:buNone/>
+            </a:pPr>
+            <a:r>
+              <a:rPr lang="en-US" sz="1700" dirty="0">
+                <a:solidFill>
+                  <a:srgbClr val="1E2A36"/>
+                </a:solidFill>
+                <a:latin typeface="Calibri" pitchFamily="34" charset="0"/>
+                <a:ea typeface="Calibri" pitchFamily="34" charset="-122"/>
+                <a:cs typeface="Calibri" pitchFamily="34" charset="-120"/>
+              </a:rPr>
+              <a:t>How to pick work</a:t>
+            </a:r>
+            <a:endParaRPr lang="en-US" sz="1700" dirty="0"/>
+          </a:p>
+        </p:txBody>
+      </p:sp>
+      <p:sp>
+        <p:nvSpPr>
+          <p:cNvPr id="17" name="Shape 15"/>
+          <p:cNvSpPr/>
+          <p:nvPr/>
+        </p:nvSpPr>
+        <p:spPr>
+          <a:xfrm>
+            <a:off x="868680" y="4242816"/>
+            <a:ext cx="329184" cy="329184"/>
+          </a:xfrm>
+          <a:prstGeom prst="ellipse">
+            <a:avLst/>
+          </a:prstGeom>
+          <a:solidFill>
+            <a:srgbClr val="12908F"/>
+          </a:solidFill>
+          <a:ln/>
+        </p:spPr>
+      </p:sp>
+      <p:sp>
+        <p:nvSpPr>
+          <p:cNvPr id="18" name="Text 16"/>
+          <p:cNvSpPr/>
+          <p:nvPr/>
+        </p:nvSpPr>
+        <p:spPr>
+          <a:xfrm>
+            <a:off x="868680" y="4242816"/>
+            <a:ext cx="329184" cy="329184"/>
+          </a:xfrm>
+          <a:prstGeom prst="rect">
+            <a:avLst/>
+          </a:prstGeom>
+          <a:noFill/>
+          <a:ln/>
+        </p:spPr>
+        <p:txBody>
+          <a:bodyPr wrap="square" lIns="0" tIns="0" rIns="0" bIns="0" rtlCol="0" anchor="ctr"/>
+          <a:lstStyle/>
+          <a:p>
+            <a:pPr algn="ctr" indent="0" marL="0">
+              <a:buNone/>
+            </a:pPr>
+            <a:r>
+              <a:rPr lang="en-US" sz="1400" b="1" dirty="0">
+                <a:solidFill>
+                  <a:srgbClr val="FFFFFF"/>
+                </a:solidFill>
+                <a:latin typeface="Calibri" pitchFamily="34" charset="0"/>
+                <a:ea typeface="Calibri" pitchFamily="34" charset="-122"/>
+                <a:cs typeface="Calibri" pitchFamily="34" charset="-120"/>
+              </a:rPr>
+              <a:t>4</a:t>
+            </a:r>
+            <a:endParaRPr lang="en-US" sz="1400" dirty="0"/>
+          </a:p>
+        </p:txBody>
+      </p:sp>
+      <p:sp>
+        <p:nvSpPr>
+          <p:cNvPr id="19" name="Text 17"/>
+          <p:cNvSpPr/>
+          <p:nvPr/>
+        </p:nvSpPr>
+        <p:spPr>
+          <a:xfrm>
+            <a:off x="1371600" y="4206240"/>
+            <a:ext cx="4389120" cy="402336"/>
+          </a:xfrm>
+          <a:prstGeom prst="rect">
+            <a:avLst/>
+          </a:prstGeom>
+          <a:noFill/>
+          <a:ln/>
+        </p:spPr>
+        <p:txBody>
+          <a:bodyPr wrap="square" lIns="0" tIns="0" rIns="0" bIns="0" rtlCol="0" anchor="ctr"/>
+          <a:lstStyle/>
+          <a:p>
+            <a:pPr indent="0" marL="0">
+              <a:buNone/>
+            </a:pPr>
+            <a:r>
+              <a:rPr lang="en-US" sz="1700" dirty="0">
+                <a:solidFill>
+                  <a:srgbClr val="1E2A36"/>
+                </a:solidFill>
+                <a:latin typeface="Calibri" pitchFamily="34" charset="0"/>
+                <a:ea typeface="Calibri" pitchFamily="34" charset="-122"/>
+                <a:cs typeface="Calibri" pitchFamily="34" charset="-120"/>
+              </a:rPr>
+              <a:t>The PR process and reviews</a:t>
+            </a:r>
+            <a:endParaRPr lang="en-US" sz="1700" dirty="0"/>
+          </a:p>
+        </p:txBody>
+      </p:sp>
+      <p:sp>
+        <p:nvSpPr>
+          <p:cNvPr id="20" name="Shape 18"/>
+          <p:cNvSpPr/>
+          <p:nvPr/>
+        </p:nvSpPr>
+        <p:spPr>
+          <a:xfrm>
+            <a:off x="868680" y="4700016"/>
+            <a:ext cx="329184" cy="329184"/>
+          </a:xfrm>
+          <a:prstGeom prst="ellipse">
+            <a:avLst/>
+          </a:prstGeom>
+          <a:solidFill>
+            <a:srgbClr val="12908F"/>
+          </a:solidFill>
+          <a:ln/>
+        </p:spPr>
+      </p:sp>
+      <p:sp>
+        <p:nvSpPr>
+          <p:cNvPr id="21" name="Text 19"/>
+          <p:cNvSpPr/>
+          <p:nvPr/>
+        </p:nvSpPr>
+        <p:spPr>
+          <a:xfrm>
+            <a:off x="868680" y="4700016"/>
+            <a:ext cx="329184" cy="329184"/>
+          </a:xfrm>
+          <a:prstGeom prst="rect">
+            <a:avLst/>
+          </a:prstGeom>
+          <a:noFill/>
+          <a:ln/>
+        </p:spPr>
+        <p:txBody>
+          <a:bodyPr wrap="square" lIns="0" tIns="0" rIns="0" bIns="0" rtlCol="0" anchor="ctr"/>
+          <a:lstStyle/>
+          <a:p>
+            <a:pPr algn="ctr" indent="0" marL="0">
+              <a:buNone/>
+            </a:pPr>
+            <a:r>
+              <a:rPr lang="en-US" sz="1400" b="1" dirty="0">
+                <a:solidFill>
+                  <a:srgbClr val="FFFFFF"/>
+                </a:solidFill>
+                <a:latin typeface="Calibri" pitchFamily="34" charset="0"/>
+                <a:ea typeface="Calibri" pitchFamily="34" charset="-122"/>
+                <a:cs typeface="Calibri" pitchFamily="34" charset="-120"/>
+              </a:rPr>
+              <a:t>5</a:t>
+            </a:r>
+            <a:endParaRPr lang="en-US" sz="1400" dirty="0"/>
+          </a:p>
+        </p:txBody>
+      </p:sp>
+      <p:sp>
+        <p:nvSpPr>
+          <p:cNvPr id="22" name="Text 20"/>
+          <p:cNvSpPr/>
+          <p:nvPr/>
+        </p:nvSpPr>
+        <p:spPr>
+          <a:xfrm>
+            <a:off x="1371600" y="4663440"/>
+            <a:ext cx="4389120" cy="402336"/>
+          </a:xfrm>
+          <a:prstGeom prst="rect">
+            <a:avLst/>
+          </a:prstGeom>
+          <a:noFill/>
+          <a:ln/>
+        </p:spPr>
+        <p:txBody>
+          <a:bodyPr wrap="square" lIns="0" tIns="0" rIns="0" bIns="0" rtlCol="0" anchor="ctr"/>
+          <a:lstStyle/>
+          <a:p>
+            <a:pPr indent="0" marL="0">
+              <a:buNone/>
+            </a:pPr>
+            <a:r>
+              <a:rPr lang="en-US" sz="1700" dirty="0">
+                <a:solidFill>
+                  <a:srgbClr val="1E2A36"/>
+                </a:solidFill>
+                <a:latin typeface="Calibri" pitchFamily="34" charset="0"/>
+                <a:ea typeface="Calibri" pitchFamily="34" charset="-122"/>
+                <a:cs typeface="Calibri" pitchFamily="34" charset="-120"/>
+              </a:rPr>
+              <a:t>Policy, last</a:t>
+            </a:r>
+            <a:endParaRPr lang="en-US" sz="1700" dirty="0"/>
+          </a:p>
+        </p:txBody>
+      </p:sp>
+      <p:sp>
+        <p:nvSpPr>
+          <p:cNvPr id="23" name="Shape 21"/>
+          <p:cNvSpPr/>
+          <p:nvPr/>
+        </p:nvSpPr>
+        <p:spPr>
+          <a:xfrm>
+            <a:off x="6172200" y="1783080"/>
+            <a:ext cx="5440680" cy="3429000"/>
+          </a:xfrm>
+          <a:prstGeom prst="roundRect">
+            <a:avLst>
+              <a:gd name="adj" fmla="val 2400"/>
+            </a:avLst>
+          </a:prstGeom>
+          <a:solidFill>
+            <a:srgbClr val="F2F6F8"/>
+          </a:solidFill>
+          <a:ln/>
+          <a:effectLst>
+            <a:outerShdw sx="100000" sy="100000" kx="0" ky="0" algn="bl" rotWithShape="0" blurRad="88900" dist="38100" dir="5400000">
+              <a:srgbClr val="000000">
+                <a:alpha val="13000"/>
+              </a:srgbClr>
+            </a:outerShdw>
+          </a:effectLst>
+        </p:spPr>
+      </p:sp>
+      <p:sp>
+        <p:nvSpPr>
+          <p:cNvPr id="24" name="Text 22"/>
+          <p:cNvSpPr/>
+          <p:nvPr/>
+        </p:nvSpPr>
+        <p:spPr>
+          <a:xfrm>
+            <a:off x="6492240" y="1920240"/>
+            <a:ext cx="4846320" cy="457200"/>
+          </a:xfrm>
+          <a:prstGeom prst="rect">
+            <a:avLst/>
+          </a:prstGeom>
+          <a:noFill/>
+          <a:ln/>
+        </p:spPr>
+        <p:txBody>
+          <a:bodyPr wrap="square" lIns="0" tIns="0" rIns="0" bIns="0" rtlCol="0" anchor="ctr"/>
+          <a:lstStyle/>
+          <a:p>
+            <a:pPr indent="0" marL="0">
+              <a:buNone/>
+            </a:pPr>
+            <a:r>
+              <a:rPr lang="en-US" sz="1800" b="1" dirty="0">
+                <a:solidFill>
+                  <a:srgbClr val="0E6E6D"/>
+                </a:solidFill>
+                <a:latin typeface="Consolas" pitchFamily="34" charset="0"/>
+                <a:ea typeface="Consolas" pitchFamily="34" charset="-122"/>
+                <a:cs typeface="Consolas" pitchFamily="34" charset="-120"/>
+              </a:rPr>
+              <a:t>docs/communication-norms.md</a:t>
+            </a:r>
+            <a:endParaRPr lang="en-US" sz="1800" dirty="0"/>
+          </a:p>
+        </p:txBody>
+      </p:sp>
+      <p:sp>
+        <p:nvSpPr>
+          <p:cNvPr id="25" name="Text 23"/>
+          <p:cNvSpPr/>
+          <p:nvPr/>
+        </p:nvSpPr>
+        <p:spPr>
+          <a:xfrm>
+            <a:off x="6492240" y="2468880"/>
+            <a:ext cx="4892040" cy="2651760"/>
+          </a:xfrm>
+          <a:prstGeom prst="rect">
+            <a:avLst/>
+          </a:prstGeom>
+          <a:noFill/>
+          <a:ln/>
+        </p:spPr>
+        <p:txBody>
+          <a:bodyPr wrap="square" lIns="0" tIns="0" rIns="0" bIns="0" rtlCol="0" anchor="t"/>
+          <a:lstStyle/>
+          <a:p>
+            <a:pPr marL="203200" indent="-203200">
+              <a:spcAft>
+                <a:spcPts val="700"/>
+              </a:spcAft>
+              <a:buSzPct val="100000"/>
+              <a:buChar char="•"/>
+            </a:pPr>
+            <a:r>
+              <a:rPr lang="en-US" sz="1600" dirty="0">
+                <a:solidFill>
+                  <a:srgbClr val="1E2A36"/>
+                </a:solidFill>
+                <a:latin typeface="Calibri" pitchFamily="34" charset="0"/>
+                <a:ea typeface="Calibri" pitchFamily="34" charset="-122"/>
+                <a:cs typeface="Calibri" pitchFamily="34" charset="-120"/>
+              </a:rPr>
+              <a:t>Where discussion happens</a:t>
+            </a:r>
+            <a:endParaRPr lang="en-US" sz="1600" dirty="0"/>
+          </a:p>
+          <a:p>
+            <a:pPr marL="203200" indent="-203200">
+              <a:spcAft>
+                <a:spcPts val="700"/>
+              </a:spcAft>
+              <a:buSzPct val="100000"/>
+              <a:buChar char="•"/>
+            </a:pPr>
+            <a:r>
+              <a:rPr lang="en-US" sz="1600" dirty="0">
+                <a:solidFill>
+                  <a:srgbClr val="1E2A36"/>
+                </a:solidFill>
+                <a:latin typeface="Calibri" pitchFamily="34" charset="0"/>
+                <a:ea typeface="Calibri" pitchFamily="34" charset="-122"/>
+                <a:cs typeface="Calibri" pitchFamily="34" charset="-120"/>
+              </a:rPr>
+              <a:t>Response times you can keep: "within a week," not "24/7"</a:t>
+            </a:r>
+            <a:endParaRPr lang="en-US" sz="1600" dirty="0"/>
+          </a:p>
+          <a:p>
+            <a:pPr marL="203200" indent="-203200">
+              <a:spcAft>
+                <a:spcPts val="700"/>
+              </a:spcAft>
+              <a:buSzPct val="100000"/>
+              <a:buChar char="•"/>
+            </a:pPr>
+            <a:r>
+              <a:rPr lang="en-US" sz="1600" dirty="0">
+                <a:solidFill>
+                  <a:srgbClr val="1E2A36"/>
+                </a:solidFill>
+                <a:latin typeface="Calibri" pitchFamily="34" charset="0"/>
+                <a:ea typeface="Calibri" pitchFamily="34" charset="-122"/>
+                <a:cs typeface="Calibri" pitchFamily="34" charset="-120"/>
+              </a:rPr>
+              <a:t>Who maintains</a:t>
+            </a:r>
+            <a:endParaRPr lang="en-US" sz="1600" dirty="0"/>
+          </a:p>
+          <a:p>
+            <a:pPr marL="203200" indent="-203200">
+              <a:buSzPct val="100000"/>
+              <a:buChar char="•"/>
+            </a:pPr>
+            <a:r>
+              <a:rPr lang="en-US" sz="1600" dirty="0">
+                <a:solidFill>
+                  <a:srgbClr val="1E2A36"/>
+                </a:solidFill>
+                <a:latin typeface="Calibri" pitchFamily="34" charset="0"/>
+                <a:ea typeface="Calibri" pitchFamily="34" charset="-122"/>
+                <a:cs typeface="Calibri" pitchFamily="34" charset="-120"/>
+              </a:rPr>
+              <a:t>How decisions get made. Solo: how does a contributor's proposal get decided, and where?</a:t>
+            </a:r>
+            <a:endParaRPr lang="en-US" sz="1600" dirty="0"/>
+          </a:p>
+        </p:txBody>
+      </p:sp>
+      <p:sp>
+        <p:nvSpPr>
+          <p:cNvPr id="26" name="Shape 24"/>
+          <p:cNvSpPr/>
+          <p:nvPr/>
+        </p:nvSpPr>
+        <p:spPr>
+          <a:xfrm>
+            <a:off x="548640" y="5440680"/>
+            <a:ext cx="11064240" cy="731520"/>
+          </a:xfrm>
+          <a:prstGeom prst="roundRect">
+            <a:avLst>
+              <a:gd name="adj" fmla="val 11250"/>
+            </a:avLst>
+          </a:prstGeom>
+          <a:solidFill>
+            <a:srgbClr val="14233A"/>
+          </a:solidFill>
+          <a:ln/>
+          <a:effectLst>
+            <a:outerShdw sx="100000" sy="100000" kx="0" ky="0" algn="bl" rotWithShape="0" blurRad="88900" dist="38100" dir="5400000">
+              <a:srgbClr val="000000">
+                <a:alpha val="13000"/>
+              </a:srgbClr>
+            </a:outerShdw>
+          </a:effectLst>
+        </p:spPr>
+      </p:sp>
+      <p:sp>
+        <p:nvSpPr>
+          <p:cNvPr id="27" name="Text 25"/>
+          <p:cNvSpPr/>
+          <p:nvPr/>
+        </p:nvSpPr>
+        <p:spPr>
+          <a:xfrm>
+            <a:off x="868680" y="5440680"/>
+            <a:ext cx="10424160" cy="731520"/>
+          </a:xfrm>
+          <a:prstGeom prst="rect">
+            <a:avLst/>
+          </a:prstGeom>
+          <a:noFill/>
+          <a:ln/>
+        </p:spPr>
+        <p:txBody>
+          <a:bodyPr wrap="square" lIns="0" tIns="0" rIns="0" bIns="0" rtlCol="0" anchor="ctr"/>
+          <a:lstStyle/>
+          <a:p>
+            <a:pPr indent="0" marL="0">
+              <a:buNone/>
+            </a:pPr>
+            <a:r>
+              <a:rPr lang="en-US" sz="1700" b="1" dirty="0">
+                <a:solidFill>
+                  <a:srgbClr val="FFFFFF"/>
+                </a:solidFill>
+                <a:latin typeface="Calibri" pitchFamily="34" charset="0"/>
+                <a:ea typeface="Calibri" pitchFamily="34" charset="-122"/>
+                <a:cs typeface="Calibri" pitchFamily="34" charset="-120"/>
+              </a:rPr>
+              <a:t>Target: both drafted far enough that a stranger can read them, merged or on an open PR.</a:t>
+            </a:r>
+            <a:endParaRPr lang="en-US" sz="1700" dirty="0"/>
+          </a:p>
+        </p:txBody>
+      </p:sp>
+      <p:sp>
+        <p:nvSpPr>
+          <p:cNvPr id="28" name="Text 26"/>
+          <p:cNvSpPr/>
+          <p:nvPr/>
+        </p:nvSpPr>
+        <p:spPr>
+          <a:xfrm>
+            <a:off x="6675120" y="6437376"/>
+            <a:ext cx="4937760" cy="274320"/>
+          </a:xfrm>
+          <a:prstGeom prst="rect">
+            <a:avLst/>
+          </a:prstGeom>
+          <a:noFill/>
+          <a:ln/>
+        </p:spPr>
+        <p:txBody>
+          <a:bodyPr wrap="square" lIns="0" tIns="0" rIns="0" bIns="0" rtlCol="0" anchor="ctr"/>
+          <a:lstStyle/>
+          <a:p>
+            <a:pPr algn="r" indent="0" marL="0">
+              <a:buNone/>
+            </a:pPr>
+            <a:r>
+              <a:rPr lang="en-US" sz="1000" dirty="0">
+                <a:solidFill>
+                  <a:srgbClr val="5F7284"/>
+                </a:solidFill>
+                <a:latin typeface="Calibri" pitchFamily="34" charset="0"/>
+                <a:ea typeface="Calibri" pitchFamily="34" charset="-122"/>
+                <a:cs typeface="Calibri" pitchFamily="34" charset="-120"/>
+              </a:rPr>
+              <a:t>CS 301R · Session 16 · Ship the Front Door</a:t>
+            </a:r>
+            <a:endParaRPr lang="en-US" sz="1000" dirty="0"/>
+          </a:p>
+        </p:txBody>
+      </p:sp>
+      <p:sp>
+        <p:nvSpPr>
+          <p:cNvPr id="29" name="Text 27"/>
+          <p:cNvSpPr/>
+          <p:nvPr/>
+        </p:nvSpPr>
+        <p:spPr>
+          <a:xfrm>
+            <a:off x="548640" y="6437376"/>
+            <a:ext cx="548640" cy="274320"/>
+          </a:xfrm>
+          <a:prstGeom prst="rect">
+            <a:avLst/>
+          </a:prstGeom>
+          <a:noFill/>
+          <a:ln/>
+        </p:spPr>
+        <p:txBody>
+          <a:bodyPr wrap="square" lIns="0" tIns="0" rIns="0" bIns="0" rtlCol="0" anchor="ctr"/>
+          <a:lstStyle/>
+          <a:p>
+            <a:pPr indent="0" marL="0">
+              <a:buNone/>
+            </a:pPr>
+            <a:r>
+              <a:rPr lang="en-US" sz="1000" dirty="0">
+                <a:solidFill>
+                  <a:srgbClr val="5F7284"/>
+                </a:solidFill>
+                <a:latin typeface="Calibri" pitchFamily="34" charset="0"/>
+                <a:ea typeface="Calibri" pitchFamily="34" charset="-122"/>
+                <a:cs typeface="Calibri" pitchFamily="34" charset="-120"/>
+              </a:rPr>
+              <a:t>8</a:t>
+            </a:r>
+            <a:endParaRPr lang="en-US" sz="1000" dirty="0"/>
+          </a:p>
+        </p:txBody>
+      </p:sp>
+    </p:spTree>
+  </p:cSld>
+  <p:clrMapOvr>
+    <a:masterClrMapping/>
+  </p:clrMapOvr>
+</p:sld>
+</file>
+
+<file path=ppt/slides/slide9.xml><?xml version="1.0" encoding="utf-8"?>
+<p:sld xmlns:a="http://schemas.openxmlformats.org/drawingml/2006/main" xmlns:r="http://schemas.openxmlformats.org/officeDocument/2006/relationships" xmlns:p="http://schemas.openxmlformats.org/presentationml/2006/main">
+  <p:cSld name="Slide 9">
     <p:bg>
       <p:bgPr>
         <a:solidFill>
@@ -10137,744 +12760,6 @@
               <a:rPr lang="en-US" sz="1000" dirty="0">
                 <a:solidFill>
                   <a:srgbClr val="7E92A8"/>
-                </a:solidFill>
-                <a:latin typeface="Calibri" pitchFamily="34" charset="0"/>
-                <a:ea typeface="Calibri" pitchFamily="34" charset="-122"/>
-                <a:cs typeface="Calibri" pitchFamily="34" charset="-120"/>
-              </a:rPr>
-              <a:t>8</a:t>
-            </a:r>
-            <a:endParaRPr lang="en-US" sz="1000" dirty="0"/>
-          </a:p>
-        </p:txBody>
-      </p:sp>
-    </p:spTree>
-  </p:cSld>
-  <p:clrMapOvr>
-    <a:masterClrMapping/>
-  </p:clrMapOvr>
-</p:sld>
-</file>
-
-<file path=ppt/slides/slide9.xml><?xml version="1.0" encoding="utf-8"?>
-<p:sld xmlns:a="http://schemas.openxmlformats.org/drawingml/2006/main" xmlns:r="http://schemas.openxmlformats.org/officeDocument/2006/relationships" xmlns:p="http://schemas.openxmlformats.org/presentationml/2006/main">
-  <p:cSld name="Slide 9">
-    <p:bg>
-      <p:bgPr>
-        <a:solidFill>
-          <a:srgbClr val="FFFFFF"/>
-        </a:solidFill>
-      </p:bgPr>
-    </p:bg>
-    <p:spTree>
-      <p:nvGrpSpPr>
-        <p:cNvPr id="1" name=""/>
-        <p:cNvGrpSpPr/>
-        <p:nvPr/>
-      </p:nvGrpSpPr>
-      <p:grpSpPr>
-        <a:xfrm>
-          <a:off x="0" y="0"/>
-          <a:ext cx="0" cy="0"/>
-          <a:chOff x="0" y="0"/>
-          <a:chExt cx="0" cy="0"/>
-        </a:xfrm>
-      </p:grpSpPr>
-      <p:sp>
-        <p:nvSpPr>
-          <p:cNvPr id="2" name="Shape 0"/>
-          <p:cNvSpPr/>
-          <p:nvPr/>
-        </p:nvSpPr>
-        <p:spPr>
-          <a:xfrm>
-            <a:off x="566928" y="502920"/>
-            <a:ext cx="137160" cy="137160"/>
-          </a:xfrm>
-          <a:prstGeom prst="ellipse">
-            <a:avLst/>
-          </a:prstGeom>
-          <a:solidFill>
-            <a:srgbClr val="E8A33D"/>
-          </a:solidFill>
-          <a:ln/>
-        </p:spPr>
-      </p:sp>
-      <p:sp>
-        <p:nvSpPr>
-          <p:cNvPr id="3" name="Text 1"/>
-          <p:cNvSpPr/>
-          <p:nvPr/>
-        </p:nvSpPr>
-        <p:spPr>
-          <a:xfrm>
-            <a:off x="795528" y="402336"/>
-            <a:ext cx="10515600" cy="310896"/>
-          </a:xfrm>
-          <a:prstGeom prst="rect">
-            <a:avLst/>
-          </a:prstGeom>
-          <a:noFill/>
-          <a:ln/>
-        </p:spPr>
-        <p:txBody>
-          <a:bodyPr wrap="square" lIns="0" tIns="0" rIns="0" bIns="0" rtlCol="0" anchor="ctr"/>
-          <a:lstStyle/>
-          <a:p>
-            <a:pPr indent="0" marL="0">
-              <a:buNone/>
-            </a:pPr>
-            <a:r>
-              <a:rPr lang="en-US" sz="1400" b="1" spc="200" kern="0" dirty="0">
-                <a:solidFill>
-                  <a:srgbClr val="12908F"/>
-                </a:solidFill>
-                <a:latin typeface="Calibri" pitchFamily="34" charset="0"/>
-                <a:ea typeface="Calibri" pitchFamily="34" charset="-122"/>
-                <a:cs typeface="Calibri" pitchFamily="34" charset="-120"/>
-              </a:rPr>
-              <a:t>ACT ON IT · 10 MIN</a:t>
-            </a:r>
-            <a:endParaRPr lang="en-US" sz="1400" dirty="0"/>
-          </a:p>
-        </p:txBody>
-      </p:sp>
-      <p:sp>
-        <p:nvSpPr>
-          <p:cNvPr id="4" name="Text 2"/>
-          <p:cNvSpPr/>
-          <p:nvPr/>
-        </p:nvSpPr>
-        <p:spPr>
-          <a:xfrm>
-            <a:off x="548640" y="749808"/>
-            <a:ext cx="11064240" cy="914400"/>
-          </a:xfrm>
-          <a:prstGeom prst="rect">
-            <a:avLst/>
-          </a:prstGeom>
-          <a:noFill/>
-          <a:ln/>
-        </p:spPr>
-        <p:txBody>
-          <a:bodyPr wrap="square" lIns="0" tIns="0" rIns="0" bIns="0" rtlCol="0" anchor="t"/>
-          <a:lstStyle/>
-          <a:p>
-            <a:pPr indent="0" marL="0">
-              <a:buNone/>
-            </a:pPr>
-            <a:r>
-              <a:rPr lang="en-US" sz="3100" b="1" dirty="0">
-                <a:solidFill>
-                  <a:srgbClr val="1E2A36"/>
-                </a:solidFill>
-                <a:latin typeface="Cambria" pitchFamily="34" charset="0"/>
-                <a:ea typeface="Cambria" pitchFamily="34" charset="-122"/>
-                <a:cs typeface="Cambria" pitchFamily="34" charset="-120"/>
-              </a:rPr>
-              <a:t>Read your sheet, then fix or file</a:t>
-            </a:r>
-            <a:endParaRPr lang="en-US" sz="3100" dirty="0"/>
-          </a:p>
-        </p:txBody>
-      </p:sp>
-      <p:sp>
-        <p:nvSpPr>
-          <p:cNvPr id="5" name="Shape 3"/>
-          <p:cNvSpPr/>
-          <p:nvPr/>
-        </p:nvSpPr>
-        <p:spPr>
-          <a:xfrm>
-            <a:off x="548640" y="1783080"/>
-            <a:ext cx="11064240" cy="960120"/>
-          </a:xfrm>
-          <a:prstGeom prst="roundRect">
-            <a:avLst>
-              <a:gd name="adj" fmla="val 8571"/>
-            </a:avLst>
-          </a:prstGeom>
-          <a:solidFill>
-            <a:srgbClr val="14233A"/>
-          </a:solidFill>
-          <a:ln/>
-          <a:effectLst>
-            <a:outerShdw sx="100000" sy="100000" kx="0" ky="0" algn="bl" rotWithShape="0" blurRad="88900" dist="38100" dir="5400000">
-              <a:srgbClr val="000000">
-                <a:alpha val="13000"/>
-              </a:srgbClr>
-            </a:outerShdw>
-          </a:effectLst>
-        </p:spPr>
-      </p:sp>
-      <p:sp>
-        <p:nvSpPr>
-          <p:cNvPr id="6" name="Text 4"/>
-          <p:cNvSpPr/>
-          <p:nvPr/>
-        </p:nvSpPr>
-        <p:spPr>
-          <a:xfrm>
-            <a:off x="868680" y="1783080"/>
-            <a:ext cx="10424160" cy="960120"/>
-          </a:xfrm>
-          <a:prstGeom prst="rect">
-            <a:avLst/>
-          </a:prstGeom>
-          <a:noFill/>
-          <a:ln/>
-        </p:spPr>
-        <p:txBody>
-          <a:bodyPr wrap="square" lIns="0" tIns="0" rIns="0" bIns="0" rtlCol="0" anchor="ctr"/>
-          <a:lstStyle/>
-          <a:p>
-            <a:pPr indent="0" marL="0">
-              <a:buNone/>
-            </a:pPr>
-            <a:r>
-              <a:rPr lang="en-US" sz="2000" b="1" dirty="0">
-                <a:solidFill>
-                  <a:srgbClr val="FFFFFF"/>
-                </a:solidFill>
-                <a:latin typeface="Cambria" pitchFamily="34" charset="0"/>
-                <a:ea typeface="Cambria" pitchFamily="34" charset="-122"/>
-                <a:cs typeface="Cambria" pitchFamily="34" charset="-120"/>
-              </a:rPr>
-              <a:t>If your partner's "what is this?" doesn't match what you meant, your first sentence isn't done.</a:t>
-            </a:r>
-            <a:endParaRPr lang="en-US" sz="2000" dirty="0"/>
-          </a:p>
-        </p:txBody>
-      </p:sp>
-      <p:sp>
-        <p:nvSpPr>
-          <p:cNvPr id="7" name="Shape 5"/>
-          <p:cNvSpPr/>
-          <p:nvPr/>
-        </p:nvSpPr>
-        <p:spPr>
-          <a:xfrm>
-            <a:off x="548640" y="2971800"/>
-            <a:ext cx="3566160" cy="3200400"/>
-          </a:xfrm>
-          <a:prstGeom prst="roundRect">
-            <a:avLst>
-              <a:gd name="adj" fmla="val 2571"/>
-            </a:avLst>
-          </a:prstGeom>
-          <a:solidFill>
-            <a:srgbClr val="F2F6F8"/>
-          </a:solidFill>
-          <a:ln/>
-          <a:effectLst>
-            <a:outerShdw sx="100000" sy="100000" kx="0" ky="0" algn="bl" rotWithShape="0" blurRad="88900" dist="38100" dir="5400000">
-              <a:srgbClr val="000000">
-                <a:alpha val="13000"/>
-              </a:srgbClr>
-            </a:outerShdw>
-          </a:effectLst>
-        </p:spPr>
-      </p:sp>
-      <p:sp>
-        <p:nvSpPr>
-          <p:cNvPr id="8" name="Shape 6"/>
-          <p:cNvSpPr/>
-          <p:nvPr/>
-        </p:nvSpPr>
-        <p:spPr>
-          <a:xfrm>
-            <a:off x="822960" y="3200400"/>
-            <a:ext cx="603504" cy="603504"/>
-          </a:xfrm>
-          <a:prstGeom prst="ellipse">
-            <a:avLst/>
-          </a:prstGeom>
-          <a:solidFill>
-            <a:srgbClr val="12908F"/>
-          </a:solidFill>
-          <a:ln/>
-        </p:spPr>
-      </p:sp>
-      <p:pic>
-        <p:nvPicPr>
-          <p:cNvPr id="9" name="Image 0" descr="preencoded.png">    </p:cNvPr>
-          <p:cNvPicPr>
-            <a:picLocks noChangeAspect="1"/>
-          </p:cNvPicPr>
-          <p:nvPr/>
-        </p:nvPicPr>
-        <p:blipFill>
-          <a:blip r:embed="rId1"/>
-          <a:stretch>
-            <a:fillRect/>
-          </a:stretch>
-        </p:blipFill>
-        <p:spPr>
-          <a:xfrm>
-            <a:off x="985906" y="3363346"/>
-            <a:ext cx="277612" cy="277612"/>
-          </a:xfrm>
-          <a:prstGeom prst="rect">
-            <a:avLst/>
-          </a:prstGeom>
-        </p:spPr>
-      </p:pic>
-      <p:sp>
-        <p:nvSpPr>
-          <p:cNvPr id="10" name="Text 7"/>
-          <p:cNvSpPr/>
-          <p:nvPr/>
-        </p:nvSpPr>
-        <p:spPr>
-          <a:xfrm>
-            <a:off x="1600200" y="3200400"/>
-            <a:ext cx="2377440" cy="603504"/>
-          </a:xfrm>
-          <a:prstGeom prst="rect">
-            <a:avLst/>
-          </a:prstGeom>
-          <a:noFill/>
-          <a:ln/>
-        </p:spPr>
-        <p:txBody>
-          <a:bodyPr wrap="square" lIns="0" tIns="0" rIns="0" bIns="0" rtlCol="0" anchor="ctr"/>
-          <a:lstStyle/>
-          <a:p>
-            <a:pPr indent="0" marL="0">
-              <a:buNone/>
-            </a:pPr>
-            <a:r>
-              <a:rPr lang="en-US" sz="1900" b="1" dirty="0">
-                <a:solidFill>
-                  <a:srgbClr val="1E2A36"/>
-                </a:solidFill>
-                <a:latin typeface="Calibri" pitchFamily="34" charset="0"/>
-                <a:ea typeface="Calibri" pitchFamily="34" charset="-122"/>
-                <a:cs typeface="Calibri" pitchFamily="34" charset="-120"/>
-              </a:rPr>
-              <a:t>Fix it or file it</a:t>
-            </a:r>
-            <a:endParaRPr lang="en-US" sz="1900" dirty="0"/>
-          </a:p>
-        </p:txBody>
-      </p:sp>
-      <p:sp>
-        <p:nvSpPr>
-          <p:cNvPr id="11" name="Text 8"/>
-          <p:cNvSpPr/>
-          <p:nvPr/>
-        </p:nvSpPr>
-        <p:spPr>
-          <a:xfrm>
-            <a:off x="822960" y="3977640"/>
-            <a:ext cx="3017520" cy="2103120"/>
-          </a:xfrm>
-          <a:prstGeom prst="rect">
-            <a:avLst/>
-          </a:prstGeom>
-          <a:noFill/>
-          <a:ln/>
-        </p:spPr>
-        <p:txBody>
-          <a:bodyPr wrap="square" lIns="0" tIns="0" rIns="0" bIns="0" rtlCol="0" anchor="t"/>
-          <a:lstStyle/>
-          <a:p>
-            <a:pPr indent="0" marL="0">
-              <a:lnSpc>
-                <a:spcPct val="103000"/>
-              </a:lnSpc>
-              <a:buNone/>
-            </a:pPr>
-            <a:r>
-              <a:rPr lang="en-US" sz="1550" dirty="0">
-                <a:solidFill>
-                  <a:srgbClr val="1E2A36"/>
-                </a:solidFill>
-                <a:latin typeface="Calibri" pitchFamily="34" charset="0"/>
-                <a:ea typeface="Calibri" pitchFamily="34" charset="-122"/>
-                <a:cs typeface="Calibri" pitchFamily="34" charset="-120"/>
-              </a:rPr>
-              <a:t>Under ten minutes: fix it now. Bigger: file an issue. Either way, write the number on the sheet and say "from the stranger's read" in the description.</a:t>
-            </a:r>
-            <a:endParaRPr lang="en-US" sz="1550" dirty="0"/>
-          </a:p>
-        </p:txBody>
-      </p:sp>
-      <p:sp>
-        <p:nvSpPr>
-          <p:cNvPr id="12" name="Shape 9"/>
-          <p:cNvSpPr/>
-          <p:nvPr/>
-        </p:nvSpPr>
-        <p:spPr>
-          <a:xfrm>
-            <a:off x="4297680" y="2971800"/>
-            <a:ext cx="3566160" cy="3200400"/>
-          </a:xfrm>
-          <a:prstGeom prst="roundRect">
-            <a:avLst>
-              <a:gd name="adj" fmla="val 2571"/>
-            </a:avLst>
-          </a:prstGeom>
-          <a:solidFill>
-            <a:srgbClr val="F2F6F8"/>
-          </a:solidFill>
-          <a:ln/>
-          <a:effectLst>
-            <a:outerShdw sx="100000" sy="100000" kx="0" ky="0" algn="bl" rotWithShape="0" blurRad="88900" dist="38100" dir="5400000">
-              <a:srgbClr val="000000">
-                <a:alpha val="13000"/>
-              </a:srgbClr>
-            </a:outerShdw>
-          </a:effectLst>
-        </p:spPr>
-      </p:sp>
-      <p:sp>
-        <p:nvSpPr>
-          <p:cNvPr id="13" name="Shape 10"/>
-          <p:cNvSpPr/>
-          <p:nvPr/>
-        </p:nvSpPr>
-        <p:spPr>
-          <a:xfrm>
-            <a:off x="4572000" y="3200400"/>
-            <a:ext cx="603504" cy="603504"/>
-          </a:xfrm>
-          <a:prstGeom prst="ellipse">
-            <a:avLst/>
-          </a:prstGeom>
-          <a:solidFill>
-            <a:srgbClr val="12908F"/>
-          </a:solidFill>
-          <a:ln/>
-        </p:spPr>
-      </p:sp>
-      <p:pic>
-        <p:nvPicPr>
-          <p:cNvPr id="14" name="Image 1" descr="preencoded.png">    </p:cNvPr>
-          <p:cNvPicPr>
-            <a:picLocks noChangeAspect="1"/>
-          </p:cNvPicPr>
-          <p:nvPr/>
-        </p:nvPicPr>
-        <p:blipFill>
-          <a:blip r:embed="rId2"/>
-          <a:stretch>
-            <a:fillRect/>
-          </a:stretch>
-        </p:blipFill>
-        <p:spPr>
-          <a:xfrm>
-            <a:off x="4734946" y="3363346"/>
-            <a:ext cx="277612" cy="277612"/>
-          </a:xfrm>
-          <a:prstGeom prst="rect">
-            <a:avLst/>
-          </a:prstGeom>
-        </p:spPr>
-      </p:pic>
-      <p:sp>
-        <p:nvSpPr>
-          <p:cNvPr id="15" name="Text 11"/>
-          <p:cNvSpPr/>
-          <p:nvPr/>
-        </p:nvSpPr>
-        <p:spPr>
-          <a:xfrm>
-            <a:off x="5349240" y="3200400"/>
-            <a:ext cx="2377440" cy="603504"/>
-          </a:xfrm>
-          <a:prstGeom prst="rect">
-            <a:avLst/>
-          </a:prstGeom>
-          <a:noFill/>
-          <a:ln/>
-        </p:spPr>
-        <p:txBody>
-          <a:bodyPr wrap="square" lIns="0" tIns="0" rIns="0" bIns="0" rtlCol="0" anchor="ctr"/>
-          <a:lstStyle/>
-          <a:p>
-            <a:pPr indent="0" marL="0">
-              <a:buNone/>
-            </a:pPr>
-            <a:r>
-              <a:rPr lang="en-US" sz="1900" b="1" dirty="0">
-                <a:solidFill>
-                  <a:srgbClr val="1E2A36"/>
-                </a:solidFill>
-                <a:latin typeface="Calibri" pitchFamily="34" charset="0"/>
-                <a:ea typeface="Calibri" pitchFamily="34" charset="-122"/>
-                <a:cs typeface="Calibri" pitchFamily="34" charset="-120"/>
-              </a:rPr>
-              <a:t>Seed the tracker</a:t>
-            </a:r>
-            <a:endParaRPr lang="en-US" sz="1900" dirty="0"/>
-          </a:p>
-        </p:txBody>
-      </p:sp>
-      <p:sp>
-        <p:nvSpPr>
-          <p:cNvPr id="16" name="Text 12"/>
-          <p:cNvSpPr/>
-          <p:nvPr/>
-        </p:nvSpPr>
-        <p:spPr>
-          <a:xfrm>
-            <a:off x="4572000" y="3977640"/>
-            <a:ext cx="3017520" cy="2103120"/>
-          </a:xfrm>
-          <a:prstGeom prst="rect">
-            <a:avLst/>
-          </a:prstGeom>
-          <a:noFill/>
-          <a:ln/>
-        </p:spPr>
-        <p:txBody>
-          <a:bodyPr wrap="square" lIns="0" tIns="0" rIns="0" bIns="0" rtlCol="0" anchor="t"/>
-          <a:lstStyle/>
-          <a:p>
-            <a:pPr indent="0" marL="0">
-              <a:lnSpc>
-                <a:spcPct val="103000"/>
-              </a:lnSpc>
-              <a:buNone/>
-            </a:pPr>
-            <a:r>
-              <a:rPr lang="en-US" sz="1550" dirty="0">
-                <a:solidFill>
-                  <a:srgbClr val="1E2A36"/>
-                </a:solidFill>
-                <a:latin typeface="Calibri" pitchFamily="34" charset="0"/>
-                <a:ea typeface="Calibri" pitchFamily="34" charset="-122"/>
-                <a:cs typeface="Calibri" pitchFamily="34" charset="-120"/>
-              </a:rPr>
-              <a:t>2–3 real next-work issues, written through your own templates. The setup-guide issue counts as one. They start Monday's backlog.</a:t>
-            </a:r>
-            <a:endParaRPr lang="en-US" sz="1550" dirty="0"/>
-          </a:p>
-        </p:txBody>
-      </p:sp>
-      <p:sp>
-        <p:nvSpPr>
-          <p:cNvPr id="17" name="Shape 13"/>
-          <p:cNvSpPr/>
-          <p:nvPr/>
-        </p:nvSpPr>
-        <p:spPr>
-          <a:xfrm>
-            <a:off x="8046720" y="2971800"/>
-            <a:ext cx="3566160" cy="3200400"/>
-          </a:xfrm>
-          <a:prstGeom prst="roundRect">
-            <a:avLst>
-              <a:gd name="adj" fmla="val 2571"/>
-            </a:avLst>
-          </a:prstGeom>
-          <a:solidFill>
-            <a:srgbClr val="F2F6F8"/>
-          </a:solidFill>
-          <a:ln/>
-          <a:effectLst>
-            <a:outerShdw sx="100000" sy="100000" kx="0" ky="0" algn="bl" rotWithShape="0" blurRad="88900" dist="38100" dir="5400000">
-              <a:srgbClr val="000000">
-                <a:alpha val="13000"/>
-              </a:srgbClr>
-            </a:outerShdw>
-          </a:effectLst>
-        </p:spPr>
-      </p:sp>
-      <p:sp>
-        <p:nvSpPr>
-          <p:cNvPr id="18" name="Shape 14"/>
-          <p:cNvSpPr/>
-          <p:nvPr/>
-        </p:nvSpPr>
-        <p:spPr>
-          <a:xfrm>
-            <a:off x="8321040" y="3200400"/>
-            <a:ext cx="603504" cy="603504"/>
-          </a:xfrm>
-          <a:prstGeom prst="ellipse">
-            <a:avLst/>
-          </a:prstGeom>
-          <a:solidFill>
-            <a:srgbClr val="12908F"/>
-          </a:solidFill>
-          <a:ln/>
-        </p:spPr>
-      </p:sp>
-      <p:pic>
-        <p:nvPicPr>
-          <p:cNvPr id="19" name="Image 2" descr="preencoded.png">    </p:cNvPr>
-          <p:cNvPicPr>
-            <a:picLocks noChangeAspect="1"/>
-          </p:cNvPicPr>
-          <p:nvPr/>
-        </p:nvPicPr>
-        <p:blipFill>
-          <a:blip r:embed="rId3"/>
-          <a:stretch>
-            <a:fillRect/>
-          </a:stretch>
-        </p:blipFill>
-        <p:spPr>
-          <a:xfrm>
-            <a:off x="8483986" y="3363346"/>
-            <a:ext cx="277612" cy="277612"/>
-          </a:xfrm>
-          <a:prstGeom prst="rect">
-            <a:avLst/>
-          </a:prstGeom>
-        </p:spPr>
-      </p:pic>
-      <p:sp>
-        <p:nvSpPr>
-          <p:cNvPr id="20" name="Text 15"/>
-          <p:cNvSpPr/>
-          <p:nvPr/>
-        </p:nvSpPr>
-        <p:spPr>
-          <a:xfrm>
-            <a:off x="9098280" y="3200400"/>
-            <a:ext cx="2377440" cy="603504"/>
-          </a:xfrm>
-          <a:prstGeom prst="rect">
-            <a:avLst/>
-          </a:prstGeom>
-          <a:noFill/>
-          <a:ln/>
-        </p:spPr>
-        <p:txBody>
-          <a:bodyPr wrap="square" lIns="0" tIns="0" rIns="0" bIns="0" rtlCol="0" anchor="ctr"/>
-          <a:lstStyle/>
-          <a:p>
-            <a:pPr indent="0" marL="0">
-              <a:buNone/>
-            </a:pPr>
-            <a:r>
-              <a:rPr lang="en-US" sz="1900" b="1" dirty="0">
-                <a:solidFill>
-                  <a:srgbClr val="1E2A36"/>
-                </a:solidFill>
-                <a:latin typeface="Calibri" pitchFamily="34" charset="0"/>
-                <a:ea typeface="Calibri" pitchFamily="34" charset="-122"/>
-                <a:cs typeface="Calibri" pitchFamily="34" charset="-120"/>
-              </a:rPr>
-              <a:t>Time left?</a:t>
-            </a:r>
-            <a:endParaRPr lang="en-US" sz="1900" dirty="0"/>
-          </a:p>
-        </p:txBody>
-      </p:sp>
-      <p:sp>
-        <p:nvSpPr>
-          <p:cNvPr id="21" name="Text 16"/>
-          <p:cNvSpPr/>
-          <p:nvPr/>
-        </p:nvSpPr>
-        <p:spPr>
-          <a:xfrm>
-            <a:off x="8321040" y="3977640"/>
-            <a:ext cx="3017520" cy="2103120"/>
-          </a:xfrm>
-          <a:prstGeom prst="rect">
-            <a:avLst/>
-          </a:prstGeom>
-          <a:noFill/>
-          <a:ln/>
-        </p:spPr>
-        <p:txBody>
-          <a:bodyPr wrap="square" lIns="0" tIns="0" rIns="0" bIns="0" rtlCol="0" anchor="t"/>
-          <a:lstStyle/>
-          <a:p>
-            <a:pPr indent="0" marL="0">
-              <a:lnSpc>
-                <a:spcPct val="103000"/>
-              </a:lnSpc>
-              <a:buNone/>
-            </a:pPr>
-            <a:r>
-              <a:rPr lang="en-US" sz="1550" dirty="0">
-                <a:solidFill>
-                  <a:srgbClr val="1E2A36"/>
-                </a:solidFill>
-                <a:latin typeface="Calibri" pitchFamily="34" charset="0"/>
-                <a:ea typeface="Calibri" pitchFamily="34" charset="-122"/>
-                <a:cs typeface="Calibri" pitchFamily="34" charset="-120"/>
-              </a:rPr>
-              <a:t>Review your partner's open PRs. Unfinished fixes carry to Friday; that's what the sheet is for.</a:t>
-            </a:r>
-            <a:endParaRPr lang="en-US" sz="1550" dirty="0"/>
-          </a:p>
-        </p:txBody>
-      </p:sp>
-      <p:sp>
-        <p:nvSpPr>
-          <p:cNvPr id="22" name="Text 17"/>
-          <p:cNvSpPr/>
-          <p:nvPr/>
-        </p:nvSpPr>
-        <p:spPr>
-          <a:xfrm>
-            <a:off x="6675120" y="6437376"/>
-            <a:ext cx="4937760" cy="274320"/>
-          </a:xfrm>
-          <a:prstGeom prst="rect">
-            <a:avLst/>
-          </a:prstGeom>
-          <a:noFill/>
-          <a:ln/>
-        </p:spPr>
-        <p:txBody>
-          <a:bodyPr wrap="square" lIns="0" tIns="0" rIns="0" bIns="0" rtlCol="0" anchor="ctr"/>
-          <a:lstStyle/>
-          <a:p>
-            <a:pPr algn="r" indent="0" marL="0">
-              <a:buNone/>
-            </a:pPr>
-            <a:r>
-              <a:rPr lang="en-US" sz="1000" dirty="0">
-                <a:solidFill>
-                  <a:srgbClr val="5F7284"/>
-                </a:solidFill>
-                <a:latin typeface="Calibri" pitchFamily="34" charset="0"/>
-                <a:ea typeface="Calibri" pitchFamily="34" charset="-122"/>
-                <a:cs typeface="Calibri" pitchFamily="34" charset="-120"/>
-              </a:rPr>
-              <a:t>CS 301R · Session 16 · Ship the Front Door</a:t>
-            </a:r>
-            <a:endParaRPr lang="en-US" sz="1000" dirty="0"/>
-          </a:p>
-        </p:txBody>
-      </p:sp>
-      <p:sp>
-        <p:nvSpPr>
-          <p:cNvPr id="23" name="Text 18"/>
-          <p:cNvSpPr/>
-          <p:nvPr/>
-        </p:nvSpPr>
-        <p:spPr>
-          <a:xfrm>
-            <a:off x="548640" y="6437376"/>
-            <a:ext cx="548640" cy="274320"/>
-          </a:xfrm>
-          <a:prstGeom prst="rect">
-            <a:avLst/>
-          </a:prstGeom>
-          <a:noFill/>
-          <a:ln/>
-        </p:spPr>
-        <p:txBody>
-          <a:bodyPr wrap="square" lIns="0" tIns="0" rIns="0" bIns="0" rtlCol="0" anchor="ctr"/>
-          <a:lstStyle/>
-          <a:p>
-            <a:pPr indent="0" marL="0">
-              <a:buNone/>
-            </a:pPr>
-            <a:r>
-              <a:rPr lang="en-US" sz="1000" dirty="0">
-                <a:solidFill>
-                  <a:srgbClr val="5F7284"/>
                 </a:solidFill>
                 <a:latin typeface="Calibri" pitchFamily="34" charset="0"/>
                 <a:ea typeface="Calibri" pitchFamily="34" charset="-122"/>

--- a/canvas_material/lectures/powerpoint/Session16-FrontDoorWorkshop.pptx
+++ b/canvas_material/lectures/powerpoint/Session16-FrontDoorWorkshop.pptx
@@ -6586,7 +6586,7 @@
                 <a:ea typeface="Calibri" pitchFamily="34" charset="-122"/>
                 <a:cs typeface="Calibri" pitchFamily="34" charset="-120"/>
               </a:rPr>
-              <a:t>Under ten minutes: fix it now. Bigger: file an issue. Either way, write the number on the sheet and say "from the stranger's read" in the description.</a:t>
+              <a:t>Under ten minutes: fix it now. Bigger: file an issue. Write the number on the sheet and say "from the stranger's read" in the description. Keep the sheet: finish the rest by Friday and photograph it for CP7.</a:t>
             </a:r>
             <a:endParaRPr lang="en-US" sz="1550" dirty="0"/>
           </a:p>
@@ -6894,7 +6894,7 @@
                 <a:ea typeface="Calibri" pitchFamily="34" charset="-122"/>
                 <a:cs typeface="Calibri" pitchFamily="34" charset="-120"/>
               </a:rPr>
-              <a:t>Review your partner's open PRs. Unfinished fixes carry to Friday; that's what the sheet is for.</a:t>
+              <a:t>Review your partner's open PRs. A real review comment is CP9 evidence; save the link.</a:t>
             </a:r>
             <a:endParaRPr lang="en-US" sz="1550" dirty="0"/>
           </a:p>
